--- a/docs/deck/SIH26102-MPLADS-SIH-Idea.pptx
+++ b/docs/deck/SIH26102-MPLADS-SIH-Idea.pptx
@@ -6468,7 +6468,7 @@
                 </a:solidFill>
                 <a:latin typeface="Calibri"/>
               </a:rPr>
-              <a:t>246,765 works, 270,934
+              <a:t>250,839 works, 272,263
 payments, 1,547 MP-terms</a:t>
             </a:r>
           </a:p>
@@ -6722,8 +6722,8 @@
                 </a:solidFill>
                 <a:latin typeface="Calibri"/>
               </a:rPr>
-              <a:t>5 work signals +
-4 cohort detectors</a:t>
+              <a:t>5 work signals, 4 cohort
+detectors, 4 written rules</a:t>
             </a:r>
           </a:p>
         </p:txBody>
@@ -6976,8 +6976,8 @@
                 </a:solidFill>
                 <a:latin typeface="Calibri"/>
               </a:rPr>
-              <a:t>A ranked queue officials
-triage and sign off</a:t>
+              <a:t>A ranked queue, and a trail
+of every decision on it</a:t>
             </a:r>
           </a:p>
         </p:txBody>
@@ -7149,7 +7149,7 @@
                 </a:solidFill>
                 <a:latin typeface="Calibri"/>
               </a:rPr>
-              <a:t>Reads the published MPLADS record end to end and scores every work against comparable works in the same district and sector. 48,687 works clear the review threshold, carrying Rs 4,618 Cr of sanction. Officials get them ranked, not a spreadsheet.</a:t>
+              <a:t>Reads the published MPLADS record end to end and scores every work against comparable works in the same district and sector. 48,542 works clear the review threshold, carrying Rs 4,662 Cr of sanction. Officials get them ranked, not a spreadsheet.</a:t>
             </a:r>
           </a:p>
         </p:txBody>
@@ -7296,7 +7296,7 @@
         <p:spPr>
           <a:xfrm>
             <a:off x="4526280" y="3571240"/>
-            <a:ext cx="3182112" cy="1487424"/>
+            <a:ext cx="3182112" cy="1673351"/>
           </a:xfrm>
           <a:prstGeom prst="rect">
             <a:avLst/>
@@ -7321,7 +7321,7 @@
                 </a:solidFill>
                 <a:latin typeface="Calibri"/>
               </a:rPr>
-              <a:t>Every flag names the record that produced it. Cohort patterns are kept at cohort grain instead of being blamed on one work. Reviewer decisions are pinned to a work identity that survives the nightly reload, so a verdict is never reattached to a different work.</a:t>
+              <a:t>Every flag names the record that produced it. Cohort patterns are kept at cohort grain instead of being blamed on one work. Reviewer decisions are pinned to a work identity that survives the nightly reload, so a verdict is never reattached to a different work, and every decision ever recorded on one survives the next.</a:t>
             </a:r>
           </a:p>
         </p:txBody>
@@ -7493,7 +7493,7 @@
                 </a:solidFill>
                 <a:latin typeface="Calibri"/>
               </a:rPr>
-              <a:t>A score is not an allegation - it means a work does not resemble its peers. No field is invented: progress %, beneficiary counts and geo-tags are not published for MPLADS, so they are not shown. No LLM can move a score; scoring is deterministic and auditable.</a:t>
+              <a:t>A score is not an allegation - it means a work does not resemble its peers. No field is invented: progress %, beneficiary counts and geo-tags are not published for MPLADS, so they are not shown. The rule book states what cannot be checked at all. No LLM can move a score.</a:t>
             </a:r>
           </a:p>
         </p:txBody>
@@ -7774,7 +7774,7 @@
         <p:spPr>
           <a:xfrm>
             <a:off x="612648" y="1783080"/>
-            <a:ext cx="2619756" cy="1481328"/>
+            <a:ext cx="2619756" cy="1371600"/>
           </a:xfrm>
           <a:prstGeom prst="roundRect">
             <a:avLst>
@@ -7949,7 +7949,7 @@
         <p:spPr>
           <a:xfrm>
             <a:off x="3396996" y="1783080"/>
-            <a:ext cx="2619756" cy="1481328"/>
+            <a:ext cx="2619756" cy="1371600"/>
           </a:xfrm>
           <a:prstGeom prst="roundRect">
             <a:avLst>
@@ -8124,7 +8124,7 @@
         <p:spPr>
           <a:xfrm>
             <a:off x="6181344" y="1783080"/>
-            <a:ext cx="2619756" cy="1481328"/>
+            <a:ext cx="2619756" cy="1371600"/>
           </a:xfrm>
           <a:prstGeom prst="roundRect">
             <a:avLst>
@@ -8299,7 +8299,7 @@
         <p:spPr>
           <a:xfrm>
             <a:off x="8965692" y="1783080"/>
-            <a:ext cx="2619756" cy="1481328"/>
+            <a:ext cx="2619756" cy="1371600"/>
           </a:xfrm>
           <a:prstGeom prst="roundRect">
             <a:avLst>
@@ -8473,7 +8473,7 @@
         </p:nvSpPr>
         <p:spPr>
           <a:xfrm>
-            <a:off x="612648" y="3483864"/>
+            <a:off x="612648" y="3337560"/>
             <a:ext cx="10972800" cy="201168"/>
           </a:xfrm>
           <a:prstGeom prst="rect">
@@ -8512,7 +8512,7 @@
         </p:nvSpPr>
         <p:spPr>
           <a:xfrm>
-            <a:off x="612648" y="3794760"/>
+            <a:off x="612648" y="3648456"/>
             <a:ext cx="2092147" cy="676656"/>
           </a:xfrm>
           <a:prstGeom prst="roundRect">
@@ -8560,7 +8560,7 @@
         </p:nvSpPr>
         <p:spPr>
           <a:xfrm>
-            <a:off x="740664" y="3877056"/>
+            <a:off x="740664" y="3730752"/>
             <a:ext cx="1836115" cy="274320"/>
           </a:xfrm>
           <a:prstGeom prst="rect">
@@ -8599,7 +8599,7 @@
         </p:nvSpPr>
         <p:spPr>
           <a:xfrm>
-            <a:off x="740664" y="4187952"/>
+            <a:off x="740664" y="4041648"/>
             <a:ext cx="1836115" cy="237744"/>
           </a:xfrm>
           <a:prstGeom prst="rect">
@@ -8638,7 +8638,7 @@
         </p:nvSpPr>
         <p:spPr>
           <a:xfrm>
-            <a:off x="2832811" y="3794760"/>
+            <a:off x="2832811" y="3648456"/>
             <a:ext cx="2092147" cy="676656"/>
           </a:xfrm>
           <a:prstGeom prst="roundRect">
@@ -8686,7 +8686,7 @@
         </p:nvSpPr>
         <p:spPr>
           <a:xfrm>
-            <a:off x="2960827" y="3877056"/>
+            <a:off x="2960827" y="3730752"/>
             <a:ext cx="1836115" cy="274320"/>
           </a:xfrm>
           <a:prstGeom prst="rect">
@@ -8725,7 +8725,7 @@
         </p:nvSpPr>
         <p:spPr>
           <a:xfrm>
-            <a:off x="2960827" y="4187952"/>
+            <a:off x="2960827" y="4041648"/>
             <a:ext cx="1836115" cy="237744"/>
           </a:xfrm>
           <a:prstGeom prst="rect">
@@ -8764,7 +8764,7 @@
         </p:nvSpPr>
         <p:spPr>
           <a:xfrm>
-            <a:off x="5052974" y="3794760"/>
+            <a:off x="5052974" y="3648456"/>
             <a:ext cx="2092147" cy="676656"/>
           </a:xfrm>
           <a:prstGeom prst="roundRect">
@@ -8812,7 +8812,7 @@
         </p:nvSpPr>
         <p:spPr>
           <a:xfrm>
-            <a:off x="5180990" y="3877056"/>
+            <a:off x="5180990" y="3730752"/>
             <a:ext cx="1836115" cy="274320"/>
           </a:xfrm>
           <a:prstGeom prst="rect">
@@ -8851,7 +8851,7 @@
         </p:nvSpPr>
         <p:spPr>
           <a:xfrm>
-            <a:off x="5180990" y="4187952"/>
+            <a:off x="5180990" y="4041648"/>
             <a:ext cx="1836115" cy="237744"/>
           </a:xfrm>
           <a:prstGeom prst="rect">
@@ -8890,7 +8890,7 @@
         </p:nvSpPr>
         <p:spPr>
           <a:xfrm>
-            <a:off x="7273137" y="3794760"/>
+            <a:off x="7273137" y="3648456"/>
             <a:ext cx="2092147" cy="676656"/>
           </a:xfrm>
           <a:prstGeom prst="roundRect">
@@ -8938,7 +8938,7 @@
         </p:nvSpPr>
         <p:spPr>
           <a:xfrm>
-            <a:off x="7401153" y="3877056"/>
+            <a:off x="7401153" y="3730752"/>
             <a:ext cx="1836115" cy="274320"/>
           </a:xfrm>
           <a:prstGeom prst="rect">
@@ -8977,7 +8977,7 @@
         </p:nvSpPr>
         <p:spPr>
           <a:xfrm>
-            <a:off x="7401153" y="4187952"/>
+            <a:off x="7401153" y="4041648"/>
             <a:ext cx="1836115" cy="237744"/>
           </a:xfrm>
           <a:prstGeom prst="rect">
@@ -9016,7 +9016,7 @@
         </p:nvSpPr>
         <p:spPr>
           <a:xfrm>
-            <a:off x="9493300" y="3794760"/>
+            <a:off x="9493300" y="3648456"/>
             <a:ext cx="2092147" cy="676656"/>
           </a:xfrm>
           <a:prstGeom prst="roundRect">
@@ -9064,7 +9064,7 @@
         </p:nvSpPr>
         <p:spPr>
           <a:xfrm>
-            <a:off x="9621316" y="3877056"/>
+            <a:off x="9621316" y="3730752"/>
             <a:ext cx="1836115" cy="274320"/>
           </a:xfrm>
           <a:prstGeom prst="rect">
@@ -9103,7 +9103,7 @@
         </p:nvSpPr>
         <p:spPr>
           <a:xfrm>
-            <a:off x="9621316" y="4187952"/>
+            <a:off x="9621316" y="4041648"/>
             <a:ext cx="1836115" cy="237744"/>
           </a:xfrm>
           <a:prstGeom prst="rect">
@@ -9142,7 +9142,7 @@
         </p:nvSpPr>
         <p:spPr>
           <a:xfrm>
-            <a:off x="612648" y="4690872"/>
+            <a:off x="612648" y="4544568"/>
             <a:ext cx="10972800" cy="201168"/>
           </a:xfrm>
           <a:prstGeom prst="rect">
@@ -9181,7 +9181,7 @@
         </p:nvSpPr>
         <p:spPr>
           <a:xfrm>
-            <a:off x="612648" y="5001768"/>
+            <a:off x="612648" y="4855464"/>
             <a:ext cx="2647188" cy="676656"/>
           </a:xfrm>
           <a:prstGeom prst="roundRect">
@@ -9229,7 +9229,7 @@
         </p:nvSpPr>
         <p:spPr>
           <a:xfrm>
-            <a:off x="740664" y="5084064"/>
+            <a:off x="740664" y="4937759"/>
             <a:ext cx="2391156" cy="274320"/>
           </a:xfrm>
           <a:prstGeom prst="rect">
@@ -9268,7 +9268,7 @@
         </p:nvSpPr>
         <p:spPr>
           <a:xfrm>
-            <a:off x="740664" y="5394960"/>
+            <a:off x="740664" y="5248655"/>
             <a:ext cx="2391156" cy="237744"/>
           </a:xfrm>
           <a:prstGeom prst="rect">
@@ -9307,7 +9307,7 @@
         </p:nvSpPr>
         <p:spPr>
           <a:xfrm>
-            <a:off x="3387852" y="5001768"/>
+            <a:off x="3387852" y="4855464"/>
             <a:ext cx="2647188" cy="676656"/>
           </a:xfrm>
           <a:prstGeom prst="roundRect">
@@ -9355,7 +9355,7 @@
         </p:nvSpPr>
         <p:spPr>
           <a:xfrm>
-            <a:off x="3515868" y="5084064"/>
+            <a:off x="3515868" y="4937759"/>
             <a:ext cx="2391156" cy="274320"/>
           </a:xfrm>
           <a:prstGeom prst="rect">
@@ -9394,7 +9394,7 @@
         </p:nvSpPr>
         <p:spPr>
           <a:xfrm>
-            <a:off x="3515868" y="5394960"/>
+            <a:off x="3515868" y="5248655"/>
             <a:ext cx="2391156" cy="237744"/>
           </a:xfrm>
           <a:prstGeom prst="rect">
@@ -9433,7 +9433,7 @@
         </p:nvSpPr>
         <p:spPr>
           <a:xfrm>
-            <a:off x="6163056" y="5001768"/>
+            <a:off x="6163056" y="4855464"/>
             <a:ext cx="2647188" cy="676656"/>
           </a:xfrm>
           <a:prstGeom prst="roundRect">
@@ -9481,7 +9481,7 @@
         </p:nvSpPr>
         <p:spPr>
           <a:xfrm>
-            <a:off x="6291072" y="5084064"/>
+            <a:off x="6291072" y="4937759"/>
             <a:ext cx="2391156" cy="274320"/>
           </a:xfrm>
           <a:prstGeom prst="rect">
@@ -9507,7 +9507,7 @@
                 </a:solidFill>
                 <a:latin typeface="Consolas"/>
               </a:rPr>
-              <a:t>297 findings</a:t>
+              <a:t>255 findings</a:t>
             </a:r>
           </a:p>
         </p:txBody>
@@ -9520,7 +9520,7 @@
         </p:nvSpPr>
         <p:spPr>
           <a:xfrm>
-            <a:off x="6291072" y="5394960"/>
+            <a:off x="6291072" y="5248655"/>
             <a:ext cx="2391156" cy="237744"/>
           </a:xfrm>
           <a:prstGeom prst="rect">
@@ -9559,7 +9559,7 @@
         </p:nvSpPr>
         <p:spPr>
           <a:xfrm>
-            <a:off x="8938260" y="5001768"/>
+            <a:off x="8938260" y="4855464"/>
             <a:ext cx="2647188" cy="676656"/>
           </a:xfrm>
           <a:prstGeom prst="roundRect">
@@ -9607,7 +9607,7 @@
         </p:nvSpPr>
         <p:spPr>
           <a:xfrm>
-            <a:off x="9066276" y="5084064"/>
+            <a:off x="9066276" y="4937759"/>
             <a:ext cx="2391156" cy="274320"/>
           </a:xfrm>
           <a:prstGeom prst="rect">
@@ -9633,7 +9633,7 @@
                 </a:solidFill>
                 <a:latin typeface="Consolas"/>
               </a:rPr>
-              <a:t>214 findings</a:t>
+              <a:t>209 findings</a:t>
             </a:r>
           </a:p>
         </p:txBody>
@@ -9646,7 +9646,7 @@
         </p:nvSpPr>
         <p:spPr>
           <a:xfrm>
-            <a:off x="9066276" y="5394960"/>
+            <a:off x="9066276" y="5248655"/>
             <a:ext cx="2391156" cy="237744"/>
           </a:xfrm>
           <a:prstGeom prst="rect">
@@ -9673,6 +9673,93 @@
                 <a:latin typeface="Calibri"/>
               </a:rPr>
               <a:t>D-04 Uniform amount</a:t>
+            </a:r>
+          </a:p>
+        </p:txBody>
+      </p:sp>
+      <p:sp>
+        <p:nvSpPr>
+          <p:cNvPr id="17456" name="Rounded Rectangle 17455"/>
+          <p:cNvSpPr/>
+          <p:nvPr/>
+        </p:nvSpPr>
+        <p:spPr>
+          <a:xfrm>
+            <a:off x="612648" y="5696712"/>
+            <a:ext cx="10972800" cy="566928"/>
+          </a:xfrm>
+          <a:prstGeom prst="roundRect">
+            <a:avLst>
+              <a:gd name="adj" fmla="val 6000"/>
+            </a:avLst>
+          </a:prstGeom>
+          <a:solidFill>
+            <a:srgbClr val="F5F7FA"/>
+          </a:solidFill>
+          <a:ln w="9525">
+            <a:solidFill>
+              <a:srgbClr val="D6DCE5"/>
+            </a:solidFill>
+          </a:ln>
+          <a:effectLst/>
+        </p:spPr>
+        <p:style>
+          <a:lnRef idx="1">
+            <a:schemeClr val="accent1"/>
+          </a:lnRef>
+          <a:fillRef idx="3">
+            <a:schemeClr val="accent1"/>
+          </a:fillRef>
+          <a:effectRef idx="2">
+            <a:schemeClr val="accent1"/>
+          </a:effectRef>
+          <a:fontRef idx="minor">
+            <a:schemeClr val="lt1"/>
+          </a:fontRef>
+        </p:style>
+        <p:txBody>
+          <a:bodyPr rtlCol="0" anchor="ctr"/>
+          <a:lstStyle/>
+          <a:p>
+            <a:pPr algn="ctr"/>
+          </a:p>
+        </p:txBody>
+      </p:sp>
+      <p:sp>
+        <p:nvSpPr>
+          <p:cNvPr id="17457" name="TextBox 17456"/>
+          <p:cNvSpPr txBox="1"/>
+          <p:nvPr/>
+        </p:nvSpPr>
+        <p:spPr>
+          <a:xfrm>
+            <a:off x="758952" y="5806440"/>
+            <a:ext cx="10680192" cy="365760"/>
+          </a:xfrm>
+          <a:prstGeom prst="rect">
+            <a:avLst/>
+          </a:prstGeom>
+          <a:noFill/>
+        </p:spPr>
+        <p:txBody>
+          <a:bodyPr wrap="square" lIns="0" rIns="0" tIns="0" bIns="0">
+            <a:spAutoFit/>
+          </a:bodyPr>
+          <a:lstStyle/>
+          <a:p>
+            <a:pPr>
+              <a:lnSpc>
+                <a:spcPct val="128000"/>
+              </a:lnSpc>
+            </a:pPr>
+            <a:r>
+              <a:rPr sz="1000" b="0">
+                <a:solidFill>
+                  <a:srgbClr val="5A6472"/>
+                </a:solidFill>
+                <a:latin typeface="Calibri"/>
+              </a:rPr>
+              <a:t>Four compliance rules, each published with the exact condition it tests — including the one that cannot fire, because the source publishes a single figure per completed work that serves as both sanction and expenditure.</a:t>
             </a:r>
           </a:p>
         </p:txBody>
@@ -10216,7 +10303,7 @@
                 </a:solidFill>
                 <a:latin typeface="Calibri"/>
               </a:rPr>
-              <a:t>Not a proposal — already built, deployed and refreshing nightly: 246,765 works scored, Rs 6,341 Cr reconciled, live at mplads-risk-monitor-web.vercel.app</a:t>
+              <a:t>Not a proposal — already built, deployed and refreshing nightly: 250,839 works scored, all 36 states reconciled against the source, live at mplads-risk-monitor-web.vercel.app</a:t>
             </a:r>
           </a:p>
         </p:txBody>
@@ -11207,7 +11294,7 @@
                 </a:solidFill>
                 <a:latin typeface="Consolas"/>
               </a:rPr>
-              <a:t>246,765</a:t>
+              <a:t>250,839</a:t>
             </a:r>
           </a:p>
         </p:txBody>
@@ -11333,7 +11420,7 @@
                 </a:solidFill>
                 <a:latin typeface="Consolas"/>
               </a:rPr>
-              <a:t>Rs 6,341 Cr</a:t>
+              <a:t>Rs 11,682 Cr</a:t>
             </a:r>
           </a:p>
         </p:txBody>
@@ -11372,7 +11459,7 @@
                 </a:solidFill>
                 <a:latin typeface="Calibri"/>
               </a:rPr>
-              <a:t>expenditure reconciled</a:t>
+              <a:t>allocated, 18th Lok Sabha</a:t>
             </a:r>
           </a:p>
         </p:txBody>
@@ -11459,7 +11546,7 @@
                 </a:solidFill>
                 <a:latin typeface="Consolas"/>
               </a:rPr>
-              <a:t>48,687</a:t>
+              <a:t>48,542</a:t>
             </a:r>
           </a:p>
         </p:txBody>
@@ -11585,7 +11672,7 @@
                 </a:solidFill>
                 <a:latin typeface="Consolas"/>
               </a:rPr>
-              <a:t>Rs 4,618 Cr</a:t>
+              <a:t>Rs 4,662 Cr</a:t>
             </a:r>
           </a:p>
         </p:txBody>
@@ -11711,7 +11798,7 @@
                 </a:solidFill>
                 <a:latin typeface="Consolas"/>
               </a:rPr>
-              <a:t>959</a:t>
+              <a:t>912</a:t>
             </a:r>
           </a:p>
         </p:txBody>
@@ -12241,7 +12328,7 @@
         <p:spPr>
           <a:xfrm>
             <a:off x="6373368" y="3157728"/>
-            <a:ext cx="2267712" cy="488060"/>
+            <a:ext cx="2267712" cy="650748"/>
           </a:xfrm>
           <a:prstGeom prst="rect">
             <a:avLst/>
@@ -12266,7 +12353,7 @@
                 </a:solidFill>
                 <a:latin typeface="Calibri"/>
               </a:rPr>
-              <a:t>Compares agencies on delay, vendor concentration and year-end bunching across districts.</a:t>
+              <a:t>Ranks all 36 states and UTs on money committed against money paid, then drops straight into that state's queue.</a:t>
             </a:r>
           </a:p>
         </p:txBody>
@@ -13063,9 +13150,9 @@
                 </a:solidFill>
                 <a:latin typeface="Calibri"/>
               </a:rPr>
-              <a:t>MPLADS programme data via Empowered Indian (empoweredindian.in), which aggregates the official MoSPI portal at mplads.mospi.gov.in — 246,765 works, 270,934 payments, 1,547 MP-terms across 776 districts and 62,680 vendors.
+              <a:t>MPLADS programme data via Empowered Indian (empoweredindian.in), which aggregates the official MoSPI portal at mplads.mospi.gov.in — 250,839 works, 272,263 payments, 1,547 MP-terms across 776 districts and 62,969 vendors.
 MPLADS Guidelines, Ministry of Statistics and Programme Implementation: permissible works, sanction ceilings and the annual entitlement per MP.
-Reconciled against the source's own published totals; 3,121 rows rejected and recorded rather than silently dropped.</a:t>
+Reconciled against the source's own published totals; 4,372 rows rejected and recorded rather than silently dropped.</a:t>
             </a:r>
           </a:p>
         </p:txBody>

--- a/docs/deck/SIH26102-MPLADS-SIH-Idea.pptx
+++ b/docs/deck/SIH26102-MPLADS-SIH-Idea.pptx
@@ -5868,7 +5868,7 @@
                 </a:solidFill>
                 <a:latin typeface="Calibri"/>
               </a:rPr>
-              <a:t>An AI-powered monitoring system that reads MPLADS project data, detects suspicious patterns/anomalies and inefficiencies, assigns a risk score, and helps authorities decide which projects need verification.</a:t>
+              <a:t>Development of an AI-powered system to detect anomalies, fraud, and inefficiencies in MPLAD Scheme implementation regd.</a:t>
             </a:r>
           </a:p>
           <a:p>
@@ -5896,7 +5896,7 @@
                 </a:solidFill>
                 <a:latin typeface="Calibri"/>
               </a:rPr>
-              <a:t>&lt;Theme as listed on the portal&gt;</a:t>
+              <a:t>Smart Automation</a:t>
             </a:r>
           </a:p>
           <a:p>
@@ -6067,7 +6067,7 @@
                 <a:ea typeface="ＭＳ Ｐゴシック" pitchFamily="1" charset="-128"/>
                 <a:cs typeface="Times New Roman" panose="02020603050405020304" pitchFamily="18" charset="0"/>
               </a:rPr>
-              <a:t>MPLADS RISK MONITOR</a:t>
+              <a:t>KASAUTI</a:t>
             </a:r>
           </a:p>
         </p:txBody>
@@ -7110,7 +7110,7 @@
                 </a:solidFill>
                 <a:latin typeface="Calibri"/>
               </a:rPr>
-              <a:t>How it addresses the problem</a:t>
+              <a:t>Kasauti — the touchstone</a:t>
             </a:r>
           </a:p>
         </p:txBody>
@@ -7124,7 +7124,7 @@
         <p:spPr>
           <a:xfrm>
             <a:off x="813816" y="3571240"/>
-            <a:ext cx="3182112" cy="1301496"/>
+            <a:ext cx="3182112" cy="2045207"/>
           </a:xfrm>
           <a:prstGeom prst="rect">
             <a:avLst/>
@@ -7149,7 +7149,7 @@
                 </a:solidFill>
                 <a:latin typeface="Calibri"/>
               </a:rPr>
-              <a:t>Reads the published MPLADS record end to end and scores every work against comparable works in the same district and sector. 48,542 works clear the review threshold, carrying Rs 4,662 Cr of sanction. Officials get them ranked, not a spreadsheet.</a:t>
+              <a:t>A jeweller rubs gold against a kasauti and reads the streak: the stone says which pieces are worth assaying, never which are false. This reads the published MPLADS record end to end and scores every work against comparable works in the same district and sector. 48,542 clear the review threshold, carrying Rs 4,662 Cr of sanction. Officials get them ranked, not a spreadsheet.</a:t>
             </a:r>
           </a:p>
         </p:txBody>
@@ -7468,7 +7468,7 @@
         <p:spPr>
           <a:xfrm>
             <a:off x="8238744" y="3571240"/>
-            <a:ext cx="3182112" cy="1487424"/>
+            <a:ext cx="3182112" cy="1859280"/>
           </a:xfrm>
           <a:prstGeom prst="rect">
             <a:avLst/>
@@ -7493,7 +7493,7 @@
                 </a:solidFill>
                 <a:latin typeface="Calibri"/>
               </a:rPr>
-              <a:t>A score is not an allegation - it means a work does not resemble its peers. No field is invented: progress %, beneficiary counts and geo-tags are not published for MPLADS, so they are not shown. The rule book states what cannot be checked at all. No LLM can move a score.</a:t>
+              <a:t>A score is not an allegation - it means a work does not resemble its peers. No field is invented: progress %, beneficiary counts and geo-tags are not published, so they are not shown. The rule book states what cannot be checked at all. A language model only labels what a work is, so it meets the right peers; it never scores or flags anything.</a:t>
             </a:r>
           </a:p>
         </p:txBody>
@@ -7935,7 +7935,7 @@
               <a:t>MiniLM sentence transformer
 Isolation Forest
 Benford + HHI statistics
-pandas, scikit-learn</a:t>
+Gemini sector labelling</a:t>
             </a:r>
           </a:p>
         </p:txBody>
@@ -8459,7 +8459,7 @@
               </a:rPr>
               <a:t>Vercel, two projects
 GitHub Actions nightly
-85 automated tests
+127 automated tests
 Live since day one</a:t>
             </a:r>
           </a:p>
@@ -10303,7 +10303,7 @@
                 </a:solidFill>
                 <a:latin typeface="Calibri"/>
               </a:rPr>
-              <a:t>Not a proposal — already built, deployed and refreshing nightly: 250,839 works scored, all 36 states reconciled against the source, live at mplads-risk-monitor-web.vercel.app</a:t>
+              <a:t>Not a proposal - already built, deployed and refreshing nightly: 250,839 works scored, all 36 states reconciled against the official MoSPI dashboard to within 3.5%, live at mplads-risk-monitor-web.vercel.app</a:t>
             </a:r>
           </a:p>
         </p:txBody>
@@ -10475,7 +10475,7 @@
                 </a:solidFill>
                 <a:latin typeface="Calibri"/>
               </a:rPr>
-              <a:t>The data is already public and machine-readable: four CSVs, refreshed nightly by a scheduled job that loads in 2 minutes and scores in about 20. No ministry integration, no new reporting burden on any officer, no hardware. 85 automated tests run against the pipeline and the API.</a:t>
+              <a:t>The data is already public and machine-readable: four CSVs, refreshed nightly by a scheduled job that loads in 2 minutes and scores in about 20. No ministry integration, no new reporting burden on any officer, no hardware. 127 automated tests run against the pipeline and the API.</a:t>
             </a:r>
           </a:p>
         </p:txBody>
@@ -11984,7 +11984,7 @@
         <p:spPr>
           <a:xfrm>
             <a:off x="813816" y="3157728"/>
-            <a:ext cx="2267712" cy="650748"/>
+            <a:ext cx="2267712" cy="813435"/>
           </a:xfrm>
           <a:prstGeom prst="rect">
             <a:avLst/>
@@ -12009,7 +12009,7 @@
                 </a:solidFill>
                 <a:latin typeface="Calibri"/>
               </a:rPr>
-              <a:t>Sees which of their own recommendations are stalling, and how much of the allocation is still idle.</a:t>
+              <a:t>Their own page: what they recommended, what got built, how much allocation was never committed to any work, and which of it is flagged.</a:t>
             </a:r>
           </a:p>
         </p:txBody>
@@ -12156,7 +12156,7 @@
         <p:spPr>
           <a:xfrm>
             <a:off x="3593592" y="3157728"/>
-            <a:ext cx="2267712" cy="650748"/>
+            <a:ext cx="2267712" cy="813435"/>
           </a:xfrm>
           <a:prstGeom prst="rect">
             <a:avLst/>
@@ -12181,7 +12181,7 @@
                 </a:solidFill>
                 <a:latin typeface="Calibri"/>
               </a:rPr>
-              <a:t>Gets a ranked shortlist instead of a register, with the evidence for each flag already assembled.</a:t>
+              <a:t>A district desk led by the implementing agencies it supervises, with vendor concentration and a ranked shortlist instead of a register.</a:t>
             </a:r>
           </a:p>
         </p:txBody>
@@ -12328,7 +12328,7 @@
         <p:spPr>
           <a:xfrm>
             <a:off x="6373368" y="3157728"/>
-            <a:ext cx="2267712" cy="650748"/>
+            <a:ext cx="2267712" cy="813435"/>
           </a:xfrm>
           <a:prstGeom prst="rect">
             <a:avLst/>
@@ -12353,7 +12353,7 @@
                 </a:solidFill>
                 <a:latin typeface="Calibri"/>
               </a:rPr>
-              <a:t>Ranks all 36 states and UTs on money committed against money paid, then drops straight into that state's queue.</a:t>
+              <a:t>A state desk ranking every district by the queue it has to clear, and all 36 states on money committed against money paid.</a:t>
             </a:r>
           </a:p>
         </p:txBody>
@@ -12500,7 +12500,7 @@
         <p:spPr>
           <a:xfrm>
             <a:off x="9153144" y="3157728"/>
-            <a:ext cx="2267712" cy="650748"/>
+            <a:ext cx="2267712" cy="813435"/>
           </a:xfrm>
           <a:prstGeom prst="rect">
             <a:avLst/>
@@ -12525,7 +12525,7 @@
                 </a:solidFill>
                 <a:latin typeface="Calibri"/>
               </a:rPr>
-              <a:t>Sees national patterns and where scheme rules are breaking, without waiting for a manual audit.</a:t>
+              <a:t>National patterns, the compliance rule book and a provenance page reconciling every headline figure against the Ministry's own dashboard.</a:t>
             </a:r>
           </a:p>
         </p:txBody>
@@ -13150,9 +13150,9 @@
                 </a:solidFill>
                 <a:latin typeface="Calibri"/>
               </a:rPr>
-              <a:t>MPLADS programme data via Empowered Indian (empoweredindian.in), which aggregates the official MoSPI portal at mplads.mospi.gov.in — 250,839 works, 272,263 payments, 1,547 MP-terms across 776 districts and 62,969 vendors.
+              <a:t>MPLADS programme data via Empowered Indian (empoweredindian.in), which aggregates the official MoSPI portal at mplads.mospi.gov.in - 250,839 works, 272,263 payments, 1,547 MP-terms across 776 districts and 62,969 vendors.
 MPLADS Guidelines, Ministry of Statistics and Programme Implementation: permissible works, sanction ceilings and the annual entitlement per MP.
-Reconciled against the source's own published totals; 4,372 rows rejected and recorded rather than silently dropped.</a:t>
+Reconciled against the source's own published totals; 4,789 rows rejected and recorded rather than silently dropped.</a:t>
             </a:r>
           </a:p>
         </p:txBody>

--- a/docs/deck/SIH26102-MPLADS-SIH-Idea.pptx
+++ b/docs/deck/SIH26102-MPLADS-SIH-Idea.pptx
@@ -7149,7 +7149,7 @@
                 </a:solidFill>
                 <a:latin typeface="Calibri"/>
               </a:rPr>
-              <a:t>A jeweller rubs gold against a kasauti and reads the streak: the stone says which pieces are worth assaying, never which are false. This reads the published MPLADS record end to end and scores every work against comparable works in the same district and sector. 48,542 clear the review threshold, carrying Rs 4,662 Cr of sanction. Officials get them ranked, not a spreadsheet.</a:t>
+              <a:t>A jeweller rubs gold against a kasauti and reads the streak: the stone says which pieces are worth assaying, never which are false. This reads the published MPLADS record end to end and scores every work against comparable works in the same district and sector. 47,471 clear the review threshold, carrying Rs 4,602 Cr of sanction. Officials get them ranked, not a spreadsheet.</a:t>
             </a:r>
           </a:p>
         </p:txBody>
@@ -11546,7 +11546,7 @@
                 </a:solidFill>
                 <a:latin typeface="Consolas"/>
               </a:rPr>
-              <a:t>48,542</a:t>
+              <a:t>47,471</a:t>
             </a:r>
           </a:p>
         </p:txBody>
@@ -11672,7 +11672,7 @@
                 </a:solidFill>
                 <a:latin typeface="Consolas"/>
               </a:rPr>
-              <a:t>Rs 4,662 Cr</a:t>
+              <a:t>Rs 4,602 Cr</a:t>
             </a:r>
           </a:p>
         </p:txBody>

--- a/docs/deck/SIH26102-MPLADS-SIH-Idea.pptx
+++ b/docs/deck/SIH26102-MPLADS-SIH-Idea.pptx
@@ -10303,7 +10303,7 @@
                 </a:solidFill>
                 <a:latin typeface="Calibri"/>
               </a:rPr>
-              <a:t>Not a proposal - already built, deployed and refreshing nightly: 250,839 works scored, all 36 states reconciled against the official MoSPI dashboard to within 3.5%, live at mplads-risk-monitor-web.vercel.app</a:t>
+              <a:t>Not a proposal - already built, deployed and refreshing nightly: 250,839 works scored, all 36 states reconciled against the official MoSPI dashboard to within 3.6%, live at mplads-risk-monitor-web.vercel.app</a:t>
             </a:r>
           </a:p>
         </p:txBody>
@@ -13111,7 +13111,7 @@
                 </a:solidFill>
                 <a:latin typeface="Calibri"/>
               </a:rPr>
-              <a:t>Data and scheme rules</a:t>
+              <a:t>The designated dataset, and what it serves</a:t>
             </a:r>
           </a:p>
         </p:txBody>
@@ -13125,7 +13125,7 @@
         <p:spPr>
           <a:xfrm>
             <a:off x="813816" y="2217928"/>
-            <a:ext cx="5029200" cy="1533906"/>
+            <a:ext cx="5029200" cy="2788920"/>
           </a:xfrm>
           <a:prstGeom prst="rect">
             <a:avLst/>
@@ -13144,15 +13144,15 @@
               </a:lnSpc>
             </a:pPr>
             <a:r>
-              <a:rPr sz="1100" b="0">
+              <a:rPr sz="1000" b="0">
                 <a:solidFill>
                   <a:srgbClr val="5A6472"/>
                 </a:solidFill>
                 <a:latin typeface="Calibri"/>
               </a:rPr>
-              <a:t>MPLADS programme data via Empowered Indian (empoweredindian.in), which aggregates the official MoSPI portal at mplads.mospi.gov.in - 250,839 works, 272,263 payments, 1,547 MP-terms across 776 districts and 62,969 vendors.
-MPLADS Guidelines, Ministry of Statistics and Programme Implementation: permissible works, sanction ceilings and the annual entitlement per MP.
-Reconciled against the source's own published totals; 4,789 rows rejected and recorded rather than silently dropped.</a:t>
+              <a:t>The problem statement names mplads.mospi.gov.in. Its public interface, enumerated from its own JavaScript and called directly: totals, states, districts and member names are open to anyone. Works are not. Completed works come only through a citizen rating form that needs an SMS one-time password on an Indian mobile, returns one member's works in one ward per call, and is rate limited. Recommended works, payments and vendors are not served at all; every other path answers 302 to the login page.
+Empowered Indian republishes that record as machine-readable exports. Its own uploader reads the State Bank disbursement portal that MPLADS money is paid through, with a signed-in session cookie at one request every three seconds.
+So this system loads those exports - 250,839 works, 272,263 payments, 1,547 MP-terms, 776 districts, 62,969 vendors - and reconciles against the official endpoints on every refresh: five figures within 3.6%, every gap negative because our snapshot trails a portal that gains works overnight. 4,789 rows rejected and recorded, not silently dropped.</a:t>
             </a:r>
           </a:p>
         </p:txBody>
@@ -13299,7 +13299,7 @@
         <p:spPr>
           <a:xfrm>
             <a:off x="6391656" y="2217928"/>
-            <a:ext cx="5029200" cy="1533906"/>
+            <a:ext cx="5029200" cy="1874773"/>
           </a:xfrm>
           <a:prstGeom prst="rect">
             <a:avLst/>
@@ -13327,7 +13327,8 @@
               <a:t>Liu, Ting and Zhou (2008), Isolation Forest — multivariate outliers over amount, delay and spend.
 Reimers and Gurevych (2019), Sentence-BERT — all-MiniLM-L6-v2 embeddings, cosine 0.94 within a district and sector, for duplicate sanctions.
 Newcomb-Benford first-digit law, with Nigrini's MAD — used peer-relative, because the population itself does not conform.
-Herfindahl-Hirschman Index — vendor concentration per implementing agency.</a:t>
+Herfindahl-Hirschman Index - vendor concentration per implementing agency.
+MPLADS Guidelines, MoSPI - permissible works, sanction ceilings, entitlement per MP.</a:t>
             </a:r>
           </a:p>
         </p:txBody>

--- a/docs/deck/SIH26102-MPLADS-SIH-Idea.pptx
+++ b/docs/deck/SIH26102-MPLADS-SIH-Idea.pptx
@@ -7149,7 +7149,7 @@
                 </a:solidFill>
                 <a:latin typeface="Calibri"/>
               </a:rPr>
-              <a:t>A jeweller rubs gold against a kasauti and reads the streak: the stone says which pieces are worth assaying, never which are false. This reads the published MPLADS record end to end and scores every work against comparable works in the same district and sector. 47,471 clear the review threshold, carrying Rs 4,602 Cr of sanction. Officials get them ranked, not a spreadsheet.</a:t>
+              <a:t>A jeweller rubs gold against a kasauti and reads the streak: the stone says which pieces are worth assaying, never which are false. This reads the published MPLADS record end to end and scores every work against comparable works in the same district and sector. 47,719 clear the review threshold, carrying Rs 4,609 Cr of sanction. Officials get them ranked, not a spreadsheet.</a:t>
             </a:r>
           </a:p>
         </p:txBody>
@@ -8459,7 +8459,7 @@
               </a:rPr>
               <a:t>Vercel, two projects
 GitHub Actions nightly
-127 automated tests
+129 automated tests
 Live since day one</a:t>
             </a:r>
           </a:p>
@@ -10303,7 +10303,7 @@
                 </a:solidFill>
                 <a:latin typeface="Calibri"/>
               </a:rPr>
-              <a:t>Not a proposal - already built, deployed and refreshing nightly: 250,839 works scored, all 36 states reconciled against the official MoSPI dashboard to within 3.6%, live at mplads-risk-monitor-web.vercel.app</a:t>
+              <a:t>Not a proposal - already built, deployed and refreshing nightly: 250,839 works scored, all 36 states reconciled against the official MoSPI dashboard to within 3.8%, live at mplads-risk-monitor-web.vercel.app</a:t>
             </a:r>
           </a:p>
         </p:txBody>
@@ -10475,7 +10475,7 @@
                 </a:solidFill>
                 <a:latin typeface="Calibri"/>
               </a:rPr>
-              <a:t>The data is already public and machine-readable: four CSVs, refreshed nightly by a scheduled job that loads in 2 minutes and scores in about 20. No ministry integration, no new reporting burden on any officer, no hardware. 127 automated tests run against the pipeline and the API.</a:t>
+              <a:t>The data is already public and machine-readable: four CSVs, refreshed nightly by a scheduled job that loads in 2 minutes and scores in about 20. No ministry integration, no new reporting burden on any officer, no hardware. 129 automated tests run against the pipeline and the API.</a:t>
             </a:r>
           </a:p>
         </p:txBody>
@@ -11546,7 +11546,7 @@
                 </a:solidFill>
                 <a:latin typeface="Consolas"/>
               </a:rPr>
-              <a:t>47,471</a:t>
+              <a:t>47,719</a:t>
             </a:r>
           </a:p>
         </p:txBody>
@@ -11672,7 +11672,7 @@
                 </a:solidFill>
                 <a:latin typeface="Consolas"/>
               </a:rPr>
-              <a:t>Rs 4,602 Cr</a:t>
+              <a:t>Rs 4,609 Cr</a:t>
             </a:r>
           </a:p>
         </p:txBody>
@@ -13152,7 +13152,7 @@
               </a:rPr>
               <a:t>The problem statement names mplads.mospi.gov.in. Its public interface, enumerated from its own JavaScript and called directly: totals, states, districts and member names are open to anyone. Works are not. Completed works come only through a citizen rating form that needs an SMS one-time password on an Indian mobile, returns one member's works in one ward per call, and is rate limited. Recommended works, payments and vendors are not served at all; every other path answers 302 to the login page.
 Empowered Indian republishes that record as machine-readable exports. Its own uploader reads the State Bank disbursement portal that MPLADS money is paid through, with a signed-in session cookie at one request every three seconds.
-So this system loads those exports - 250,839 works, 272,263 payments, 1,547 MP-terms, 776 districts, 62,969 vendors - and reconciles against the official endpoints on every refresh: five figures within 3.6%, every gap negative because our snapshot trails a portal that gains works overnight. 4,789 rows rejected and recorded, not silently dropped.</a:t>
+So this system loads those exports - 250,839 works, 272,263 payments, 1,547 MP-terms, 776 districts, 62,969 vendors - and reconciles against the official endpoints on every refresh: five figures within 3.8%, every gap negative because our snapshot trails a portal that gains works overnight. 5,623 rows rejected and recorded, not silently dropped.</a:t>
             </a:r>
           </a:p>
         </p:txBody>

--- a/docs/deck/SIH26102-MPLADS-SIH-Idea.pptx
+++ b/docs/deck/SIH26102-MPLADS-SIH-Idea.pptx
@@ -8459,7 +8459,7 @@
               </a:rPr>
               <a:t>Vercel, two projects
 GitHub Actions nightly
-129 automated tests
+132 automated tests
 Live since day one</a:t>
             </a:r>
           </a:p>
@@ -10475,7 +10475,7 @@
                 </a:solidFill>
                 <a:latin typeface="Calibri"/>
               </a:rPr>
-              <a:t>The data is already public and machine-readable: four CSVs, refreshed nightly by a scheduled job that loads in 2 minutes and scores in about 20. No ministry integration, no new reporting burden on any officer, no hardware. 129 automated tests run against the pipeline and the API.</a:t>
+              <a:t>The data is already public and machine-readable: four CSVs, refreshed nightly by a scheduled job that loads in 2 minutes and scores in about 20. No ministry integration, no new reporting burden on any officer, no hardware. 132 automated tests run against the pipeline and the API.</a:t>
             </a:r>
           </a:p>
         </p:txBody>
@@ -13125,7 +13125,7 @@
         <p:spPr>
           <a:xfrm>
             <a:off x="813816" y="2217928"/>
-            <a:ext cx="5029200" cy="2788920"/>
+            <a:ext cx="5029200" cy="2633980"/>
           </a:xfrm>
           <a:prstGeom prst="rect">
             <a:avLst/>
@@ -13152,7 +13152,7 @@
               </a:rPr>
               <a:t>The problem statement names mplads.mospi.gov.in. Its public interface, enumerated from its own JavaScript and called directly: totals, states, districts and member names are open to anyone. Works are not. Completed works come only through a citizen rating form that needs an SMS one-time password on an Indian mobile, returns one member's works in one ward per call, and is rate limited. Recommended works, payments and vendors are not served at all; every other path answers 302 to the login page.
 Empowered Indian republishes that record as machine-readable exports. Its own uploader reads the State Bank disbursement portal that MPLADS money is paid through, with a signed-in session cookie at one request every three seconds.
-So this system loads those exports - 250,839 works, 272,263 payments, 1,547 MP-terms, 776 districts, 62,969 vendors - and reconciles against the official endpoints on every refresh: five figures within 3.8%, every gap negative because our snapshot trails a portal that gains works overnight. 5,623 rows rejected and recorded, not silently dropped.</a:t>
+So this system loads those exports - 250,839 works, 272,263 payments, 1,547 MP-terms, 776 districts, 62,969 vendors - and reconciles against the official endpoints on every refresh: five figures within 3.8%, every gap negative because our snapshot trails a portal that gains works overnight. 417 rows rejected and recorded, not silently dropped.</a:t>
             </a:r>
           </a:p>
         </p:txBody>

--- a/docs/deck/SIH26102-MPLADS-SIH-Idea.pptx
+++ b/docs/deck/SIH26102-MPLADS-SIH-Idea.pptx
@@ -8459,7 +8459,7 @@
               </a:rPr>
               <a:t>Vercel, two projects
 GitHub Actions nightly
-132 automated tests
+136 automated tests
 Live since day one</a:t>
             </a:r>
           </a:p>
@@ -10475,7 +10475,7 @@
                 </a:solidFill>
                 <a:latin typeface="Calibri"/>
               </a:rPr>
-              <a:t>The data is already public and machine-readable: four CSVs, refreshed nightly by a scheduled job that loads in 2 minutes and scores in about 20. No ministry integration, no new reporting burden on any officer, no hardware. 132 automated tests run against the pipeline and the API.</a:t>
+              <a:t>The data is already public and machine-readable: four CSVs, refreshed nightly by a scheduled job that loads in 2 minutes and scores in about 20. No ministry integration, no new reporting burden on any officer, no hardware. 136 automated tests run against the pipeline and the API.</a:t>
             </a:r>
           </a:p>
         </p:txBody>

--- a/docs/deck/SIH26102-MPLADS-SIH-Idea.pptx
+++ b/docs/deck/SIH26102-MPLADS-SIH-Idea.pptx
@@ -14,6 +14,7 @@
     <p:sldId id="293" r:id="rId5"/>
     <p:sldId id="294" r:id="rId6"/>
     <p:sldId id="296" r:id="rId7"/>
+    <p:sldId id="297" r:id="rId8"/>
   </p:sldIdLst>
   <p:sldSz cx="12192000" cy="6858000"/>
   <p:notesSz cx="6858000" cy="9144000"/>
@@ -6060,9 +6061,9 @@
           <a:bodyPr/>
           <a:lstStyle/>
           <a:p>
-            <a:pPr eaLnBrk="1" hangingPunct="1"/>
-            <a:r>
-              <a:rPr lang="en-US" sz="3600" b="1" dirty="0">
+            <a:pPr eaLnBrk="1" hangingPunct="1" algn="ctr"/>
+            <a:r>
+              <a:rPr lang="en-US" sz="4000" b="1" dirty="0">
                 <a:latin typeface="Times New Roman" panose="02020603050405020304" pitchFamily="18" charset="0"/>
                 <a:ea typeface="ＭＳ Ｐゴシック" pitchFamily="1" charset="-128"/>
                 <a:cs typeface="Times New Roman" panose="02020603050405020304" pitchFamily="18" charset="0"/>
@@ -6082,8 +6083,8 @@
         </p:nvSpPr>
         <p:spPr bwMode="auto">
           <a:xfrm>
-            <a:off x="612648" y="1188720"/>
-            <a:ext cx="10972800" cy="475488"/>
+            <a:off x="612648" y="1078992"/>
+            <a:ext cx="10972800" cy="676656"/>
           </a:xfrm>
           <a:prstGeom prst="rect">
             <a:avLst/>
@@ -6103,11 +6104,17 @@
           <a:lstStyle/>
           <a:p>
             <a:pPr marL="342900" indent="-342900">
+              <a:lnSpc>
+                <a:spcPct val="100000"/>
+              </a:lnSpc>
+              <a:spcAft>
+                <a:spcPts val="0"/>
+              </a:spcAft>
               <a:buFont typeface="Wingdings" panose="05000000000000000000" pitchFamily="2" charset="2"/>
               <a:buChar char="v"/>
             </a:pPr>
             <a:r>
-              <a:rPr lang="en-US" sz="950" b="0" u="sng" dirty="0" i="1">
+              <a:rPr lang="en-US" sz="918" b="0" u="sng" dirty="0" i="1">
                 <a:solidFill>
                   <a:srgbClr val="5A6472"/>
                 </a:solidFill>
@@ -6126,6 +6133,12 @@
           </a:p>
           <a:p>
             <a:pPr marL="342900" indent="-342900">
+              <a:lnSpc>
+                <a:spcPct val="100000"/>
+              </a:lnSpc>
+              <a:spcAft>
+                <a:spcPts val="0"/>
+              </a:spcAft>
               <a:buFont typeface="Arial" panose="020B0604020202020204" pitchFamily="34" charset="0"/>
               <a:buChar char="•"/>
             </a:pPr>
@@ -6139,6 +6152,12 @@
           </a:p>
           <a:p>
             <a:pPr marL="342900" indent="-342900">
+              <a:lnSpc>
+                <a:spcPct val="100000"/>
+              </a:lnSpc>
+              <a:spcAft>
+                <a:spcPts val="0"/>
+              </a:spcAft>
               <a:buFont typeface="Arial" panose="020B0604020202020204" pitchFamily="34" charset="0"/>
               <a:buChar char="•"/>
             </a:pPr>
@@ -6152,11 +6171,17 @@
           </a:p>
           <a:p>
             <a:pPr marL="342900" indent="-342900" algn="just">
+              <a:lnSpc>
+                <a:spcPct val="100000"/>
+              </a:lnSpc>
+              <a:spcAft>
+                <a:spcPts val="0"/>
+              </a:spcAft>
               <a:buFont typeface="Arial" panose="020B0604020202020204" pitchFamily="34" charset="0"/>
               <a:buChar char="•"/>
             </a:pPr>
             <a:r>
-              <a:rPr lang="en-US" sz="950" dirty="0" i="1" b="0">
+              <a:rPr lang="en-US" sz="918" dirty="0" i="1" b="0">
                 <a:solidFill>
                   <a:srgbClr val="5A6472"/>
                 </a:solidFill>
@@ -6168,11 +6193,17 @@
           </a:p>
           <a:p>
             <a:pPr marL="342900" indent="-342900" algn="just">
+              <a:lnSpc>
+                <a:spcPct val="100000"/>
+              </a:lnSpc>
+              <a:spcAft>
+                <a:spcPts val="0"/>
+              </a:spcAft>
               <a:buFont typeface="Arial" panose="020B0604020202020204" pitchFamily="34" charset="0"/>
               <a:buChar char="•"/>
             </a:pPr>
             <a:r>
-              <a:rPr lang="en-US" sz="950" dirty="0" i="1" b="0">
+              <a:rPr lang="en-US" sz="918" dirty="0" i="1" b="0">
                 <a:solidFill>
                   <a:srgbClr val="5A6472"/>
                 </a:solidFill>
@@ -6184,11 +6215,17 @@
           </a:p>
           <a:p>
             <a:pPr marL="342900" indent="-342900" algn="just">
+              <a:lnSpc>
+                <a:spcPct val="100000"/>
+              </a:lnSpc>
+              <a:spcAft>
+                <a:spcPts val="0"/>
+              </a:spcAft>
               <a:buFont typeface="Arial" panose="020B0604020202020204" pitchFamily="34" charset="0"/>
               <a:buChar char="•"/>
             </a:pPr>
             <a:r>
-              <a:rPr lang="en-US" sz="950" dirty="0" i="1" b="0">
+              <a:rPr lang="en-US" sz="918" dirty="0" i="1" b="0">
                 <a:solidFill>
                   <a:srgbClr val="5A6472"/>
                 </a:solidFill>
@@ -6347,28 +6384,113 @@
           </a:prstGeom>
         </p:spPr>
       </p:pic>
-      <p:sp>
-        <p:nvSpPr>
-          <p:cNvPr id="15363" name="Rounded Rectangle 15362"/>
-          <p:cNvSpPr/>
+      <p:pic>
+        <p:nvPicPr>
+          <p:cNvPr id="15363" name="Picture 15362" descr="arch.png"/>
+          <p:cNvPicPr>
+            <a:picLocks noChangeAspect="1"/>
+          </p:cNvPicPr>
           <p:nvPr/>
-        </p:nvSpPr>
+        </p:nvPicPr>
+        <p:blipFill>
+          <a:blip r:embed="rId4"/>
+          <a:stretch>
+            <a:fillRect/>
+          </a:stretch>
+        </p:blipFill>
         <p:spPr>
           <a:xfrm>
             <a:off x="612648" y="1783080"/>
-            <a:ext cx="2092147" cy="1133856"/>
+            <a:ext cx="8595360" cy="3671446"/>
+          </a:xfrm>
+          <a:prstGeom prst="rect">
+            <a:avLst/>
+          </a:prstGeom>
+        </p:spPr>
+      </p:pic>
+      <p:pic>
+        <p:nvPicPr>
+          <p:cNvPr id="15364" name="Picture 15363" descr="overview.png">
+            <a:hlinkClick r:id="rId6"/>
+          </p:cNvPr>
+          <p:cNvPicPr>
+            <a:picLocks noChangeAspect="1"/>
+          </p:cNvPicPr>
+          <p:nvPr/>
+        </p:nvPicPr>
+        <p:blipFill>
+          <a:blip r:embed="rId5"/>
+          <a:stretch>
+            <a:fillRect/>
+          </a:stretch>
+        </p:blipFill>
+        <p:spPr>
+          <a:xfrm>
+            <a:off x="9372600" y="1783080"/>
+            <a:ext cx="2359152" cy="1147137"/>
+          </a:xfrm>
+          <a:prstGeom prst="rect">
+            <a:avLst/>
+          </a:prstGeom>
+        </p:spPr>
+      </p:pic>
+      <p:sp>
+        <p:nvSpPr>
+          <p:cNvPr id="15365" name="TextBox 15364"/>
+          <p:cNvSpPr txBox="1"/>
+          <p:nvPr/>
+        </p:nvSpPr>
+        <p:spPr>
+          <a:xfrm>
+            <a:off x="9372600" y="2985081"/>
+            <a:ext cx="2359152" cy="237744"/>
+          </a:xfrm>
+          <a:prstGeom prst="rect">
+            <a:avLst/>
+          </a:prstGeom>
+          <a:noFill/>
+        </p:spPr>
+        <p:txBody>
+          <a:bodyPr wrap="square" lIns="0" rIns="0" tIns="0" bIns="0">
+            <a:spAutoFit/>
+          </a:bodyPr>
+          <a:lstStyle/>
+          <a:p>
+            <a:pPr algn="ctr"/>
+            <a:r>
+              <a:rPr sz="900">
+                <a:solidFill>
+                  <a:srgbClr val="5A6472"/>
+                </a:solidFill>
+                <a:latin typeface="Calibri"/>
+              </a:rPr>
+              <a:t>48,296 flagged of 2,50,839</a:t>
+            </a:r>
+          </a:p>
+        </p:txBody>
+      </p:sp>
+      <p:sp>
+        <p:nvSpPr>
+          <p:cNvPr id="15366" name="Rounded Rectangle 15365">
+            <a:hlinkClick r:id="rId7"/>
+          </p:cNvPr>
+          <p:cNvSpPr/>
+          <p:nvPr/>
+        </p:nvSpPr>
+        <p:spPr>
+          <a:xfrm>
+            <a:off x="9372600" y="3259401"/>
+            <a:ext cx="2359152" cy="475488"/>
           </a:xfrm>
           <a:prstGeom prst="roundRect">
-            <a:avLst>
-              <a:gd name="adj" fmla="val 6000"/>
-            </a:avLst>
+            <a:avLst/>
           </a:prstGeom>
           <a:solidFill>
-            <a:srgbClr val="EAF2FB"/>
+            <a:srgbClr val="FFFFFF"/>
           </a:solidFill>
-          <a:ln w="9525">
+          <a:ln w="15875">
             <a:solidFill>
-              <a:srgbClr val="BFDCF2"/>
+              <a:srgbClr val="7A1A12"/>
             </a:solidFill>
           </a:ln>
           <a:effectLst/>
@@ -6388,114 +6510,56 @@
           </a:fontRef>
         </p:style>
         <p:txBody>
-          <a:bodyPr rtlCol="0" anchor="ctr"/>
+          <a:bodyPr rtlCol="0" anchor="ctr" wrap="square" lIns="54864" rIns="54864" tIns="0" bIns="0"/>
           <a:lstStyle/>
           <a:p>
             <a:pPr algn="ctr"/>
-          </a:p>
-        </p:txBody>
-      </p:sp>
-      <p:sp>
-        <p:nvSpPr>
-          <p:cNvPr id="15364" name="TextBox 15363"/>
-          <p:cNvSpPr txBox="1"/>
-          <p:nvPr/>
-        </p:nvSpPr>
-        <p:spPr>
-          <a:xfrm>
-            <a:off x="740664" y="1892807"/>
-            <a:ext cx="1836115" cy="256032"/>
-          </a:xfrm>
-          <a:prstGeom prst="rect">
-            <a:avLst/>
-          </a:prstGeom>
-          <a:noFill/>
-        </p:spPr>
-        <p:txBody>
-          <a:bodyPr wrap="square" lIns="0" rIns="0" tIns="0" bIns="0">
-            <a:spAutoFit/>
-          </a:bodyPr>
-          <a:lstStyle/>
-          <a:p>
-            <a:pPr>
-              <a:lnSpc>
-                <a:spcPct val="122000"/>
-              </a:lnSpc>
-            </a:pPr>
-            <a:r>
-              <a:rPr sz="1300" b="1">
+            <a:r>
+              <a:rPr sz="1000" b="1">
                 <a:solidFill>
-                  <a:srgbClr val="00548F"/>
+                  <a:srgbClr val="7A1A12"/>
                 </a:solidFill>
                 <a:latin typeface="Calibri"/>
               </a:rPr>
-              <a:t>READ</a:t>
-            </a:r>
-          </a:p>
-        </p:txBody>
-      </p:sp>
-      <p:sp>
-        <p:nvSpPr>
-          <p:cNvPr id="15365" name="TextBox 15364"/>
-          <p:cNvSpPr txBox="1"/>
-          <p:nvPr/>
-        </p:nvSpPr>
-        <p:spPr>
-          <a:xfrm>
-            <a:off x="740664" y="2203704"/>
-            <a:ext cx="1836115" cy="621792"/>
-          </a:xfrm>
-          <a:prstGeom prst="rect">
-            <a:avLst/>
-          </a:prstGeom>
-          <a:noFill/>
-        </p:spPr>
-        <p:txBody>
-          <a:bodyPr wrap="square" lIns="0" rIns="0" tIns="0" bIns="0">
-            <a:spAutoFit/>
-          </a:bodyPr>
-          <a:lstStyle/>
-          <a:p>
-            <a:pPr>
-              <a:lnSpc>
-                <a:spcPct val="116000"/>
-              </a:lnSpc>
-            </a:pPr>
-            <a:r>
-              <a:rPr sz="1000" b="0">
+              <a:t>DEMO VIDEO</a:t>
+            </a:r>
+          </a:p>
+          <a:p>
+            <a:pPr algn="ctr"/>
+            <a:r>
+              <a:rPr sz="700">
                 <a:solidFill>
                   <a:srgbClr val="5A6472"/>
                 </a:solidFill>
                 <a:latin typeface="Calibri"/>
               </a:rPr>
-              <a:t>250,839 works, 272,263
-payments, 1,547 MP-terms</a:t>
-            </a:r>
-          </a:p>
-        </p:txBody>
-      </p:sp>
-      <p:sp>
-        <p:nvSpPr>
-          <p:cNvPr id="15366" name="Rounded Rectangle 15365"/>
+              <a:t>2 minute walkthrough</a:t>
+            </a:r>
+          </a:p>
+        </p:txBody>
+      </p:sp>
+      <p:sp>
+        <p:nvSpPr>
+          <p:cNvPr id="15367" name="Rounded Rectangle 15366">
+            <a:hlinkClick r:id="rId6"/>
+          </p:cNvPr>
           <p:cNvSpPr/>
           <p:nvPr/>
         </p:nvSpPr>
         <p:spPr>
           <a:xfrm>
-            <a:off x="2832811" y="1783080"/>
-            <a:ext cx="2092147" cy="1133856"/>
+            <a:off x="9372600" y="3853761"/>
+            <a:ext cx="2359152" cy="475488"/>
           </a:xfrm>
           <a:prstGeom prst="roundRect">
-            <a:avLst>
-              <a:gd name="adj" fmla="val 6000"/>
-            </a:avLst>
+            <a:avLst/>
           </a:prstGeom>
           <a:solidFill>
-            <a:srgbClr val="EAF2FB"/>
+            <a:srgbClr val="FFFFFF"/>
           </a:solidFill>
-          <a:ln w="9525">
+          <a:ln w="15875">
             <a:solidFill>
-              <a:srgbClr val="BFDCF2"/>
+              <a:srgbClr val="7A1A12"/>
             </a:solidFill>
           </a:ln>
           <a:effectLst/>
@@ -6515,114 +6579,56 @@
           </a:fontRef>
         </p:style>
         <p:txBody>
-          <a:bodyPr rtlCol="0" anchor="ctr"/>
+          <a:bodyPr rtlCol="0" anchor="ctr" wrap="square" lIns="54864" rIns="54864" tIns="0" bIns="0"/>
           <a:lstStyle/>
           <a:p>
             <a:pPr algn="ctr"/>
-          </a:p>
-        </p:txBody>
-      </p:sp>
-      <p:sp>
-        <p:nvSpPr>
-          <p:cNvPr id="15367" name="TextBox 15366"/>
-          <p:cNvSpPr txBox="1"/>
-          <p:nvPr/>
-        </p:nvSpPr>
-        <p:spPr>
-          <a:xfrm>
-            <a:off x="2960827" y="1892807"/>
-            <a:ext cx="1836115" cy="256032"/>
-          </a:xfrm>
-          <a:prstGeom prst="rect">
-            <a:avLst/>
-          </a:prstGeom>
-          <a:noFill/>
-        </p:spPr>
-        <p:txBody>
-          <a:bodyPr wrap="square" lIns="0" rIns="0" tIns="0" bIns="0">
-            <a:spAutoFit/>
-          </a:bodyPr>
-          <a:lstStyle/>
-          <a:p>
-            <a:pPr>
-              <a:lnSpc>
-                <a:spcPct val="122000"/>
-              </a:lnSpc>
-            </a:pPr>
-            <a:r>
-              <a:rPr sz="1300" b="1">
+            <a:r>
+              <a:rPr sz="1000" b="1">
                 <a:solidFill>
-                  <a:srgbClr val="00548F"/>
+                  <a:srgbClr val="7A1A12"/>
                 </a:solidFill>
                 <a:latin typeface="Calibri"/>
               </a:rPr>
-              <a:t>COMPARE</a:t>
-            </a:r>
-          </a:p>
-        </p:txBody>
-      </p:sp>
-      <p:sp>
-        <p:nvSpPr>
-          <p:cNvPr id="15368" name="TextBox 15367"/>
-          <p:cNvSpPr txBox="1"/>
-          <p:nvPr/>
-        </p:nvSpPr>
-        <p:spPr>
-          <a:xfrm>
-            <a:off x="2960827" y="2203704"/>
-            <a:ext cx="1836115" cy="621792"/>
-          </a:xfrm>
-          <a:prstGeom prst="rect">
-            <a:avLst/>
-          </a:prstGeom>
-          <a:noFill/>
-        </p:spPr>
-        <p:txBody>
-          <a:bodyPr wrap="square" lIns="0" rIns="0" tIns="0" bIns="0">
-            <a:spAutoFit/>
-          </a:bodyPr>
-          <a:lstStyle/>
-          <a:p>
-            <a:pPr>
-              <a:lnSpc>
-                <a:spcPct val="116000"/>
-              </a:lnSpc>
-            </a:pPr>
-            <a:r>
-              <a:rPr sz="1000" b="0">
+              <a:t>PROTOTYPE</a:t>
+            </a:r>
+          </a:p>
+          <a:p>
+            <a:pPr algn="ctr"/>
+            <a:r>
+              <a:rPr sz="700">
                 <a:solidFill>
                   <a:srgbClr val="5A6472"/>
                 </a:solidFill>
                 <a:latin typeface="Calibri"/>
               </a:rPr>
-              <a:t>Each work against its own
-district-and-sector peers</a:t>
-            </a:r>
-          </a:p>
-        </p:txBody>
-      </p:sp>
-      <p:sp>
-        <p:nvSpPr>
-          <p:cNvPr id="15369" name="Rounded Rectangle 15368"/>
+              <a:t>the running system</a:t>
+            </a:r>
+          </a:p>
+        </p:txBody>
+      </p:sp>
+      <p:sp>
+        <p:nvSpPr>
+          <p:cNvPr id="15368" name="Rounded Rectangle 15367">
+            <a:hlinkClick r:id="rId8"/>
+          </p:cNvPr>
           <p:cNvSpPr/>
           <p:nvPr/>
         </p:nvSpPr>
         <p:spPr>
           <a:xfrm>
-            <a:off x="5052974" y="1783080"/>
-            <a:ext cx="2092147" cy="1133856"/>
+            <a:off x="9372600" y="4448121"/>
+            <a:ext cx="2359152" cy="475488"/>
           </a:xfrm>
           <a:prstGeom prst="roundRect">
-            <a:avLst>
-              <a:gd name="adj" fmla="val 6000"/>
-            </a:avLst>
+            <a:avLst/>
           </a:prstGeom>
           <a:solidFill>
-            <a:srgbClr val="EAF2FB"/>
+            <a:srgbClr val="FFFFFF"/>
           </a:solidFill>
-          <a:ln w="9525">
+          <a:ln w="15875">
             <a:solidFill>
-              <a:srgbClr val="BFDCF2"/>
+              <a:srgbClr val="7A1A12"/>
             </a:solidFill>
           </a:ln>
           <a:effectLst/>
@@ -6642,858 +6648,30 @@
           </a:fontRef>
         </p:style>
         <p:txBody>
-          <a:bodyPr rtlCol="0" anchor="ctr"/>
+          <a:bodyPr rtlCol="0" anchor="ctr" wrap="square" lIns="54864" rIns="54864" tIns="0" bIns="0"/>
           <a:lstStyle/>
           <a:p>
             <a:pPr algn="ctr"/>
-          </a:p>
-        </p:txBody>
-      </p:sp>
-      <p:sp>
-        <p:nvSpPr>
-          <p:cNvPr id="15370" name="TextBox 15369"/>
-          <p:cNvSpPr txBox="1"/>
-          <p:nvPr/>
-        </p:nvSpPr>
-        <p:spPr>
-          <a:xfrm>
-            <a:off x="5180990" y="1892807"/>
-            <a:ext cx="1836115" cy="256032"/>
-          </a:xfrm>
-          <a:prstGeom prst="rect">
-            <a:avLst/>
-          </a:prstGeom>
-          <a:noFill/>
-        </p:spPr>
-        <p:txBody>
-          <a:bodyPr wrap="square" lIns="0" rIns="0" tIns="0" bIns="0">
-            <a:spAutoFit/>
-          </a:bodyPr>
-          <a:lstStyle/>
-          <a:p>
-            <a:pPr>
-              <a:lnSpc>
-                <a:spcPct val="122000"/>
-              </a:lnSpc>
-            </a:pPr>
-            <a:r>
-              <a:rPr sz="1300" b="1">
+            <a:r>
+              <a:rPr sz="1000" b="1">
                 <a:solidFill>
-                  <a:srgbClr val="00548F"/>
+                  <a:srgbClr val="7A1A12"/>
                 </a:solidFill>
                 <a:latin typeface="Calibri"/>
               </a:rPr>
-              <a:t>DETECT</a:t>
-            </a:r>
-          </a:p>
-        </p:txBody>
-      </p:sp>
-      <p:sp>
-        <p:nvSpPr>
-          <p:cNvPr id="15371" name="TextBox 15370"/>
-          <p:cNvSpPr txBox="1"/>
-          <p:nvPr/>
-        </p:nvSpPr>
-        <p:spPr>
-          <a:xfrm>
-            <a:off x="5180990" y="2203704"/>
-            <a:ext cx="1836115" cy="621792"/>
-          </a:xfrm>
-          <a:prstGeom prst="rect">
-            <a:avLst/>
-          </a:prstGeom>
-          <a:noFill/>
-        </p:spPr>
-        <p:txBody>
-          <a:bodyPr wrap="square" lIns="0" rIns="0" tIns="0" bIns="0">
-            <a:spAutoFit/>
-          </a:bodyPr>
-          <a:lstStyle/>
-          <a:p>
-            <a:pPr>
-              <a:lnSpc>
-                <a:spcPct val="116000"/>
-              </a:lnSpc>
-            </a:pPr>
-            <a:r>
-              <a:rPr sz="1000" b="0">
+              <a:t>GITHUB</a:t>
+            </a:r>
+          </a:p>
+          <a:p>
+            <a:pPr algn="ctr"/>
+            <a:r>
+              <a:rPr sz="700">
                 <a:solidFill>
                   <a:srgbClr val="5A6472"/>
                 </a:solidFill>
                 <a:latin typeface="Calibri"/>
               </a:rPr>
-              <a:t>5 work signals, 4 cohort
-detectors, 4 written rules</a:t>
-            </a:r>
-          </a:p>
-        </p:txBody>
-      </p:sp>
-      <p:sp>
-        <p:nvSpPr>
-          <p:cNvPr id="15372" name="Rounded Rectangle 15371"/>
-          <p:cNvSpPr/>
-          <p:nvPr/>
-        </p:nvSpPr>
-        <p:spPr>
-          <a:xfrm>
-            <a:off x="7273137" y="1783080"/>
-            <a:ext cx="2092147" cy="1133856"/>
-          </a:xfrm>
-          <a:prstGeom prst="roundRect">
-            <a:avLst>
-              <a:gd name="adj" fmla="val 6000"/>
-            </a:avLst>
-          </a:prstGeom>
-          <a:solidFill>
-            <a:srgbClr val="EAF2FB"/>
-          </a:solidFill>
-          <a:ln w="9525">
-            <a:solidFill>
-              <a:srgbClr val="BFDCF2"/>
-            </a:solidFill>
-          </a:ln>
-          <a:effectLst/>
-        </p:spPr>
-        <p:style>
-          <a:lnRef idx="1">
-            <a:schemeClr val="accent1"/>
-          </a:lnRef>
-          <a:fillRef idx="3">
-            <a:schemeClr val="accent1"/>
-          </a:fillRef>
-          <a:effectRef idx="2">
-            <a:schemeClr val="accent1"/>
-          </a:effectRef>
-          <a:fontRef idx="minor">
-            <a:schemeClr val="lt1"/>
-          </a:fontRef>
-        </p:style>
-        <p:txBody>
-          <a:bodyPr rtlCol="0" anchor="ctr"/>
-          <a:lstStyle/>
-          <a:p>
-            <a:pPr algn="ctr"/>
-          </a:p>
-        </p:txBody>
-      </p:sp>
-      <p:sp>
-        <p:nvSpPr>
-          <p:cNvPr id="15373" name="TextBox 15372"/>
-          <p:cNvSpPr txBox="1"/>
-          <p:nvPr/>
-        </p:nvSpPr>
-        <p:spPr>
-          <a:xfrm>
-            <a:off x="7401153" y="1892807"/>
-            <a:ext cx="1836115" cy="256032"/>
-          </a:xfrm>
-          <a:prstGeom prst="rect">
-            <a:avLst/>
-          </a:prstGeom>
-          <a:noFill/>
-        </p:spPr>
-        <p:txBody>
-          <a:bodyPr wrap="square" lIns="0" rIns="0" tIns="0" bIns="0">
-            <a:spAutoFit/>
-          </a:bodyPr>
-          <a:lstStyle/>
-          <a:p>
-            <a:pPr>
-              <a:lnSpc>
-                <a:spcPct val="122000"/>
-              </a:lnSpc>
-            </a:pPr>
-            <a:r>
-              <a:rPr sz="1300" b="1">
-                <a:solidFill>
-                  <a:srgbClr val="00548F"/>
-                </a:solidFill>
-                <a:latin typeface="Calibri"/>
-              </a:rPr>
-              <a:t>SCORE</a:t>
-            </a:r>
-          </a:p>
-        </p:txBody>
-      </p:sp>
-      <p:sp>
-        <p:nvSpPr>
-          <p:cNvPr id="15374" name="TextBox 15373"/>
-          <p:cNvSpPr txBox="1"/>
-          <p:nvPr/>
-        </p:nvSpPr>
-        <p:spPr>
-          <a:xfrm>
-            <a:off x="7401153" y="2203704"/>
-            <a:ext cx="1836115" cy="621792"/>
-          </a:xfrm>
-          <a:prstGeom prst="rect">
-            <a:avLst/>
-          </a:prstGeom>
-          <a:noFill/>
-        </p:spPr>
-        <p:txBody>
-          <a:bodyPr wrap="square" lIns="0" rIns="0" tIns="0" bIns="0">
-            <a:spAutoFit/>
-          </a:bodyPr>
-          <a:lstStyle/>
-          <a:p>
-            <a:pPr>
-              <a:lnSpc>
-                <a:spcPct val="116000"/>
-              </a:lnSpc>
-            </a:pPr>
-            <a:r>
-              <a:rPr sz="1000" b="0">
-                <a:solidFill>
-                  <a:srgbClr val="5A6472"/>
-                </a:solidFill>
-                <a:latin typeface="Calibri"/>
-              </a:rPr>
-              <a:t>One 0-100 number, with
-the records behind it</a:t>
-            </a:r>
-          </a:p>
-        </p:txBody>
-      </p:sp>
-      <p:sp>
-        <p:nvSpPr>
-          <p:cNvPr id="15375" name="Rounded Rectangle 15374"/>
-          <p:cNvSpPr/>
-          <p:nvPr/>
-        </p:nvSpPr>
-        <p:spPr>
-          <a:xfrm>
-            <a:off x="9493300" y="1783080"/>
-            <a:ext cx="2092147" cy="1133856"/>
-          </a:xfrm>
-          <a:prstGeom prst="roundRect">
-            <a:avLst>
-              <a:gd name="adj" fmla="val 6000"/>
-            </a:avLst>
-          </a:prstGeom>
-          <a:solidFill>
-            <a:srgbClr val="EAF2FB"/>
-          </a:solidFill>
-          <a:ln w="9525">
-            <a:solidFill>
-              <a:srgbClr val="BFDCF2"/>
-            </a:solidFill>
-          </a:ln>
-          <a:effectLst/>
-        </p:spPr>
-        <p:style>
-          <a:lnRef idx="1">
-            <a:schemeClr val="accent1"/>
-          </a:lnRef>
-          <a:fillRef idx="3">
-            <a:schemeClr val="accent1"/>
-          </a:fillRef>
-          <a:effectRef idx="2">
-            <a:schemeClr val="accent1"/>
-          </a:effectRef>
-          <a:fontRef idx="minor">
-            <a:schemeClr val="lt1"/>
-          </a:fontRef>
-        </p:style>
-        <p:txBody>
-          <a:bodyPr rtlCol="0" anchor="ctr"/>
-          <a:lstStyle/>
-          <a:p>
-            <a:pPr algn="ctr"/>
-          </a:p>
-        </p:txBody>
-      </p:sp>
-      <p:sp>
-        <p:nvSpPr>
-          <p:cNvPr id="15376" name="TextBox 15375"/>
-          <p:cNvSpPr txBox="1"/>
-          <p:nvPr/>
-        </p:nvSpPr>
-        <p:spPr>
-          <a:xfrm>
-            <a:off x="9621316" y="1892807"/>
-            <a:ext cx="1836115" cy="256032"/>
-          </a:xfrm>
-          <a:prstGeom prst="rect">
-            <a:avLst/>
-          </a:prstGeom>
-          <a:noFill/>
-        </p:spPr>
-        <p:txBody>
-          <a:bodyPr wrap="square" lIns="0" rIns="0" tIns="0" bIns="0">
-            <a:spAutoFit/>
-          </a:bodyPr>
-          <a:lstStyle/>
-          <a:p>
-            <a:pPr>
-              <a:lnSpc>
-                <a:spcPct val="122000"/>
-              </a:lnSpc>
-            </a:pPr>
-            <a:r>
-              <a:rPr sz="1300" b="1">
-                <a:solidFill>
-                  <a:srgbClr val="00548F"/>
-                </a:solidFill>
-                <a:latin typeface="Calibri"/>
-              </a:rPr>
-              <a:t>ACT</a:t>
-            </a:r>
-          </a:p>
-        </p:txBody>
-      </p:sp>
-      <p:sp>
-        <p:nvSpPr>
-          <p:cNvPr id="15377" name="TextBox 15376"/>
-          <p:cNvSpPr txBox="1"/>
-          <p:nvPr/>
-        </p:nvSpPr>
-        <p:spPr>
-          <a:xfrm>
-            <a:off x="9621316" y="2203704"/>
-            <a:ext cx="1836115" cy="621792"/>
-          </a:xfrm>
-          <a:prstGeom prst="rect">
-            <a:avLst/>
-          </a:prstGeom>
-          <a:noFill/>
-        </p:spPr>
-        <p:txBody>
-          <a:bodyPr wrap="square" lIns="0" rIns="0" tIns="0" bIns="0">
-            <a:spAutoFit/>
-          </a:bodyPr>
-          <a:lstStyle/>
-          <a:p>
-            <a:pPr>
-              <a:lnSpc>
-                <a:spcPct val="116000"/>
-              </a:lnSpc>
-            </a:pPr>
-            <a:r>
-              <a:rPr sz="1000" b="0">
-                <a:solidFill>
-                  <a:srgbClr val="5A6472"/>
-                </a:solidFill>
-                <a:latin typeface="Calibri"/>
-              </a:rPr>
-              <a:t>A ranked queue, and a trail
-of every decision on it</a:t>
-            </a:r>
-          </a:p>
-        </p:txBody>
-      </p:sp>
-      <p:sp>
-        <p:nvSpPr>
-          <p:cNvPr id="15378" name="Rounded Rectangle 15377"/>
-          <p:cNvSpPr/>
-          <p:nvPr/>
-        </p:nvSpPr>
-        <p:spPr>
-          <a:xfrm>
-            <a:off x="612648" y="3136391"/>
-            <a:ext cx="3547872" cy="3063240"/>
-          </a:xfrm>
-          <a:prstGeom prst="roundRect">
-            <a:avLst>
-              <a:gd name="adj" fmla="val 6000"/>
-            </a:avLst>
-          </a:prstGeom>
-          <a:solidFill>
-            <a:srgbClr val="F5F7FA"/>
-          </a:solidFill>
-          <a:ln w="9525">
-            <a:solidFill>
-              <a:srgbClr val="D6DCE5"/>
-            </a:solidFill>
-          </a:ln>
-          <a:effectLst/>
-        </p:spPr>
-        <p:style>
-          <a:lnRef idx="1">
-            <a:schemeClr val="accent1"/>
-          </a:lnRef>
-          <a:fillRef idx="3">
-            <a:schemeClr val="accent1"/>
-          </a:fillRef>
-          <a:effectRef idx="2">
-            <a:schemeClr val="accent1"/>
-          </a:effectRef>
-          <a:fontRef idx="minor">
-            <a:schemeClr val="lt1"/>
-          </a:fontRef>
-        </p:style>
-        <p:txBody>
-          <a:bodyPr rtlCol="0" anchor="ctr"/>
-          <a:lstStyle/>
-          <a:p>
-            <a:pPr algn="ctr"/>
-          </a:p>
-        </p:txBody>
-      </p:sp>
-      <p:sp>
-        <p:nvSpPr>
-          <p:cNvPr id="15379" name="Rounded Rectangle 15378"/>
-          <p:cNvSpPr/>
-          <p:nvPr/>
-        </p:nvSpPr>
-        <p:spPr>
-          <a:xfrm>
-            <a:off x="612648" y="3136391"/>
-            <a:ext cx="41148" cy="3063240"/>
-          </a:xfrm>
-          <a:prstGeom prst="roundRect">
-            <a:avLst>
-              <a:gd name="adj" fmla="val 6000"/>
-            </a:avLst>
-          </a:prstGeom>
-          <a:solidFill>
-            <a:srgbClr val="0070C0"/>
-          </a:solidFill>
-          <a:ln>
-            <a:noFill/>
-          </a:ln>
-          <a:effectLst/>
-        </p:spPr>
-        <p:style>
-          <a:lnRef idx="1">
-            <a:schemeClr val="accent1"/>
-          </a:lnRef>
-          <a:fillRef idx="3">
-            <a:schemeClr val="accent1"/>
-          </a:fillRef>
-          <a:effectRef idx="2">
-            <a:schemeClr val="accent1"/>
-          </a:effectRef>
-          <a:fontRef idx="minor">
-            <a:schemeClr val="lt1"/>
-          </a:fontRef>
-        </p:style>
-        <p:txBody>
-          <a:bodyPr rtlCol="0" anchor="ctr"/>
-          <a:lstStyle/>
-          <a:p>
-            <a:pPr algn="ctr"/>
-          </a:p>
-        </p:txBody>
-      </p:sp>
-      <p:sp>
-        <p:nvSpPr>
-          <p:cNvPr id="15380" name="TextBox 15379"/>
-          <p:cNvSpPr txBox="1"/>
-          <p:nvPr/>
-        </p:nvSpPr>
-        <p:spPr>
-          <a:xfrm>
-            <a:off x="813816" y="3282696"/>
-            <a:ext cx="3182112" cy="206247"/>
-          </a:xfrm>
-          <a:prstGeom prst="rect">
-            <a:avLst/>
-          </a:prstGeom>
-          <a:noFill/>
-        </p:spPr>
-        <p:txBody>
-          <a:bodyPr wrap="square" lIns="0" rIns="0" tIns="0" bIns="0">
-            <a:spAutoFit/>
-          </a:bodyPr>
-          <a:lstStyle/>
-          <a:p>
-            <a:pPr>
-              <a:lnSpc>
-                <a:spcPct val="116000"/>
-              </a:lnSpc>
-            </a:pPr>
-            <a:r>
-              <a:rPr sz="1400" b="1">
-                <a:solidFill>
-                  <a:srgbClr val="101828"/>
-                </a:solidFill>
-                <a:latin typeface="Calibri"/>
-              </a:rPr>
-              <a:t>Kasauti — the touchstone</a:t>
-            </a:r>
-          </a:p>
-        </p:txBody>
-      </p:sp>
-      <p:sp>
-        <p:nvSpPr>
-          <p:cNvPr id="15381" name="TextBox 15380"/>
-          <p:cNvSpPr txBox="1"/>
-          <p:nvPr/>
-        </p:nvSpPr>
-        <p:spPr>
-          <a:xfrm>
-            <a:off x="813816" y="3571240"/>
-            <a:ext cx="3182112" cy="2045207"/>
-          </a:xfrm>
-          <a:prstGeom prst="rect">
-            <a:avLst/>
-          </a:prstGeom>
-          <a:noFill/>
-        </p:spPr>
-        <p:txBody>
-          <a:bodyPr wrap="square" lIns="0" rIns="0" tIns="0" bIns="0">
-            <a:spAutoFit/>
-          </a:bodyPr>
-          <a:lstStyle/>
-          <a:p>
-            <a:pPr>
-              <a:lnSpc>
-                <a:spcPct val="122000"/>
-              </a:lnSpc>
-            </a:pPr>
-            <a:r>
-              <a:rPr sz="1200" b="0">
-                <a:solidFill>
-                  <a:srgbClr val="5A6472"/>
-                </a:solidFill>
-                <a:latin typeface="Calibri"/>
-              </a:rPr>
-              <a:t>A jeweller rubs gold against a kasauti and reads the streak: the stone says which pieces are worth assaying, never which are false. This reads the published MPLADS record end to end and scores every work against comparable works in the same district and sector. 47,719 clear the review threshold, carrying Rs 4,609 Cr of sanction. Officials get them ranked, not a spreadsheet.</a:t>
-            </a:r>
-          </a:p>
-        </p:txBody>
-      </p:sp>
-      <p:sp>
-        <p:nvSpPr>
-          <p:cNvPr id="15382" name="Rounded Rectangle 15381"/>
-          <p:cNvSpPr/>
-          <p:nvPr/>
-        </p:nvSpPr>
-        <p:spPr>
-          <a:xfrm>
-            <a:off x="4325112" y="3136391"/>
-            <a:ext cx="3547872" cy="3063240"/>
-          </a:xfrm>
-          <a:prstGeom prst="roundRect">
-            <a:avLst>
-              <a:gd name="adj" fmla="val 6000"/>
-            </a:avLst>
-          </a:prstGeom>
-          <a:solidFill>
-            <a:srgbClr val="F5F7FA"/>
-          </a:solidFill>
-          <a:ln w="9525">
-            <a:solidFill>
-              <a:srgbClr val="D6DCE5"/>
-            </a:solidFill>
-          </a:ln>
-          <a:effectLst/>
-        </p:spPr>
-        <p:style>
-          <a:lnRef idx="1">
-            <a:schemeClr val="accent1"/>
-          </a:lnRef>
-          <a:fillRef idx="3">
-            <a:schemeClr val="accent1"/>
-          </a:fillRef>
-          <a:effectRef idx="2">
-            <a:schemeClr val="accent1"/>
-          </a:effectRef>
-          <a:fontRef idx="minor">
-            <a:schemeClr val="lt1"/>
-          </a:fontRef>
-        </p:style>
-        <p:txBody>
-          <a:bodyPr rtlCol="0" anchor="ctr"/>
-          <a:lstStyle/>
-          <a:p>
-            <a:pPr algn="ctr"/>
-          </a:p>
-        </p:txBody>
-      </p:sp>
-      <p:sp>
-        <p:nvSpPr>
-          <p:cNvPr id="15383" name="Rounded Rectangle 15382"/>
-          <p:cNvSpPr/>
-          <p:nvPr/>
-        </p:nvSpPr>
-        <p:spPr>
-          <a:xfrm>
-            <a:off x="4325112" y="3136391"/>
-            <a:ext cx="41148" cy="3063240"/>
-          </a:xfrm>
-          <a:prstGeom prst="roundRect">
-            <a:avLst>
-              <a:gd name="adj" fmla="val 6000"/>
-            </a:avLst>
-          </a:prstGeom>
-          <a:solidFill>
-            <a:srgbClr val="16704A"/>
-          </a:solidFill>
-          <a:ln>
-            <a:noFill/>
-          </a:ln>
-          <a:effectLst/>
-        </p:spPr>
-        <p:style>
-          <a:lnRef idx="1">
-            <a:schemeClr val="accent1"/>
-          </a:lnRef>
-          <a:fillRef idx="3">
-            <a:schemeClr val="accent1"/>
-          </a:fillRef>
-          <a:effectRef idx="2">
-            <a:schemeClr val="accent1"/>
-          </a:effectRef>
-          <a:fontRef idx="minor">
-            <a:schemeClr val="lt1"/>
-          </a:fontRef>
-        </p:style>
-        <p:txBody>
-          <a:bodyPr rtlCol="0" anchor="ctr"/>
-          <a:lstStyle/>
-          <a:p>
-            <a:pPr algn="ctr"/>
-          </a:p>
-        </p:txBody>
-      </p:sp>
-      <p:sp>
-        <p:nvSpPr>
-          <p:cNvPr id="15384" name="TextBox 15383"/>
-          <p:cNvSpPr txBox="1"/>
-          <p:nvPr/>
-        </p:nvSpPr>
-        <p:spPr>
-          <a:xfrm>
-            <a:off x="4526280" y="3282696"/>
-            <a:ext cx="3182112" cy="206247"/>
-          </a:xfrm>
-          <a:prstGeom prst="rect">
-            <a:avLst/>
-          </a:prstGeom>
-          <a:noFill/>
-        </p:spPr>
-        <p:txBody>
-          <a:bodyPr wrap="square" lIns="0" rIns="0" tIns="0" bIns="0">
-            <a:spAutoFit/>
-          </a:bodyPr>
-          <a:lstStyle/>
-          <a:p>
-            <a:pPr>
-              <a:lnSpc>
-                <a:spcPct val="116000"/>
-              </a:lnSpc>
-            </a:pPr>
-            <a:r>
-              <a:rPr sz="1400" b="1">
-                <a:solidFill>
-                  <a:srgbClr val="101828"/>
-                </a:solidFill>
-                <a:latin typeface="Calibri"/>
-              </a:rPr>
-              <a:t>Innovation and uniqueness</a:t>
-            </a:r>
-          </a:p>
-        </p:txBody>
-      </p:sp>
-      <p:sp>
-        <p:nvSpPr>
-          <p:cNvPr id="15385" name="TextBox 15384"/>
-          <p:cNvSpPr txBox="1"/>
-          <p:nvPr/>
-        </p:nvSpPr>
-        <p:spPr>
-          <a:xfrm>
-            <a:off x="4526280" y="3571240"/>
-            <a:ext cx="3182112" cy="1673351"/>
-          </a:xfrm>
-          <a:prstGeom prst="rect">
-            <a:avLst/>
-          </a:prstGeom>
-          <a:noFill/>
-        </p:spPr>
-        <p:txBody>
-          <a:bodyPr wrap="square" lIns="0" rIns="0" tIns="0" bIns="0">
-            <a:spAutoFit/>
-          </a:bodyPr>
-          <a:lstStyle/>
-          <a:p>
-            <a:pPr>
-              <a:lnSpc>
-                <a:spcPct val="122000"/>
-              </a:lnSpc>
-            </a:pPr>
-            <a:r>
-              <a:rPr sz="1200" b="0">
-                <a:solidFill>
-                  <a:srgbClr val="5A6472"/>
-                </a:solidFill>
-                <a:latin typeface="Calibri"/>
-              </a:rPr>
-              <a:t>Every flag names the record that produced it. Cohort patterns are kept at cohort grain instead of being blamed on one work. Reviewer decisions are pinned to a work identity that survives the nightly reload, so a verdict is never reattached to a different work, and every decision ever recorded on one survives the next.</a:t>
-            </a:r>
-          </a:p>
-        </p:txBody>
-      </p:sp>
-      <p:sp>
-        <p:nvSpPr>
-          <p:cNvPr id="15386" name="Rounded Rectangle 15385"/>
-          <p:cNvSpPr/>
-          <p:nvPr/>
-        </p:nvSpPr>
-        <p:spPr>
-          <a:xfrm>
-            <a:off x="8037576" y="3136391"/>
-            <a:ext cx="3547872" cy="3063240"/>
-          </a:xfrm>
-          <a:prstGeom prst="roundRect">
-            <a:avLst>
-              <a:gd name="adj" fmla="val 6000"/>
-            </a:avLst>
-          </a:prstGeom>
-          <a:solidFill>
-            <a:srgbClr val="F5F7FA"/>
-          </a:solidFill>
-          <a:ln w="9525">
-            <a:solidFill>
-              <a:srgbClr val="D6DCE5"/>
-            </a:solidFill>
-          </a:ln>
-          <a:effectLst/>
-        </p:spPr>
-        <p:style>
-          <a:lnRef idx="1">
-            <a:schemeClr val="accent1"/>
-          </a:lnRef>
-          <a:fillRef idx="3">
-            <a:schemeClr val="accent1"/>
-          </a:fillRef>
-          <a:effectRef idx="2">
-            <a:schemeClr val="accent1"/>
-          </a:effectRef>
-          <a:fontRef idx="minor">
-            <a:schemeClr val="lt1"/>
-          </a:fontRef>
-        </p:style>
-        <p:txBody>
-          <a:bodyPr rtlCol="0" anchor="ctr"/>
-          <a:lstStyle/>
-          <a:p>
-            <a:pPr algn="ctr"/>
-          </a:p>
-        </p:txBody>
-      </p:sp>
-      <p:sp>
-        <p:nvSpPr>
-          <p:cNvPr id="15387" name="Rounded Rectangle 15386"/>
-          <p:cNvSpPr/>
-          <p:nvPr/>
-        </p:nvSpPr>
-        <p:spPr>
-          <a:xfrm>
-            <a:off x="8037576" y="3136391"/>
-            <a:ext cx="41148" cy="3063240"/>
-          </a:xfrm>
-          <a:prstGeom prst="roundRect">
-            <a:avLst>
-              <a:gd name="adj" fmla="val 6000"/>
-            </a:avLst>
-          </a:prstGeom>
-          <a:solidFill>
-            <a:srgbClr val="96600A"/>
-          </a:solidFill>
-          <a:ln>
-            <a:noFill/>
-          </a:ln>
-          <a:effectLst/>
-        </p:spPr>
-        <p:style>
-          <a:lnRef idx="1">
-            <a:schemeClr val="accent1"/>
-          </a:lnRef>
-          <a:fillRef idx="3">
-            <a:schemeClr val="accent1"/>
-          </a:fillRef>
-          <a:effectRef idx="2">
-            <a:schemeClr val="accent1"/>
-          </a:effectRef>
-          <a:fontRef idx="minor">
-            <a:schemeClr val="lt1"/>
-          </a:fontRef>
-        </p:style>
-        <p:txBody>
-          <a:bodyPr rtlCol="0" anchor="ctr"/>
-          <a:lstStyle/>
-          <a:p>
-            <a:pPr algn="ctr"/>
-          </a:p>
-        </p:txBody>
-      </p:sp>
-      <p:sp>
-        <p:nvSpPr>
-          <p:cNvPr id="15388" name="TextBox 15387"/>
-          <p:cNvSpPr txBox="1"/>
-          <p:nvPr/>
-        </p:nvSpPr>
-        <p:spPr>
-          <a:xfrm>
-            <a:off x="8238744" y="3282696"/>
-            <a:ext cx="3182112" cy="206247"/>
-          </a:xfrm>
-          <a:prstGeom prst="rect">
-            <a:avLst/>
-          </a:prstGeom>
-          <a:noFill/>
-        </p:spPr>
-        <p:txBody>
-          <a:bodyPr wrap="square" lIns="0" rIns="0" tIns="0" bIns="0">
-            <a:spAutoFit/>
-          </a:bodyPr>
-          <a:lstStyle/>
-          <a:p>
-            <a:pPr>
-              <a:lnSpc>
-                <a:spcPct val="116000"/>
-              </a:lnSpc>
-            </a:pPr>
-            <a:r>
-              <a:rPr sz="1400" b="1">
-                <a:solidFill>
-                  <a:srgbClr val="101828"/>
-                </a:solidFill>
-                <a:latin typeface="Calibri"/>
-              </a:rPr>
-              <a:t>What it does not claim</a:t>
-            </a:r>
-          </a:p>
-        </p:txBody>
-      </p:sp>
-      <p:sp>
-        <p:nvSpPr>
-          <p:cNvPr id="15389" name="TextBox 15388"/>
-          <p:cNvSpPr txBox="1"/>
-          <p:nvPr/>
-        </p:nvSpPr>
-        <p:spPr>
-          <a:xfrm>
-            <a:off x="8238744" y="3571240"/>
-            <a:ext cx="3182112" cy="1859280"/>
-          </a:xfrm>
-          <a:prstGeom prst="rect">
-            <a:avLst/>
-          </a:prstGeom>
-          <a:noFill/>
-        </p:spPr>
-        <p:txBody>
-          <a:bodyPr wrap="square" lIns="0" rIns="0" tIns="0" bIns="0">
-            <a:spAutoFit/>
-          </a:bodyPr>
-          <a:lstStyle/>
-          <a:p>
-            <a:pPr>
-              <a:lnSpc>
-                <a:spcPct val="122000"/>
-              </a:lnSpc>
-            </a:pPr>
-            <a:r>
-              <a:rPr sz="1200" b="0">
-                <a:solidFill>
-                  <a:srgbClr val="5A6472"/>
-                </a:solidFill>
-                <a:latin typeface="Calibri"/>
-              </a:rPr>
-              <a:t>A score is not an allegation - it means a work does not resemble its peers. No field is invented: progress %, beneficiary counts and geo-tags are not published, so they are not shown. The rule book states what cannot be checked at all. A language model only labels what a work is, so it meets the right peers; it never scores or flags anything.</a:t>
+              <a:t>loader · scorer · API · tests</a:t>
             </a:r>
           </a:p>
         </p:txBody>
@@ -7538,7 +6716,7 @@
           <a:bodyPr/>
           <a:lstStyle/>
           <a:p>
-            <a:pPr eaLnBrk="1" hangingPunct="1"/>
+            <a:pPr eaLnBrk="1" hangingPunct="1" algn="ctr"/>
             <a:r>
               <a:rPr lang="en-US" sz="3600" b="1" dirty="0">
                 <a:latin typeface="Times New Roman" panose="02020603050405020304" pitchFamily="18" charset="0"/>
@@ -7560,8 +6738,8 @@
         </p:nvSpPr>
         <p:spPr bwMode="auto">
           <a:xfrm>
-            <a:off x="612648" y="1188720"/>
-            <a:ext cx="10972800" cy="475488"/>
+            <a:off x="612648" y="1078992"/>
+            <a:ext cx="10972800" cy="676656"/>
           </a:xfrm>
           <a:prstGeom prst="rect">
             <a:avLst/>
@@ -7581,6 +6759,12 @@
           <a:lstStyle/>
           <a:p>
             <a:pPr marL="342900" indent="-342900" algn="just">
+              <a:lnSpc>
+                <a:spcPct val="100000"/>
+              </a:lnSpc>
+              <a:spcAft>
+                <a:spcPts val="0"/>
+              </a:spcAft>
               <a:buFont typeface="Arial" panose="020B0604020202020204" pitchFamily="34" charset="0"/>
               <a:buChar char="•"/>
             </a:pPr>
@@ -7597,6 +6781,12 @@
           </a:p>
           <a:p>
             <a:pPr marL="342900" indent="-342900" algn="just">
+              <a:lnSpc>
+                <a:spcPct val="100000"/>
+              </a:lnSpc>
+              <a:spcAft>
+                <a:spcPts val="0"/>
+              </a:spcAft>
               <a:buFont typeface="Arial" panose="020B0604020202020204" pitchFamily="34" charset="0"/>
               <a:buChar char="•"/>
             </a:pPr>
@@ -7765,110 +6955,90 @@
           </a:prstGeom>
         </p:spPr>
       </p:pic>
-      <p:sp>
-        <p:nvSpPr>
-          <p:cNvPr id="17411" name="Rounded Rectangle 17410"/>
-          <p:cNvSpPr/>
+      <p:pic>
+        <p:nvPicPr>
+          <p:cNvPr id="17411" name="Picture 17410" descr="pipeline.png"/>
+          <p:cNvPicPr>
+            <a:picLocks noChangeAspect="1"/>
+          </p:cNvPicPr>
           <p:nvPr/>
-        </p:nvSpPr>
+        </p:nvPicPr>
+        <p:blipFill>
+          <a:blip r:embed="rId4"/>
+          <a:stretch>
+            <a:fillRect/>
+          </a:stretch>
+        </p:blipFill>
         <p:spPr>
           <a:xfrm>
             <a:off x="612648" y="1783080"/>
-            <a:ext cx="2619756" cy="1371600"/>
+            <a:ext cx="10972800" cy="1248156"/>
           </a:xfrm>
-          <a:prstGeom prst="roundRect">
-            <a:avLst>
-              <a:gd name="adj" fmla="val 6000"/>
-            </a:avLst>
+          <a:prstGeom prst="rect">
+            <a:avLst/>
           </a:prstGeom>
-          <a:solidFill>
-            <a:srgbClr val="F5F7FA"/>
-          </a:solidFill>
-          <a:ln w="9525">
-            <a:solidFill>
-              <a:srgbClr val="D6DCE5"/>
-            </a:solidFill>
-          </a:ln>
-          <a:effectLst/>
-        </p:spPr>
-        <p:style>
-          <a:lnRef idx="1">
-            <a:schemeClr val="accent1"/>
-          </a:lnRef>
-          <a:fillRef idx="3">
-            <a:schemeClr val="accent1"/>
-          </a:fillRef>
-          <a:effectRef idx="2">
-            <a:schemeClr val="accent1"/>
-          </a:effectRef>
-          <a:fontRef idx="minor">
-            <a:schemeClr val="lt1"/>
-          </a:fontRef>
-        </p:style>
-        <p:txBody>
-          <a:bodyPr rtlCol="0" anchor="ctr"/>
-          <a:lstStyle/>
-          <a:p>
-            <a:pPr algn="ctr"/>
-          </a:p>
-        </p:txBody>
-      </p:sp>
-      <p:sp>
-        <p:nvSpPr>
-          <p:cNvPr id="17412" name="Rounded Rectangle 17411"/>
-          <p:cNvSpPr/>
+        </p:spPr>
+      </p:pic>
+      <p:pic>
+        <p:nvPicPr>
+          <p:cNvPr id="17412" name="Picture 17411" descr="stack.png"/>
+          <p:cNvPicPr>
+            <a:picLocks noChangeAspect="1"/>
+          </p:cNvPicPr>
           <p:nvPr/>
-        </p:nvSpPr>
+        </p:nvPicPr>
+        <p:blipFill>
+          <a:blip r:embed="rId5"/>
+          <a:stretch>
+            <a:fillRect/>
+          </a:stretch>
+        </p:blipFill>
         <p:spPr>
           <a:xfrm>
-            <a:off x="612648" y="1783080"/>
-            <a:ext cx="2619756" cy="32004"/>
+            <a:off x="612648" y="3177540"/>
+            <a:ext cx="5532120" cy="2077618"/>
           </a:xfrm>
-          <a:prstGeom prst="roundRect">
-            <a:avLst>
-              <a:gd name="adj" fmla="val 6000"/>
-            </a:avLst>
+          <a:prstGeom prst="rect">
+            <a:avLst/>
           </a:prstGeom>
-          <a:solidFill>
-            <a:srgbClr val="0070C0"/>
-          </a:solidFill>
-          <a:ln>
-            <a:noFill/>
-          </a:ln>
-          <a:effectLst/>
-        </p:spPr>
-        <p:style>
-          <a:lnRef idx="1">
-            <a:schemeClr val="accent1"/>
-          </a:lnRef>
-          <a:fillRef idx="3">
-            <a:schemeClr val="accent1"/>
-          </a:fillRef>
-          <a:effectRef idx="2">
-            <a:schemeClr val="accent1"/>
-          </a:effectRef>
-          <a:fontRef idx="minor">
-            <a:schemeClr val="lt1"/>
-          </a:fontRef>
-        </p:style>
-        <p:txBody>
-          <a:bodyPr rtlCol="0" anchor="ctr"/>
-          <a:lstStyle/>
-          <a:p>
-            <a:pPr algn="ctr"/>
-          </a:p>
-        </p:txBody>
-      </p:sp>
-      <p:sp>
-        <p:nvSpPr>
-          <p:cNvPr id="17413" name="TextBox 17412"/>
+        </p:spPr>
+      </p:pic>
+      <p:pic>
+        <p:nvPicPr>
+          <p:cNvPr id="17413" name="Picture 17412" descr="work.png">
+            <a:hlinkClick r:id="rId7"/>
+          </p:cNvPr>
+          <p:cNvPicPr>
+            <a:picLocks noChangeAspect="1"/>
+          </p:cNvPicPr>
+          <p:nvPr/>
+        </p:nvPicPr>
+        <p:blipFill>
+          <a:blip r:embed="rId6"/>
+          <a:stretch>
+            <a:fillRect/>
+          </a:stretch>
+        </p:blipFill>
+        <p:spPr>
+          <a:xfrm>
+            <a:off x="6355080" y="3177540"/>
+            <a:ext cx="5230368" cy="2396162"/>
+          </a:xfrm>
+          <a:prstGeom prst="rect">
+            <a:avLst/>
+          </a:prstGeom>
+        </p:spPr>
+      </p:pic>
+      <p:sp>
+        <p:nvSpPr>
+          <p:cNvPr id="17414" name="TextBox 17413"/>
           <p:cNvSpPr txBox="1"/>
           <p:nvPr/>
         </p:nvSpPr>
         <p:spPr>
           <a:xfrm>
-            <a:off x="758952" y="1920240"/>
-            <a:ext cx="2327148" cy="256032"/>
+            <a:off x="6355080" y="5619422"/>
+            <a:ext cx="5230368" cy="274320"/>
           </a:xfrm>
           <a:prstGeom prst="rect">
             <a:avLst/>
@@ -7881,1885 +7051,15 @@
           </a:bodyPr>
           <a:lstStyle/>
           <a:p>
-            <a:pPr>
-              <a:lnSpc>
-                <a:spcPct val="122000"/>
-              </a:lnSpc>
-            </a:pPr>
-            <a:r>
-              <a:rPr sz="1200" b="1">
+            <a:r>
+              <a:rPr sz="950" b="1">
                 <a:solidFill>
-                  <a:srgbClr val="00548F"/>
+                  <a:srgbClr val="7A1A12"/>
                 </a:solidFill>
                 <a:latin typeface="Calibri"/>
+                <a:hlinkClick r:id="rId7"/>
               </a:rPr>
-              <a:t>AI / ML</a:t>
-            </a:r>
-          </a:p>
-        </p:txBody>
-      </p:sp>
-      <p:sp>
-        <p:nvSpPr>
-          <p:cNvPr id="17414" name="TextBox 17413"/>
-          <p:cNvSpPr txBox="1"/>
-          <p:nvPr/>
-        </p:nvSpPr>
-        <p:spPr>
-          <a:xfrm>
-            <a:off x="758952" y="2240280"/>
-            <a:ext cx="2327148" cy="914400"/>
-          </a:xfrm>
-          <a:prstGeom prst="rect">
-            <a:avLst/>
-          </a:prstGeom>
-          <a:noFill/>
-        </p:spPr>
-        <p:txBody>
-          <a:bodyPr wrap="square" lIns="0" rIns="0" tIns="0" bIns="0">
-            <a:spAutoFit/>
-          </a:bodyPr>
-          <a:lstStyle/>
-          <a:p>
-            <a:pPr>
-              <a:lnSpc>
-                <a:spcPct val="126000"/>
-              </a:lnSpc>
-            </a:pPr>
-            <a:r>
-              <a:rPr sz="1050" b="0">
-                <a:solidFill>
-                  <a:srgbClr val="5A6472"/>
-                </a:solidFill>
-                <a:latin typeface="Calibri"/>
-              </a:rPr>
-              <a:t>MiniLM sentence transformer
-Isolation Forest
-Benford + HHI statistics
-Gemini sector labelling</a:t>
-            </a:r>
-          </a:p>
-        </p:txBody>
-      </p:sp>
-      <p:sp>
-        <p:nvSpPr>
-          <p:cNvPr id="17415" name="Rounded Rectangle 17414"/>
-          <p:cNvSpPr/>
-          <p:nvPr/>
-        </p:nvSpPr>
-        <p:spPr>
-          <a:xfrm>
-            <a:off x="3396996" y="1783080"/>
-            <a:ext cx="2619756" cy="1371600"/>
-          </a:xfrm>
-          <a:prstGeom prst="roundRect">
-            <a:avLst>
-              <a:gd name="adj" fmla="val 6000"/>
-            </a:avLst>
-          </a:prstGeom>
-          <a:solidFill>
-            <a:srgbClr val="F5F7FA"/>
-          </a:solidFill>
-          <a:ln w="9525">
-            <a:solidFill>
-              <a:srgbClr val="D6DCE5"/>
-            </a:solidFill>
-          </a:ln>
-          <a:effectLst/>
-        </p:spPr>
-        <p:style>
-          <a:lnRef idx="1">
-            <a:schemeClr val="accent1"/>
-          </a:lnRef>
-          <a:fillRef idx="3">
-            <a:schemeClr val="accent1"/>
-          </a:fillRef>
-          <a:effectRef idx="2">
-            <a:schemeClr val="accent1"/>
-          </a:effectRef>
-          <a:fontRef idx="minor">
-            <a:schemeClr val="lt1"/>
-          </a:fontRef>
-        </p:style>
-        <p:txBody>
-          <a:bodyPr rtlCol="0" anchor="ctr"/>
-          <a:lstStyle/>
-          <a:p>
-            <a:pPr algn="ctr"/>
-          </a:p>
-        </p:txBody>
-      </p:sp>
-      <p:sp>
-        <p:nvSpPr>
-          <p:cNvPr id="17416" name="Rounded Rectangle 17415"/>
-          <p:cNvSpPr/>
-          <p:nvPr/>
-        </p:nvSpPr>
-        <p:spPr>
-          <a:xfrm>
-            <a:off x="3396996" y="1783080"/>
-            <a:ext cx="2619756" cy="32004"/>
-          </a:xfrm>
-          <a:prstGeom prst="roundRect">
-            <a:avLst>
-              <a:gd name="adj" fmla="val 6000"/>
-            </a:avLst>
-          </a:prstGeom>
-          <a:solidFill>
-            <a:srgbClr val="0070C0"/>
-          </a:solidFill>
-          <a:ln>
-            <a:noFill/>
-          </a:ln>
-          <a:effectLst/>
-        </p:spPr>
-        <p:style>
-          <a:lnRef idx="1">
-            <a:schemeClr val="accent1"/>
-          </a:lnRef>
-          <a:fillRef idx="3">
-            <a:schemeClr val="accent1"/>
-          </a:fillRef>
-          <a:effectRef idx="2">
-            <a:schemeClr val="accent1"/>
-          </a:effectRef>
-          <a:fontRef idx="minor">
-            <a:schemeClr val="lt1"/>
-          </a:fontRef>
-        </p:style>
-        <p:txBody>
-          <a:bodyPr rtlCol="0" anchor="ctr"/>
-          <a:lstStyle/>
-          <a:p>
-            <a:pPr algn="ctr"/>
-          </a:p>
-        </p:txBody>
-      </p:sp>
-      <p:sp>
-        <p:nvSpPr>
-          <p:cNvPr id="17417" name="TextBox 17416"/>
-          <p:cNvSpPr txBox="1"/>
-          <p:nvPr/>
-        </p:nvSpPr>
-        <p:spPr>
-          <a:xfrm>
-            <a:off x="3543300" y="1920240"/>
-            <a:ext cx="2327148" cy="256032"/>
-          </a:xfrm>
-          <a:prstGeom prst="rect">
-            <a:avLst/>
-          </a:prstGeom>
-          <a:noFill/>
-        </p:spPr>
-        <p:txBody>
-          <a:bodyPr wrap="square" lIns="0" rIns="0" tIns="0" bIns="0">
-            <a:spAutoFit/>
-          </a:bodyPr>
-          <a:lstStyle/>
-          <a:p>
-            <a:pPr>
-              <a:lnSpc>
-                <a:spcPct val="122000"/>
-              </a:lnSpc>
-            </a:pPr>
-            <a:r>
-              <a:rPr sz="1200" b="1">
-                <a:solidFill>
-                  <a:srgbClr val="00548F"/>
-                </a:solidFill>
-                <a:latin typeface="Calibri"/>
-              </a:rPr>
-              <a:t>BACKEND</a:t>
-            </a:r>
-          </a:p>
-        </p:txBody>
-      </p:sp>
-      <p:sp>
-        <p:nvSpPr>
-          <p:cNvPr id="17418" name="TextBox 17417"/>
-          <p:cNvSpPr txBox="1"/>
-          <p:nvPr/>
-        </p:nvSpPr>
-        <p:spPr>
-          <a:xfrm>
-            <a:off x="3543300" y="2240280"/>
-            <a:ext cx="2327148" cy="914400"/>
-          </a:xfrm>
-          <a:prstGeom prst="rect">
-            <a:avLst/>
-          </a:prstGeom>
-          <a:noFill/>
-        </p:spPr>
-        <p:txBody>
-          <a:bodyPr wrap="square" lIns="0" rIns="0" tIns="0" bIns="0">
-            <a:spAutoFit/>
-          </a:bodyPr>
-          <a:lstStyle/>
-          <a:p>
-            <a:pPr>
-              <a:lnSpc>
-                <a:spcPct val="126000"/>
-              </a:lnSpc>
-            </a:pPr>
-            <a:r>
-              <a:rPr sz="1050" b="0">
-                <a:solidFill>
-                  <a:srgbClr val="5A6472"/>
-                </a:solidFill>
-                <a:latin typeface="Calibri"/>
-              </a:rPr>
-              <a:t>FastAPI, read-mostly
-Postgres on Neon
-Pooled, retries dead links
-One authenticated write</a:t>
-            </a:r>
-          </a:p>
-        </p:txBody>
-      </p:sp>
-      <p:sp>
-        <p:nvSpPr>
-          <p:cNvPr id="17419" name="Rounded Rectangle 17418"/>
-          <p:cNvSpPr/>
-          <p:nvPr/>
-        </p:nvSpPr>
-        <p:spPr>
-          <a:xfrm>
-            <a:off x="6181344" y="1783080"/>
-            <a:ext cx="2619756" cy="1371600"/>
-          </a:xfrm>
-          <a:prstGeom prst="roundRect">
-            <a:avLst>
-              <a:gd name="adj" fmla="val 6000"/>
-            </a:avLst>
-          </a:prstGeom>
-          <a:solidFill>
-            <a:srgbClr val="F5F7FA"/>
-          </a:solidFill>
-          <a:ln w="9525">
-            <a:solidFill>
-              <a:srgbClr val="D6DCE5"/>
-            </a:solidFill>
-          </a:ln>
-          <a:effectLst/>
-        </p:spPr>
-        <p:style>
-          <a:lnRef idx="1">
-            <a:schemeClr val="accent1"/>
-          </a:lnRef>
-          <a:fillRef idx="3">
-            <a:schemeClr val="accent1"/>
-          </a:fillRef>
-          <a:effectRef idx="2">
-            <a:schemeClr val="accent1"/>
-          </a:effectRef>
-          <a:fontRef idx="minor">
-            <a:schemeClr val="lt1"/>
-          </a:fontRef>
-        </p:style>
-        <p:txBody>
-          <a:bodyPr rtlCol="0" anchor="ctr"/>
-          <a:lstStyle/>
-          <a:p>
-            <a:pPr algn="ctr"/>
-          </a:p>
-        </p:txBody>
-      </p:sp>
-      <p:sp>
-        <p:nvSpPr>
-          <p:cNvPr id="17420" name="Rounded Rectangle 17419"/>
-          <p:cNvSpPr/>
-          <p:nvPr/>
-        </p:nvSpPr>
-        <p:spPr>
-          <a:xfrm>
-            <a:off x="6181344" y="1783080"/>
-            <a:ext cx="2619756" cy="32004"/>
-          </a:xfrm>
-          <a:prstGeom prst="roundRect">
-            <a:avLst>
-              <a:gd name="adj" fmla="val 6000"/>
-            </a:avLst>
-          </a:prstGeom>
-          <a:solidFill>
-            <a:srgbClr val="0070C0"/>
-          </a:solidFill>
-          <a:ln>
-            <a:noFill/>
-          </a:ln>
-          <a:effectLst/>
-        </p:spPr>
-        <p:style>
-          <a:lnRef idx="1">
-            <a:schemeClr val="accent1"/>
-          </a:lnRef>
-          <a:fillRef idx="3">
-            <a:schemeClr val="accent1"/>
-          </a:fillRef>
-          <a:effectRef idx="2">
-            <a:schemeClr val="accent1"/>
-          </a:effectRef>
-          <a:fontRef idx="minor">
-            <a:schemeClr val="lt1"/>
-          </a:fontRef>
-        </p:style>
-        <p:txBody>
-          <a:bodyPr rtlCol="0" anchor="ctr"/>
-          <a:lstStyle/>
-          <a:p>
-            <a:pPr algn="ctr"/>
-          </a:p>
-        </p:txBody>
-      </p:sp>
-      <p:sp>
-        <p:nvSpPr>
-          <p:cNvPr id="17421" name="TextBox 17420"/>
-          <p:cNvSpPr txBox="1"/>
-          <p:nvPr/>
-        </p:nvSpPr>
-        <p:spPr>
-          <a:xfrm>
-            <a:off x="6327648" y="1920240"/>
-            <a:ext cx="2327148" cy="256032"/>
-          </a:xfrm>
-          <a:prstGeom prst="rect">
-            <a:avLst/>
-          </a:prstGeom>
-          <a:noFill/>
-        </p:spPr>
-        <p:txBody>
-          <a:bodyPr wrap="square" lIns="0" rIns="0" tIns="0" bIns="0">
-            <a:spAutoFit/>
-          </a:bodyPr>
-          <a:lstStyle/>
-          <a:p>
-            <a:pPr>
-              <a:lnSpc>
-                <a:spcPct val="122000"/>
-              </a:lnSpc>
-            </a:pPr>
-            <a:r>
-              <a:rPr sz="1200" b="1">
-                <a:solidFill>
-                  <a:srgbClr val="00548F"/>
-                </a:solidFill>
-                <a:latin typeface="Calibri"/>
-              </a:rPr>
-              <a:t>FRONTEND</a:t>
-            </a:r>
-          </a:p>
-        </p:txBody>
-      </p:sp>
-      <p:sp>
-        <p:nvSpPr>
-          <p:cNvPr id="17422" name="TextBox 17421"/>
-          <p:cNvSpPr txBox="1"/>
-          <p:nvPr/>
-        </p:nvSpPr>
-        <p:spPr>
-          <a:xfrm>
-            <a:off x="6327648" y="2240280"/>
-            <a:ext cx="2327148" cy="914400"/>
-          </a:xfrm>
-          <a:prstGeom prst="rect">
-            <a:avLst/>
-          </a:prstGeom>
-          <a:noFill/>
-        </p:spPr>
-        <p:txBody>
-          <a:bodyPr wrap="square" lIns="0" rIns="0" tIns="0" bIns="0">
-            <a:spAutoFit/>
-          </a:bodyPr>
-          <a:lstStyle/>
-          <a:p>
-            <a:pPr>
-              <a:lnSpc>
-                <a:spcPct val="126000"/>
-              </a:lnSpc>
-            </a:pPr>
-            <a:r>
-              <a:rPr sz="1050" b="0">
-                <a:solidFill>
-                  <a:srgbClr val="5A6472"/>
-                </a:solidFill>
-                <a:latin typeface="Calibri"/>
-              </a:rPr>
-              <a:t>Next.js App Router
-TypeScript, Tailwind
-Server-rendered
-Leaflet map</a:t>
-            </a:r>
-          </a:p>
-        </p:txBody>
-      </p:sp>
-      <p:sp>
-        <p:nvSpPr>
-          <p:cNvPr id="17423" name="Rounded Rectangle 17422"/>
-          <p:cNvSpPr/>
-          <p:nvPr/>
-        </p:nvSpPr>
-        <p:spPr>
-          <a:xfrm>
-            <a:off x="8965692" y="1783080"/>
-            <a:ext cx="2619756" cy="1371600"/>
-          </a:xfrm>
-          <a:prstGeom prst="roundRect">
-            <a:avLst>
-              <a:gd name="adj" fmla="val 6000"/>
-            </a:avLst>
-          </a:prstGeom>
-          <a:solidFill>
-            <a:srgbClr val="F5F7FA"/>
-          </a:solidFill>
-          <a:ln w="9525">
-            <a:solidFill>
-              <a:srgbClr val="D6DCE5"/>
-            </a:solidFill>
-          </a:ln>
-          <a:effectLst/>
-        </p:spPr>
-        <p:style>
-          <a:lnRef idx="1">
-            <a:schemeClr val="accent1"/>
-          </a:lnRef>
-          <a:fillRef idx="3">
-            <a:schemeClr val="accent1"/>
-          </a:fillRef>
-          <a:effectRef idx="2">
-            <a:schemeClr val="accent1"/>
-          </a:effectRef>
-          <a:fontRef idx="minor">
-            <a:schemeClr val="lt1"/>
-          </a:fontRef>
-        </p:style>
-        <p:txBody>
-          <a:bodyPr rtlCol="0" anchor="ctr"/>
-          <a:lstStyle/>
-          <a:p>
-            <a:pPr algn="ctr"/>
-          </a:p>
-        </p:txBody>
-      </p:sp>
-      <p:sp>
-        <p:nvSpPr>
-          <p:cNvPr id="17424" name="Rounded Rectangle 17423"/>
-          <p:cNvSpPr/>
-          <p:nvPr/>
-        </p:nvSpPr>
-        <p:spPr>
-          <a:xfrm>
-            <a:off x="8965692" y="1783080"/>
-            <a:ext cx="2619756" cy="32004"/>
-          </a:xfrm>
-          <a:prstGeom prst="roundRect">
-            <a:avLst>
-              <a:gd name="adj" fmla="val 6000"/>
-            </a:avLst>
-          </a:prstGeom>
-          <a:solidFill>
-            <a:srgbClr val="0070C0"/>
-          </a:solidFill>
-          <a:ln>
-            <a:noFill/>
-          </a:ln>
-          <a:effectLst/>
-        </p:spPr>
-        <p:style>
-          <a:lnRef idx="1">
-            <a:schemeClr val="accent1"/>
-          </a:lnRef>
-          <a:fillRef idx="3">
-            <a:schemeClr val="accent1"/>
-          </a:fillRef>
-          <a:effectRef idx="2">
-            <a:schemeClr val="accent1"/>
-          </a:effectRef>
-          <a:fontRef idx="minor">
-            <a:schemeClr val="lt1"/>
-          </a:fontRef>
-        </p:style>
-        <p:txBody>
-          <a:bodyPr rtlCol="0" anchor="ctr"/>
-          <a:lstStyle/>
-          <a:p>
-            <a:pPr algn="ctr"/>
-          </a:p>
-        </p:txBody>
-      </p:sp>
-      <p:sp>
-        <p:nvSpPr>
-          <p:cNvPr id="17425" name="TextBox 17424"/>
-          <p:cNvSpPr txBox="1"/>
-          <p:nvPr/>
-        </p:nvSpPr>
-        <p:spPr>
-          <a:xfrm>
-            <a:off x="9111996" y="1920240"/>
-            <a:ext cx="2327148" cy="256032"/>
-          </a:xfrm>
-          <a:prstGeom prst="rect">
-            <a:avLst/>
-          </a:prstGeom>
-          <a:noFill/>
-        </p:spPr>
-        <p:txBody>
-          <a:bodyPr wrap="square" lIns="0" rIns="0" tIns="0" bIns="0">
-            <a:spAutoFit/>
-          </a:bodyPr>
-          <a:lstStyle/>
-          <a:p>
-            <a:pPr>
-              <a:lnSpc>
-                <a:spcPct val="122000"/>
-              </a:lnSpc>
-            </a:pPr>
-            <a:r>
-              <a:rPr sz="1200" b="1">
-                <a:solidFill>
-                  <a:srgbClr val="00548F"/>
-                </a:solidFill>
-                <a:latin typeface="Calibri"/>
-              </a:rPr>
-              <a:t>PLATFORM</a:t>
-            </a:r>
-          </a:p>
-        </p:txBody>
-      </p:sp>
-      <p:sp>
-        <p:nvSpPr>
-          <p:cNvPr id="17426" name="TextBox 17425"/>
-          <p:cNvSpPr txBox="1"/>
-          <p:nvPr/>
-        </p:nvSpPr>
-        <p:spPr>
-          <a:xfrm>
-            <a:off x="9111996" y="2240280"/>
-            <a:ext cx="2327148" cy="914400"/>
-          </a:xfrm>
-          <a:prstGeom prst="rect">
-            <a:avLst/>
-          </a:prstGeom>
-          <a:noFill/>
-        </p:spPr>
-        <p:txBody>
-          <a:bodyPr wrap="square" lIns="0" rIns="0" tIns="0" bIns="0">
-            <a:spAutoFit/>
-          </a:bodyPr>
-          <a:lstStyle/>
-          <a:p>
-            <a:pPr>
-              <a:lnSpc>
-                <a:spcPct val="126000"/>
-              </a:lnSpc>
-            </a:pPr>
-            <a:r>
-              <a:rPr sz="1050" b="0">
-                <a:solidFill>
-                  <a:srgbClr val="5A6472"/>
-                </a:solidFill>
-                <a:latin typeface="Calibri"/>
-              </a:rPr>
-              <a:t>Vercel, two projects
-GitHub Actions nightly
-136 automated tests
-Live since day one</a:t>
-            </a:r>
-          </a:p>
-        </p:txBody>
-      </p:sp>
-      <p:sp>
-        <p:nvSpPr>
-          <p:cNvPr id="17427" name="TextBox 17426"/>
-          <p:cNvSpPr txBox="1"/>
-          <p:nvPr/>
-        </p:nvSpPr>
-        <p:spPr>
-          <a:xfrm>
-            <a:off x="612648" y="3337560"/>
-            <a:ext cx="10972800" cy="201168"/>
-          </a:xfrm>
-          <a:prstGeom prst="rect">
-            <a:avLst/>
-          </a:prstGeom>
-          <a:noFill/>
-        </p:spPr>
-        <p:txBody>
-          <a:bodyPr wrap="square" lIns="0" rIns="0" tIns="0" bIns="0">
-            <a:spAutoFit/>
-          </a:bodyPr>
-          <a:lstStyle/>
-          <a:p>
-            <a:pPr>
-              <a:lnSpc>
-                <a:spcPct val="122000"/>
-              </a:lnSpc>
-            </a:pPr>
-            <a:r>
-              <a:rPr sz="1200" b="1">
-                <a:solidFill>
-                  <a:srgbClr val="101828"/>
-                </a:solidFill>
-                <a:latin typeface="Calibri"/>
-              </a:rPr>
-              <a:t>The risk score: five weighted signals about the work itself</a:t>
-            </a:r>
-          </a:p>
-        </p:txBody>
-      </p:sp>
-      <p:sp>
-        <p:nvSpPr>
-          <p:cNvPr id="17428" name="Rounded Rectangle 17427"/>
-          <p:cNvSpPr/>
-          <p:nvPr/>
-        </p:nvSpPr>
-        <p:spPr>
-          <a:xfrm>
-            <a:off x="612648" y="3648456"/>
-            <a:ext cx="2092147" cy="676656"/>
-          </a:xfrm>
-          <a:prstGeom prst="roundRect">
-            <a:avLst>
-              <a:gd name="adj" fmla="val 6000"/>
-            </a:avLst>
-          </a:prstGeom>
-          <a:solidFill>
-            <a:srgbClr val="EAF2FB"/>
-          </a:solidFill>
-          <a:ln w="9525">
-            <a:solidFill>
-              <a:srgbClr val="BFDCF2"/>
-            </a:solidFill>
-          </a:ln>
-          <a:effectLst/>
-        </p:spPr>
-        <p:style>
-          <a:lnRef idx="1">
-            <a:schemeClr val="accent1"/>
-          </a:lnRef>
-          <a:fillRef idx="3">
-            <a:schemeClr val="accent1"/>
-          </a:fillRef>
-          <a:effectRef idx="2">
-            <a:schemeClr val="accent1"/>
-          </a:effectRef>
-          <a:fontRef idx="minor">
-            <a:schemeClr val="lt1"/>
-          </a:fontRef>
-        </p:style>
-        <p:txBody>
-          <a:bodyPr rtlCol="0" anchor="ctr"/>
-          <a:lstStyle/>
-          <a:p>
-            <a:pPr algn="ctr"/>
-          </a:p>
-        </p:txBody>
-      </p:sp>
-      <p:sp>
-        <p:nvSpPr>
-          <p:cNvPr id="17429" name="TextBox 17428"/>
-          <p:cNvSpPr txBox="1"/>
-          <p:nvPr/>
-        </p:nvSpPr>
-        <p:spPr>
-          <a:xfrm>
-            <a:off x="740664" y="3730752"/>
-            <a:ext cx="1836115" cy="274320"/>
-          </a:xfrm>
-          <a:prstGeom prst="rect">
-            <a:avLst/>
-          </a:prstGeom>
-          <a:noFill/>
-        </p:spPr>
-        <p:txBody>
-          <a:bodyPr wrap="square" lIns="0" rIns="0" tIns="0" bIns="0">
-            <a:spAutoFit/>
-          </a:bodyPr>
-          <a:lstStyle/>
-          <a:p>
-            <a:pPr>
-              <a:lnSpc>
-                <a:spcPct val="122000"/>
-              </a:lnSpc>
-            </a:pPr>
-            <a:r>
-              <a:rPr sz="1500" b="1">
-                <a:solidFill>
-                  <a:srgbClr val="00548F"/>
-                </a:solidFill>
-                <a:latin typeface="Consolas"/>
-              </a:rPr>
-              <a:t>25%</a:t>
-            </a:r>
-          </a:p>
-        </p:txBody>
-      </p:sp>
-      <p:sp>
-        <p:nvSpPr>
-          <p:cNvPr id="17430" name="TextBox 17429"/>
-          <p:cNvSpPr txBox="1"/>
-          <p:nvPr/>
-        </p:nvSpPr>
-        <p:spPr>
-          <a:xfrm>
-            <a:off x="740664" y="4041648"/>
-            <a:ext cx="1836115" cy="237744"/>
-          </a:xfrm>
-          <a:prstGeom prst="rect">
-            <a:avLst/>
-          </a:prstGeom>
-          <a:noFill/>
-        </p:spPr>
-        <p:txBody>
-          <a:bodyPr wrap="square" lIns="0" rIns="0" tIns="0" bIns="0">
-            <a:spAutoFit/>
-          </a:bodyPr>
-          <a:lstStyle/>
-          <a:p>
-            <a:pPr>
-              <a:lnSpc>
-                <a:spcPct val="122000"/>
-              </a:lnSpc>
-            </a:pPr>
-            <a:r>
-              <a:rPr sz="1000" b="0">
-                <a:solidFill>
-                  <a:srgbClr val="5A6472"/>
-                </a:solidFill>
-                <a:latin typeface="Calibri"/>
-              </a:rPr>
-              <a:t>COST</a:t>
-            </a:r>
-          </a:p>
-        </p:txBody>
-      </p:sp>
-      <p:sp>
-        <p:nvSpPr>
-          <p:cNvPr id="17431" name="Rounded Rectangle 17430"/>
-          <p:cNvSpPr/>
-          <p:nvPr/>
-        </p:nvSpPr>
-        <p:spPr>
-          <a:xfrm>
-            <a:off x="2832811" y="3648456"/>
-            <a:ext cx="2092147" cy="676656"/>
-          </a:xfrm>
-          <a:prstGeom prst="roundRect">
-            <a:avLst>
-              <a:gd name="adj" fmla="val 6000"/>
-            </a:avLst>
-          </a:prstGeom>
-          <a:solidFill>
-            <a:srgbClr val="EAF2FB"/>
-          </a:solidFill>
-          <a:ln w="9525">
-            <a:solidFill>
-              <a:srgbClr val="BFDCF2"/>
-            </a:solidFill>
-          </a:ln>
-          <a:effectLst/>
-        </p:spPr>
-        <p:style>
-          <a:lnRef idx="1">
-            <a:schemeClr val="accent1"/>
-          </a:lnRef>
-          <a:fillRef idx="3">
-            <a:schemeClr val="accent1"/>
-          </a:fillRef>
-          <a:effectRef idx="2">
-            <a:schemeClr val="accent1"/>
-          </a:effectRef>
-          <a:fontRef idx="minor">
-            <a:schemeClr val="lt1"/>
-          </a:fontRef>
-        </p:style>
-        <p:txBody>
-          <a:bodyPr rtlCol="0" anchor="ctr"/>
-          <a:lstStyle/>
-          <a:p>
-            <a:pPr algn="ctr"/>
-          </a:p>
-        </p:txBody>
-      </p:sp>
-      <p:sp>
-        <p:nvSpPr>
-          <p:cNvPr id="17432" name="TextBox 17431"/>
-          <p:cNvSpPr txBox="1"/>
-          <p:nvPr/>
-        </p:nvSpPr>
-        <p:spPr>
-          <a:xfrm>
-            <a:off x="2960827" y="3730752"/>
-            <a:ext cx="1836115" cy="274320"/>
-          </a:xfrm>
-          <a:prstGeom prst="rect">
-            <a:avLst/>
-          </a:prstGeom>
-          <a:noFill/>
-        </p:spPr>
-        <p:txBody>
-          <a:bodyPr wrap="square" lIns="0" rIns="0" tIns="0" bIns="0">
-            <a:spAutoFit/>
-          </a:bodyPr>
-          <a:lstStyle/>
-          <a:p>
-            <a:pPr>
-              <a:lnSpc>
-                <a:spcPct val="122000"/>
-              </a:lnSpc>
-            </a:pPr>
-            <a:r>
-              <a:rPr sz="1500" b="1">
-                <a:solidFill>
-                  <a:srgbClr val="00548F"/>
-                </a:solidFill>
-                <a:latin typeface="Consolas"/>
-              </a:rPr>
-              <a:t>25%</a:t>
-            </a:r>
-          </a:p>
-        </p:txBody>
-      </p:sp>
-      <p:sp>
-        <p:nvSpPr>
-          <p:cNvPr id="17433" name="TextBox 17432"/>
-          <p:cNvSpPr txBox="1"/>
-          <p:nvPr/>
-        </p:nvSpPr>
-        <p:spPr>
-          <a:xfrm>
-            <a:off x="2960827" y="4041648"/>
-            <a:ext cx="1836115" cy="237744"/>
-          </a:xfrm>
-          <a:prstGeom prst="rect">
-            <a:avLst/>
-          </a:prstGeom>
-          <a:noFill/>
-        </p:spPr>
-        <p:txBody>
-          <a:bodyPr wrap="square" lIns="0" rIns="0" tIns="0" bIns="0">
-            <a:spAutoFit/>
-          </a:bodyPr>
-          <a:lstStyle/>
-          <a:p>
-            <a:pPr>
-              <a:lnSpc>
-                <a:spcPct val="122000"/>
-              </a:lnSpc>
-            </a:pPr>
-            <a:r>
-              <a:rPr sz="1000" b="0">
-                <a:solidFill>
-                  <a:srgbClr val="5A6472"/>
-                </a:solidFill>
-                <a:latin typeface="Calibri"/>
-              </a:rPr>
-              <a:t>DELAY</a:t>
-            </a:r>
-          </a:p>
-        </p:txBody>
-      </p:sp>
-      <p:sp>
-        <p:nvSpPr>
-          <p:cNvPr id="17434" name="Rounded Rectangle 17433"/>
-          <p:cNvSpPr/>
-          <p:nvPr/>
-        </p:nvSpPr>
-        <p:spPr>
-          <a:xfrm>
-            <a:off x="5052974" y="3648456"/>
-            <a:ext cx="2092147" cy="676656"/>
-          </a:xfrm>
-          <a:prstGeom prst="roundRect">
-            <a:avLst>
-              <a:gd name="adj" fmla="val 6000"/>
-            </a:avLst>
-          </a:prstGeom>
-          <a:solidFill>
-            <a:srgbClr val="EAF2FB"/>
-          </a:solidFill>
-          <a:ln w="9525">
-            <a:solidFill>
-              <a:srgbClr val="BFDCF2"/>
-            </a:solidFill>
-          </a:ln>
-          <a:effectLst/>
-        </p:spPr>
-        <p:style>
-          <a:lnRef idx="1">
-            <a:schemeClr val="accent1"/>
-          </a:lnRef>
-          <a:fillRef idx="3">
-            <a:schemeClr val="accent1"/>
-          </a:fillRef>
-          <a:effectRef idx="2">
-            <a:schemeClr val="accent1"/>
-          </a:effectRef>
-          <a:fontRef idx="minor">
-            <a:schemeClr val="lt1"/>
-          </a:fontRef>
-        </p:style>
-        <p:txBody>
-          <a:bodyPr rtlCol="0" anchor="ctr"/>
-          <a:lstStyle/>
-          <a:p>
-            <a:pPr algn="ctr"/>
-          </a:p>
-        </p:txBody>
-      </p:sp>
-      <p:sp>
-        <p:nvSpPr>
-          <p:cNvPr id="17435" name="TextBox 17434"/>
-          <p:cNvSpPr txBox="1"/>
-          <p:nvPr/>
-        </p:nvSpPr>
-        <p:spPr>
-          <a:xfrm>
-            <a:off x="5180990" y="3730752"/>
-            <a:ext cx="1836115" cy="274320"/>
-          </a:xfrm>
-          <a:prstGeom prst="rect">
-            <a:avLst/>
-          </a:prstGeom>
-          <a:noFill/>
-        </p:spPr>
-        <p:txBody>
-          <a:bodyPr wrap="square" lIns="0" rIns="0" tIns="0" bIns="0">
-            <a:spAutoFit/>
-          </a:bodyPr>
-          <a:lstStyle/>
-          <a:p>
-            <a:pPr>
-              <a:lnSpc>
-                <a:spcPct val="122000"/>
-              </a:lnSpc>
-            </a:pPr>
-            <a:r>
-              <a:rPr sz="1500" b="1">
-                <a:solidFill>
-                  <a:srgbClr val="00548F"/>
-                </a:solidFill>
-                <a:latin typeface="Consolas"/>
-              </a:rPr>
-              <a:t>20%</a:t>
-            </a:r>
-          </a:p>
-        </p:txBody>
-      </p:sp>
-      <p:sp>
-        <p:nvSpPr>
-          <p:cNvPr id="17436" name="TextBox 17435"/>
-          <p:cNvSpPr txBox="1"/>
-          <p:nvPr/>
-        </p:nvSpPr>
-        <p:spPr>
-          <a:xfrm>
-            <a:off x="5180990" y="4041648"/>
-            <a:ext cx="1836115" cy="237744"/>
-          </a:xfrm>
-          <a:prstGeom prst="rect">
-            <a:avLst/>
-          </a:prstGeom>
-          <a:noFill/>
-        </p:spPr>
-        <p:txBody>
-          <a:bodyPr wrap="square" lIns="0" rIns="0" tIns="0" bIns="0">
-            <a:spAutoFit/>
-          </a:bodyPr>
-          <a:lstStyle/>
-          <a:p>
-            <a:pPr>
-              <a:lnSpc>
-                <a:spcPct val="122000"/>
-              </a:lnSpc>
-            </a:pPr>
-            <a:r>
-              <a:rPr sz="1000" b="0">
-                <a:solidFill>
-                  <a:srgbClr val="5A6472"/>
-                </a:solidFill>
-                <a:latin typeface="Calibri"/>
-              </a:rPr>
-              <a:t>DUPLICATE</a:t>
-            </a:r>
-          </a:p>
-        </p:txBody>
-      </p:sp>
-      <p:sp>
-        <p:nvSpPr>
-          <p:cNvPr id="17437" name="Rounded Rectangle 17436"/>
-          <p:cNvSpPr/>
-          <p:nvPr/>
-        </p:nvSpPr>
-        <p:spPr>
-          <a:xfrm>
-            <a:off x="7273137" y="3648456"/>
-            <a:ext cx="2092147" cy="676656"/>
-          </a:xfrm>
-          <a:prstGeom prst="roundRect">
-            <a:avLst>
-              <a:gd name="adj" fmla="val 6000"/>
-            </a:avLst>
-          </a:prstGeom>
-          <a:solidFill>
-            <a:srgbClr val="EAF2FB"/>
-          </a:solidFill>
-          <a:ln w="9525">
-            <a:solidFill>
-              <a:srgbClr val="BFDCF2"/>
-            </a:solidFill>
-          </a:ln>
-          <a:effectLst/>
-        </p:spPr>
-        <p:style>
-          <a:lnRef idx="1">
-            <a:schemeClr val="accent1"/>
-          </a:lnRef>
-          <a:fillRef idx="3">
-            <a:schemeClr val="accent1"/>
-          </a:fillRef>
-          <a:effectRef idx="2">
-            <a:schemeClr val="accent1"/>
-          </a:effectRef>
-          <a:fontRef idx="minor">
-            <a:schemeClr val="lt1"/>
-          </a:fontRef>
-        </p:style>
-        <p:txBody>
-          <a:bodyPr rtlCol="0" anchor="ctr"/>
-          <a:lstStyle/>
-          <a:p>
-            <a:pPr algn="ctr"/>
-          </a:p>
-        </p:txBody>
-      </p:sp>
-      <p:sp>
-        <p:nvSpPr>
-          <p:cNvPr id="17438" name="TextBox 17437"/>
-          <p:cNvSpPr txBox="1"/>
-          <p:nvPr/>
-        </p:nvSpPr>
-        <p:spPr>
-          <a:xfrm>
-            <a:off x="7401153" y="3730752"/>
-            <a:ext cx="1836115" cy="274320"/>
-          </a:xfrm>
-          <a:prstGeom prst="rect">
-            <a:avLst/>
-          </a:prstGeom>
-          <a:noFill/>
-        </p:spPr>
-        <p:txBody>
-          <a:bodyPr wrap="square" lIns="0" rIns="0" tIns="0" bIns="0">
-            <a:spAutoFit/>
-          </a:bodyPr>
-          <a:lstStyle/>
-          <a:p>
-            <a:pPr>
-              <a:lnSpc>
-                <a:spcPct val="122000"/>
-              </a:lnSpc>
-            </a:pPr>
-            <a:r>
-              <a:rPr sz="1500" b="1">
-                <a:solidFill>
-                  <a:srgbClr val="00548F"/>
-                </a:solidFill>
-                <a:latin typeface="Consolas"/>
-              </a:rPr>
-              <a:t>15%</a:t>
-            </a:r>
-          </a:p>
-        </p:txBody>
-      </p:sp>
-      <p:sp>
-        <p:nvSpPr>
-          <p:cNvPr id="17439" name="TextBox 17438"/>
-          <p:cNvSpPr txBox="1"/>
-          <p:nvPr/>
-        </p:nvSpPr>
-        <p:spPr>
-          <a:xfrm>
-            <a:off x="7401153" y="4041648"/>
-            <a:ext cx="1836115" cy="237744"/>
-          </a:xfrm>
-          <a:prstGeom prst="rect">
-            <a:avLst/>
-          </a:prstGeom>
-          <a:noFill/>
-        </p:spPr>
-        <p:txBody>
-          <a:bodyPr wrap="square" lIns="0" rIns="0" tIns="0" bIns="0">
-            <a:spAutoFit/>
-          </a:bodyPr>
-          <a:lstStyle/>
-          <a:p>
-            <a:pPr>
-              <a:lnSpc>
-                <a:spcPct val="122000"/>
-              </a:lnSpc>
-            </a:pPr>
-            <a:r>
-              <a:rPr sz="1000" b="0">
-                <a:solidFill>
-                  <a:srgbClr val="5A6472"/>
-                </a:solidFill>
-                <a:latin typeface="Calibri"/>
-              </a:rPr>
-              <a:t>AGENCY</a:t>
-            </a:r>
-          </a:p>
-        </p:txBody>
-      </p:sp>
-      <p:sp>
-        <p:nvSpPr>
-          <p:cNvPr id="17440" name="Rounded Rectangle 17439"/>
-          <p:cNvSpPr/>
-          <p:nvPr/>
-        </p:nvSpPr>
-        <p:spPr>
-          <a:xfrm>
-            <a:off x="9493300" y="3648456"/>
-            <a:ext cx="2092147" cy="676656"/>
-          </a:xfrm>
-          <a:prstGeom prst="roundRect">
-            <a:avLst>
-              <a:gd name="adj" fmla="val 6000"/>
-            </a:avLst>
-          </a:prstGeom>
-          <a:solidFill>
-            <a:srgbClr val="EAF2FB"/>
-          </a:solidFill>
-          <a:ln w="9525">
-            <a:solidFill>
-              <a:srgbClr val="BFDCF2"/>
-            </a:solidFill>
-          </a:ln>
-          <a:effectLst/>
-        </p:spPr>
-        <p:style>
-          <a:lnRef idx="1">
-            <a:schemeClr val="accent1"/>
-          </a:lnRef>
-          <a:fillRef idx="3">
-            <a:schemeClr val="accent1"/>
-          </a:fillRef>
-          <a:effectRef idx="2">
-            <a:schemeClr val="accent1"/>
-          </a:effectRef>
-          <a:fontRef idx="minor">
-            <a:schemeClr val="lt1"/>
-          </a:fontRef>
-        </p:style>
-        <p:txBody>
-          <a:bodyPr rtlCol="0" anchor="ctr"/>
-          <a:lstStyle/>
-          <a:p>
-            <a:pPr algn="ctr"/>
-          </a:p>
-        </p:txBody>
-      </p:sp>
-      <p:sp>
-        <p:nvSpPr>
-          <p:cNvPr id="17441" name="TextBox 17440"/>
-          <p:cNvSpPr txBox="1"/>
-          <p:nvPr/>
-        </p:nvSpPr>
-        <p:spPr>
-          <a:xfrm>
-            <a:off x="9621316" y="3730752"/>
-            <a:ext cx="1836115" cy="274320"/>
-          </a:xfrm>
-          <a:prstGeom prst="rect">
-            <a:avLst/>
-          </a:prstGeom>
-          <a:noFill/>
-        </p:spPr>
-        <p:txBody>
-          <a:bodyPr wrap="square" lIns="0" rIns="0" tIns="0" bIns="0">
-            <a:spAutoFit/>
-          </a:bodyPr>
-          <a:lstStyle/>
-          <a:p>
-            <a:pPr>
-              <a:lnSpc>
-                <a:spcPct val="122000"/>
-              </a:lnSpc>
-            </a:pPr>
-            <a:r>
-              <a:rPr sz="1500" b="1">
-                <a:solidFill>
-                  <a:srgbClr val="00548F"/>
-                </a:solidFill>
-                <a:latin typeface="Consolas"/>
-              </a:rPr>
-              <a:t>15%</a:t>
-            </a:r>
-          </a:p>
-        </p:txBody>
-      </p:sp>
-      <p:sp>
-        <p:nvSpPr>
-          <p:cNvPr id="17442" name="TextBox 17441"/>
-          <p:cNvSpPr txBox="1"/>
-          <p:nvPr/>
-        </p:nvSpPr>
-        <p:spPr>
-          <a:xfrm>
-            <a:off x="9621316" y="4041648"/>
-            <a:ext cx="1836115" cy="237744"/>
-          </a:xfrm>
-          <a:prstGeom prst="rect">
-            <a:avLst/>
-          </a:prstGeom>
-          <a:noFill/>
-        </p:spPr>
-        <p:txBody>
-          <a:bodyPr wrap="square" lIns="0" rIns="0" tIns="0" bIns="0">
-            <a:spAutoFit/>
-          </a:bodyPr>
-          <a:lstStyle/>
-          <a:p>
-            <a:pPr>
-              <a:lnSpc>
-                <a:spcPct val="122000"/>
-              </a:lnSpc>
-            </a:pPr>
-            <a:r>
-              <a:rPr sz="1000" b="0">
-                <a:solidFill>
-                  <a:srgbClr val="5A6472"/>
-                </a:solidFill>
-                <a:latin typeface="Calibri"/>
-              </a:rPr>
-              <a:t>COMPLIANCE</a:t>
-            </a:r>
-          </a:p>
-        </p:txBody>
-      </p:sp>
-      <p:sp>
-        <p:nvSpPr>
-          <p:cNvPr id="17443" name="TextBox 17442"/>
-          <p:cNvSpPr txBox="1"/>
-          <p:nvPr/>
-        </p:nvSpPr>
-        <p:spPr>
-          <a:xfrm>
-            <a:off x="612648" y="4544568"/>
-            <a:ext cx="10972800" cy="201168"/>
-          </a:xfrm>
-          <a:prstGeom prst="rect">
-            <a:avLst/>
-          </a:prstGeom>
-          <a:noFill/>
-        </p:spPr>
-        <p:txBody>
-          <a:bodyPr wrap="square" lIns="0" rIns="0" tIns="0" bIns="0">
-            <a:spAutoFit/>
-          </a:bodyPr>
-          <a:lstStyle/>
-          <a:p>
-            <a:pPr>
-              <a:lnSpc>
-                <a:spcPct val="122000"/>
-              </a:lnSpc>
-            </a:pPr>
-            <a:r>
-              <a:rPr sz="1200" b="1">
-                <a:solidFill>
-                  <a:srgbClr val="101828"/>
-                </a:solidFill>
-                <a:latin typeface="Calibri"/>
-              </a:rPr>
-              <a:t>Four cohort detectors: patterns that belong to an agency or an MP, never folded into a work's score</a:t>
-            </a:r>
-          </a:p>
-        </p:txBody>
-      </p:sp>
-      <p:sp>
-        <p:nvSpPr>
-          <p:cNvPr id="17444" name="Rounded Rectangle 17443"/>
-          <p:cNvSpPr/>
-          <p:nvPr/>
-        </p:nvSpPr>
-        <p:spPr>
-          <a:xfrm>
-            <a:off x="612648" y="4855464"/>
-            <a:ext cx="2647188" cy="676656"/>
-          </a:xfrm>
-          <a:prstGeom prst="roundRect">
-            <a:avLst>
-              <a:gd name="adj" fmla="val 6000"/>
-            </a:avLst>
-          </a:prstGeom>
-          <a:solidFill>
-            <a:srgbClr val="EAF2FB"/>
-          </a:solidFill>
-          <a:ln w="9525">
-            <a:solidFill>
-              <a:srgbClr val="BFDCF2"/>
-            </a:solidFill>
-          </a:ln>
-          <a:effectLst/>
-        </p:spPr>
-        <p:style>
-          <a:lnRef idx="1">
-            <a:schemeClr val="accent1"/>
-          </a:lnRef>
-          <a:fillRef idx="3">
-            <a:schemeClr val="accent1"/>
-          </a:fillRef>
-          <a:effectRef idx="2">
-            <a:schemeClr val="accent1"/>
-          </a:effectRef>
-          <a:fontRef idx="minor">
-            <a:schemeClr val="lt1"/>
-          </a:fontRef>
-        </p:style>
-        <p:txBody>
-          <a:bodyPr rtlCol="0" anchor="ctr"/>
-          <a:lstStyle/>
-          <a:p>
-            <a:pPr algn="ctr"/>
-          </a:p>
-        </p:txBody>
-      </p:sp>
-      <p:sp>
-        <p:nvSpPr>
-          <p:cNvPr id="17445" name="TextBox 17444"/>
-          <p:cNvSpPr txBox="1"/>
-          <p:nvPr/>
-        </p:nvSpPr>
-        <p:spPr>
-          <a:xfrm>
-            <a:off x="740664" y="4937759"/>
-            <a:ext cx="2391156" cy="274320"/>
-          </a:xfrm>
-          <a:prstGeom prst="rect">
-            <a:avLst/>
-          </a:prstGeom>
-          <a:noFill/>
-        </p:spPr>
-        <p:txBody>
-          <a:bodyPr wrap="square" lIns="0" rIns="0" tIns="0" bIns="0">
-            <a:spAutoFit/>
-          </a:bodyPr>
-          <a:lstStyle/>
-          <a:p>
-            <a:pPr>
-              <a:lnSpc>
-                <a:spcPct val="122000"/>
-              </a:lnSpc>
-            </a:pPr>
-            <a:r>
-              <a:rPr sz="1500" b="1">
-                <a:solidFill>
-                  <a:srgbClr val="16704A"/>
-                </a:solidFill>
-                <a:latin typeface="Consolas"/>
-              </a:rPr>
-              <a:t>311 findings</a:t>
-            </a:r>
-          </a:p>
-        </p:txBody>
-      </p:sp>
-      <p:sp>
-        <p:nvSpPr>
-          <p:cNvPr id="17446" name="TextBox 17445"/>
-          <p:cNvSpPr txBox="1"/>
-          <p:nvPr/>
-        </p:nvSpPr>
-        <p:spPr>
-          <a:xfrm>
-            <a:off x="740664" y="5248655"/>
-            <a:ext cx="2391156" cy="237744"/>
-          </a:xfrm>
-          <a:prstGeom prst="rect">
-            <a:avLst/>
-          </a:prstGeom>
-          <a:noFill/>
-        </p:spPr>
-        <p:txBody>
-          <a:bodyPr wrap="square" lIns="0" rIns="0" tIns="0" bIns="0">
-            <a:spAutoFit/>
-          </a:bodyPr>
-          <a:lstStyle/>
-          <a:p>
-            <a:pPr>
-              <a:lnSpc>
-                <a:spcPct val="122000"/>
-              </a:lnSpc>
-            </a:pPr>
-            <a:r>
-              <a:rPr sz="1000" b="0">
-                <a:solidFill>
-                  <a:srgbClr val="5A6472"/>
-                </a:solidFill>
-                <a:latin typeface="Calibri"/>
-              </a:rPr>
-              <a:t>D-01 Year-end burst</a:t>
-            </a:r>
-          </a:p>
-        </p:txBody>
-      </p:sp>
-      <p:sp>
-        <p:nvSpPr>
-          <p:cNvPr id="17447" name="Rounded Rectangle 17446"/>
-          <p:cNvSpPr/>
-          <p:nvPr/>
-        </p:nvSpPr>
-        <p:spPr>
-          <a:xfrm>
-            <a:off x="3387852" y="4855464"/>
-            <a:ext cx="2647188" cy="676656"/>
-          </a:xfrm>
-          <a:prstGeom prst="roundRect">
-            <a:avLst>
-              <a:gd name="adj" fmla="val 6000"/>
-            </a:avLst>
-          </a:prstGeom>
-          <a:solidFill>
-            <a:srgbClr val="EAF2FB"/>
-          </a:solidFill>
-          <a:ln w="9525">
-            <a:solidFill>
-              <a:srgbClr val="BFDCF2"/>
-            </a:solidFill>
-          </a:ln>
-          <a:effectLst/>
-        </p:spPr>
-        <p:style>
-          <a:lnRef idx="1">
-            <a:schemeClr val="accent1"/>
-          </a:lnRef>
-          <a:fillRef idx="3">
-            <a:schemeClr val="accent1"/>
-          </a:fillRef>
-          <a:effectRef idx="2">
-            <a:schemeClr val="accent1"/>
-          </a:effectRef>
-          <a:fontRef idx="minor">
-            <a:schemeClr val="lt1"/>
-          </a:fontRef>
-        </p:style>
-        <p:txBody>
-          <a:bodyPr rtlCol="0" anchor="ctr"/>
-          <a:lstStyle/>
-          <a:p>
-            <a:pPr algn="ctr"/>
-          </a:p>
-        </p:txBody>
-      </p:sp>
-      <p:sp>
-        <p:nvSpPr>
-          <p:cNvPr id="17448" name="TextBox 17447"/>
-          <p:cNvSpPr txBox="1"/>
-          <p:nvPr/>
-        </p:nvSpPr>
-        <p:spPr>
-          <a:xfrm>
-            <a:off x="3515868" y="4937759"/>
-            <a:ext cx="2391156" cy="274320"/>
-          </a:xfrm>
-          <a:prstGeom prst="rect">
-            <a:avLst/>
-          </a:prstGeom>
-          <a:noFill/>
-        </p:spPr>
-        <p:txBody>
-          <a:bodyPr wrap="square" lIns="0" rIns="0" tIns="0" bIns="0">
-            <a:spAutoFit/>
-          </a:bodyPr>
-          <a:lstStyle/>
-          <a:p>
-            <a:pPr>
-              <a:lnSpc>
-                <a:spcPct val="122000"/>
-              </a:lnSpc>
-            </a:pPr>
-            <a:r>
-              <a:rPr sz="1500" b="1">
-                <a:solidFill>
-                  <a:srgbClr val="16704A"/>
-                </a:solidFill>
-                <a:latin typeface="Consolas"/>
-              </a:rPr>
-              <a:t>137 findings</a:t>
-            </a:r>
-          </a:p>
-        </p:txBody>
-      </p:sp>
-      <p:sp>
-        <p:nvSpPr>
-          <p:cNvPr id="17449" name="TextBox 17448"/>
-          <p:cNvSpPr txBox="1"/>
-          <p:nvPr/>
-        </p:nvSpPr>
-        <p:spPr>
-          <a:xfrm>
-            <a:off x="3515868" y="5248655"/>
-            <a:ext cx="2391156" cy="237744"/>
-          </a:xfrm>
-          <a:prstGeom prst="rect">
-            <a:avLst/>
-          </a:prstGeom>
-          <a:noFill/>
-        </p:spPr>
-        <p:txBody>
-          <a:bodyPr wrap="square" lIns="0" rIns="0" tIns="0" bIns="0">
-            <a:spAutoFit/>
-          </a:bodyPr>
-          <a:lstStyle/>
-          <a:p>
-            <a:pPr>
-              <a:lnSpc>
-                <a:spcPct val="122000"/>
-              </a:lnSpc>
-            </a:pPr>
-            <a:r>
-              <a:rPr sz="1000" b="0">
-                <a:solidFill>
-                  <a:srgbClr val="5A6472"/>
-                </a:solidFill>
-                <a:latin typeface="Calibri"/>
-              </a:rPr>
-              <a:t>D-02 First-digit</a:t>
-            </a:r>
-          </a:p>
-        </p:txBody>
-      </p:sp>
-      <p:sp>
-        <p:nvSpPr>
-          <p:cNvPr id="17450" name="Rounded Rectangle 17449"/>
-          <p:cNvSpPr/>
-          <p:nvPr/>
-        </p:nvSpPr>
-        <p:spPr>
-          <a:xfrm>
-            <a:off x="6163056" y="4855464"/>
-            <a:ext cx="2647188" cy="676656"/>
-          </a:xfrm>
-          <a:prstGeom prst="roundRect">
-            <a:avLst>
-              <a:gd name="adj" fmla="val 6000"/>
-            </a:avLst>
-          </a:prstGeom>
-          <a:solidFill>
-            <a:srgbClr val="EAF2FB"/>
-          </a:solidFill>
-          <a:ln w="9525">
-            <a:solidFill>
-              <a:srgbClr val="BFDCF2"/>
-            </a:solidFill>
-          </a:ln>
-          <a:effectLst/>
-        </p:spPr>
-        <p:style>
-          <a:lnRef idx="1">
-            <a:schemeClr val="accent1"/>
-          </a:lnRef>
-          <a:fillRef idx="3">
-            <a:schemeClr val="accent1"/>
-          </a:fillRef>
-          <a:effectRef idx="2">
-            <a:schemeClr val="accent1"/>
-          </a:effectRef>
-          <a:fontRef idx="minor">
-            <a:schemeClr val="lt1"/>
-          </a:fontRef>
-        </p:style>
-        <p:txBody>
-          <a:bodyPr rtlCol="0" anchor="ctr"/>
-          <a:lstStyle/>
-          <a:p>
-            <a:pPr algn="ctr"/>
-          </a:p>
-        </p:txBody>
-      </p:sp>
-      <p:sp>
-        <p:nvSpPr>
-          <p:cNvPr id="17451" name="TextBox 17450"/>
-          <p:cNvSpPr txBox="1"/>
-          <p:nvPr/>
-        </p:nvSpPr>
-        <p:spPr>
-          <a:xfrm>
-            <a:off x="6291072" y="4937759"/>
-            <a:ext cx="2391156" cy="274320"/>
-          </a:xfrm>
-          <a:prstGeom prst="rect">
-            <a:avLst/>
-          </a:prstGeom>
-          <a:noFill/>
-        </p:spPr>
-        <p:txBody>
-          <a:bodyPr wrap="square" lIns="0" rIns="0" tIns="0" bIns="0">
-            <a:spAutoFit/>
-          </a:bodyPr>
-          <a:lstStyle/>
-          <a:p>
-            <a:pPr>
-              <a:lnSpc>
-                <a:spcPct val="122000"/>
-              </a:lnSpc>
-            </a:pPr>
-            <a:r>
-              <a:rPr sz="1500" b="1">
-                <a:solidFill>
-                  <a:srgbClr val="16704A"/>
-                </a:solidFill>
-                <a:latin typeface="Consolas"/>
-              </a:rPr>
-              <a:t>255 findings</a:t>
-            </a:r>
-          </a:p>
-        </p:txBody>
-      </p:sp>
-      <p:sp>
-        <p:nvSpPr>
-          <p:cNvPr id="17452" name="TextBox 17451"/>
-          <p:cNvSpPr txBox="1"/>
-          <p:nvPr/>
-        </p:nvSpPr>
-        <p:spPr>
-          <a:xfrm>
-            <a:off x="6291072" y="5248655"/>
-            <a:ext cx="2391156" cy="237744"/>
-          </a:xfrm>
-          <a:prstGeom prst="rect">
-            <a:avLst/>
-          </a:prstGeom>
-          <a:noFill/>
-        </p:spPr>
-        <p:txBody>
-          <a:bodyPr wrap="square" lIns="0" rIns="0" tIns="0" bIns="0">
-            <a:spAutoFit/>
-          </a:bodyPr>
-          <a:lstStyle/>
-          <a:p>
-            <a:pPr>
-              <a:lnSpc>
-                <a:spcPct val="122000"/>
-              </a:lnSpc>
-            </a:pPr>
-            <a:r>
-              <a:rPr sz="1000" b="0">
-                <a:solidFill>
-                  <a:srgbClr val="5A6472"/>
-                </a:solidFill>
-                <a:latin typeface="Calibri"/>
-              </a:rPr>
-              <a:t>D-03 Idle allocation</a:t>
-            </a:r>
-          </a:p>
-        </p:txBody>
-      </p:sp>
-      <p:sp>
-        <p:nvSpPr>
-          <p:cNvPr id="17453" name="Rounded Rectangle 17452"/>
-          <p:cNvSpPr/>
-          <p:nvPr/>
-        </p:nvSpPr>
-        <p:spPr>
-          <a:xfrm>
-            <a:off x="8938260" y="4855464"/>
-            <a:ext cx="2647188" cy="676656"/>
-          </a:xfrm>
-          <a:prstGeom prst="roundRect">
-            <a:avLst>
-              <a:gd name="adj" fmla="val 6000"/>
-            </a:avLst>
-          </a:prstGeom>
-          <a:solidFill>
-            <a:srgbClr val="EAF2FB"/>
-          </a:solidFill>
-          <a:ln w="9525">
-            <a:solidFill>
-              <a:srgbClr val="BFDCF2"/>
-            </a:solidFill>
-          </a:ln>
-          <a:effectLst/>
-        </p:spPr>
-        <p:style>
-          <a:lnRef idx="1">
-            <a:schemeClr val="accent1"/>
-          </a:lnRef>
-          <a:fillRef idx="3">
-            <a:schemeClr val="accent1"/>
-          </a:fillRef>
-          <a:effectRef idx="2">
-            <a:schemeClr val="accent1"/>
-          </a:effectRef>
-          <a:fontRef idx="minor">
-            <a:schemeClr val="lt1"/>
-          </a:fontRef>
-        </p:style>
-        <p:txBody>
-          <a:bodyPr rtlCol="0" anchor="ctr"/>
-          <a:lstStyle/>
-          <a:p>
-            <a:pPr algn="ctr"/>
-          </a:p>
-        </p:txBody>
-      </p:sp>
-      <p:sp>
-        <p:nvSpPr>
-          <p:cNvPr id="17454" name="TextBox 17453"/>
-          <p:cNvSpPr txBox="1"/>
-          <p:nvPr/>
-        </p:nvSpPr>
-        <p:spPr>
-          <a:xfrm>
-            <a:off x="9066276" y="4937759"/>
-            <a:ext cx="2391156" cy="274320"/>
-          </a:xfrm>
-          <a:prstGeom prst="rect">
-            <a:avLst/>
-          </a:prstGeom>
-          <a:noFill/>
-        </p:spPr>
-        <p:txBody>
-          <a:bodyPr wrap="square" lIns="0" rIns="0" tIns="0" bIns="0">
-            <a:spAutoFit/>
-          </a:bodyPr>
-          <a:lstStyle/>
-          <a:p>
-            <a:pPr>
-              <a:lnSpc>
-                <a:spcPct val="122000"/>
-              </a:lnSpc>
-            </a:pPr>
-            <a:r>
-              <a:rPr sz="1500" b="1">
-                <a:solidFill>
-                  <a:srgbClr val="16704A"/>
-                </a:solidFill>
-                <a:latin typeface="Consolas"/>
-              </a:rPr>
-              <a:t>209 findings</a:t>
-            </a:r>
-          </a:p>
-        </p:txBody>
-      </p:sp>
-      <p:sp>
-        <p:nvSpPr>
-          <p:cNvPr id="17455" name="TextBox 17454"/>
-          <p:cNvSpPr txBox="1"/>
-          <p:nvPr/>
-        </p:nvSpPr>
-        <p:spPr>
-          <a:xfrm>
-            <a:off x="9066276" y="5248655"/>
-            <a:ext cx="2391156" cy="237744"/>
-          </a:xfrm>
-          <a:prstGeom prst="rect">
-            <a:avLst/>
-          </a:prstGeom>
-          <a:noFill/>
-        </p:spPr>
-        <p:txBody>
-          <a:bodyPr wrap="square" lIns="0" rIns="0" tIns="0" bIns="0">
-            <a:spAutoFit/>
-          </a:bodyPr>
-          <a:lstStyle/>
-          <a:p>
-            <a:pPr>
-              <a:lnSpc>
-                <a:spcPct val="122000"/>
-              </a:lnSpc>
-            </a:pPr>
-            <a:r>
-              <a:rPr sz="1000" b="0">
-                <a:solidFill>
-                  <a:srgbClr val="5A6472"/>
-                </a:solidFill>
-                <a:latin typeface="Calibri"/>
-              </a:rPr>
-              <a:t>D-04 Uniform amount</a:t>
-            </a:r>
-          </a:p>
-        </p:txBody>
-      </p:sp>
-      <p:sp>
-        <p:nvSpPr>
-          <p:cNvPr id="17456" name="Rounded Rectangle 17455"/>
-          <p:cNvSpPr/>
-          <p:nvPr/>
-        </p:nvSpPr>
-        <p:spPr>
-          <a:xfrm>
-            <a:off x="612648" y="5696712"/>
-            <a:ext cx="10972800" cy="566928"/>
-          </a:xfrm>
-          <a:prstGeom prst="roundRect">
-            <a:avLst>
-              <a:gd name="adj" fmla="val 6000"/>
-            </a:avLst>
-          </a:prstGeom>
-          <a:solidFill>
-            <a:srgbClr val="F5F7FA"/>
-          </a:solidFill>
-          <a:ln w="9525">
-            <a:solidFill>
-              <a:srgbClr val="D6DCE5"/>
-            </a:solidFill>
-          </a:ln>
-          <a:effectLst/>
-        </p:spPr>
-        <p:style>
-          <a:lnRef idx="1">
-            <a:schemeClr val="accent1"/>
-          </a:lnRef>
-          <a:fillRef idx="3">
-            <a:schemeClr val="accent1"/>
-          </a:fillRef>
-          <a:effectRef idx="2">
-            <a:schemeClr val="accent1"/>
-          </a:effectRef>
-          <a:fontRef idx="minor">
-            <a:schemeClr val="lt1"/>
-          </a:fontRef>
-        </p:style>
-        <p:txBody>
-          <a:bodyPr rtlCol="0" anchor="ctr"/>
-          <a:lstStyle/>
-          <a:p>
-            <a:pPr algn="ctr"/>
-          </a:p>
-        </p:txBody>
-      </p:sp>
-      <p:sp>
-        <p:nvSpPr>
-          <p:cNvPr id="17457" name="TextBox 17456"/>
-          <p:cNvSpPr txBox="1"/>
-          <p:nvPr/>
-        </p:nvSpPr>
-        <p:spPr>
-          <a:xfrm>
-            <a:off x="758952" y="5806440"/>
-            <a:ext cx="10680192" cy="365760"/>
-          </a:xfrm>
-          <a:prstGeom prst="rect">
-            <a:avLst/>
-          </a:prstGeom>
-          <a:noFill/>
-        </p:spPr>
-        <p:txBody>
-          <a:bodyPr wrap="square" lIns="0" rIns="0" tIns="0" bIns="0">
-            <a:spAutoFit/>
-          </a:bodyPr>
-          <a:lstStyle/>
-          <a:p>
-            <a:pPr>
-              <a:lnSpc>
-                <a:spcPct val="128000"/>
-              </a:lnSpc>
-            </a:pPr>
-            <a:r>
-              <a:rPr sz="1000" b="0">
-                <a:solidFill>
-                  <a:srgbClr val="5A6472"/>
-                </a:solidFill>
-                <a:latin typeface="Calibri"/>
-              </a:rPr>
-              <a:t>Four compliance rules, each published with the exact condition it tests — including the one that cannot fire, because the source publishes a single figure per completed work that serves as both sanction and expenditure.</a:t>
+              <a:t>Every flag carries the method that produced it — a scored work, live</a:t>
             </a:r>
           </a:p>
         </p:txBody>
@@ -9804,7 +7104,7 @@
           <a:bodyPr/>
           <a:lstStyle/>
           <a:p>
-            <a:pPr eaLnBrk="1" hangingPunct="1"/>
+            <a:pPr eaLnBrk="1" hangingPunct="1" algn="ctr"/>
             <a:r>
               <a:rPr lang="en-US" sz="3600" b="1" dirty="0">
                 <a:latin typeface="Times New Roman" panose="02020603050405020304" pitchFamily="18" charset="0"/>
@@ -9826,8 +7126,8 @@
         </p:nvSpPr>
         <p:spPr bwMode="auto">
           <a:xfrm>
-            <a:off x="612648" y="1188720"/>
-            <a:ext cx="10972800" cy="475488"/>
+            <a:off x="612648" y="1078992"/>
+            <a:ext cx="10972800" cy="676656"/>
           </a:xfrm>
           <a:prstGeom prst="rect">
             <a:avLst/>
@@ -9854,7 +7154,7 @@
                 <a:spcPct val="0"/>
               </a:spcBef>
               <a:spcAft>
-                <a:spcPct val="0"/>
+                <a:spcPts val="0"/>
               </a:spcAft>
               <a:buClrTx/>
               <a:buSzTx/>
@@ -9897,7 +7197,7 @@
                 <a:spcPct val="0"/>
               </a:spcBef>
               <a:spcAft>
-                <a:spcPct val="0"/>
+                <a:spcPts val="0"/>
               </a:spcAft>
               <a:buClrTx/>
               <a:buSzTx/>
@@ -9926,7 +7226,7 @@
                 <a:spcPct val="0"/>
               </a:spcBef>
               <a:spcAft>
-                <a:spcPct val="0"/>
+                <a:spcPts val="0"/>
               </a:spcAft>
               <a:buClrTx/>
               <a:buSzTx/>
@@ -10221,28 +7521,146 @@
           </a:prstGeom>
         </p:spPr>
       </p:pic>
-      <p:sp>
-        <p:nvSpPr>
-          <p:cNvPr id="17411" name="Rounded Rectangle 17410"/>
-          <p:cNvSpPr/>
+      <p:pic>
+        <p:nvPicPr>
+          <p:cNvPr id="17411" name="Picture 17410" descr="feas.png"/>
+          <p:cNvPicPr>
+            <a:picLocks noChangeAspect="1"/>
+          </p:cNvPicPr>
           <p:nvPr/>
-        </p:nvSpPr>
+        </p:nvPicPr>
+        <p:blipFill>
+          <a:blip r:embed="rId4"/>
+          <a:stretch>
+            <a:fillRect/>
+          </a:stretch>
+        </p:blipFill>
         <p:spPr>
           <a:xfrm>
             <a:off x="612648" y="1783080"/>
-            <a:ext cx="10972800" cy="640080"/>
+            <a:ext cx="10972800" cy="2921508"/>
+          </a:xfrm>
+          <a:prstGeom prst="rect">
+            <a:avLst/>
+          </a:prstGeom>
+        </p:spPr>
+      </p:pic>
+      <p:pic>
+        <p:nvPicPr>
+          <p:cNvPr id="17412" name="Picture 17411" descr="provenance.png">
+            <a:hlinkClick r:id="rId6"/>
+          </p:cNvPr>
+          <p:cNvPicPr>
+            <a:picLocks noChangeAspect="1"/>
+          </p:cNvPicPr>
+          <p:nvPr/>
+        </p:nvPicPr>
+        <p:blipFill>
+          <a:blip r:embed="rId5"/>
+          <a:stretch>
+            <a:fillRect/>
+          </a:stretch>
+        </p:blipFill>
+        <p:spPr>
+          <a:xfrm>
+            <a:off x="612648" y="4832603"/>
+            <a:ext cx="3017520" cy="1382401"/>
+          </a:xfrm>
+          <a:prstGeom prst="rect">
+            <a:avLst/>
+          </a:prstGeom>
+        </p:spPr>
+      </p:pic>
+      <p:sp>
+        <p:nvSpPr>
+          <p:cNvPr id="17413" name="TextBox 17412"/>
+          <p:cNvSpPr txBox="1"/>
+          <p:nvPr/>
+        </p:nvSpPr>
+        <p:spPr>
+          <a:xfrm>
+            <a:off x="3840480" y="4850891"/>
+            <a:ext cx="7744968" cy="237744"/>
+          </a:xfrm>
+          <a:prstGeom prst="rect">
+            <a:avLst/>
+          </a:prstGeom>
+          <a:noFill/>
+        </p:spPr>
+        <p:txBody>
+          <a:bodyPr wrap="square" lIns="0" rIns="0" tIns="0" bIns="0">
+            <a:spAutoFit/>
+          </a:bodyPr>
+          <a:lstStyle/>
+          <a:p>
+            <a:r>
+              <a:rPr sz="1200">
+                <a:solidFill>
+                  <a:srgbClr val="5A6472"/>
+                </a:solidFill>
+                <a:latin typeface="Calibri"/>
+              </a:rPr>
+              <a:t>Provenance is checked, not asserted.</a:t>
+            </a:r>
+          </a:p>
+        </p:txBody>
+      </p:sp>
+      <p:sp>
+        <p:nvSpPr>
+          <p:cNvPr id="17414" name="TextBox 17413"/>
+          <p:cNvSpPr txBox="1"/>
+          <p:nvPr/>
+        </p:nvSpPr>
+        <p:spPr>
+          <a:xfrm>
+            <a:off x="3840480" y="5106923"/>
+            <a:ext cx="7744968" cy="566928"/>
+          </a:xfrm>
+          <a:prstGeom prst="rect">
+            <a:avLst/>
+          </a:prstGeom>
+          <a:noFill/>
+        </p:spPr>
+        <p:txBody>
+          <a:bodyPr wrap="square" lIns="0" rIns="0" tIns="0" bIns="0">
+            <a:spAutoFit/>
+          </a:bodyPr>
+          <a:lstStyle/>
+          <a:p>
+            <a:r>
+              <a:rPr sz="1000">
+                <a:solidFill>
+                  <a:srgbClr val="5A6472"/>
+                </a:solidFill>
+                <a:latin typeface="Calibri"/>
+              </a:rPr>
+              <a:t>Both hops are published separately — ours to the source, and the source to MoSPI — so a gap is never read as our error when it is upstream lag. Worst gap on the last run: 3.77%. 36 of 36 states match the source exactly.</a:t>
+            </a:r>
+          </a:p>
+        </p:txBody>
+      </p:sp>
+      <p:sp>
+        <p:nvSpPr>
+          <p:cNvPr id="17415" name="Rounded Rectangle 17414">
+            <a:hlinkClick r:id="rId7"/>
+          </p:cNvPr>
+          <p:cNvSpPr/>
+          <p:nvPr/>
+        </p:nvSpPr>
+        <p:spPr>
+          <a:xfrm>
+            <a:off x="3840480" y="5673851"/>
+            <a:ext cx="2496312" cy="457200"/>
           </a:xfrm>
           <a:prstGeom prst="roundRect">
-            <a:avLst>
-              <a:gd name="adj" fmla="val 6000"/>
-            </a:avLst>
+            <a:avLst/>
           </a:prstGeom>
           <a:solidFill>
-            <a:srgbClr val="EAF2FB"/>
+            <a:srgbClr val="FFFFFF"/>
           </a:solidFill>
-          <a:ln w="9525">
+          <a:ln w="15875">
             <a:solidFill>
-              <a:srgbClr val="BFDCF2"/>
+              <a:srgbClr val="7A1A12"/>
             </a:solidFill>
           </a:ln>
           <a:effectLst/>
@@ -10262,74 +7680,56 @@
           </a:fontRef>
         </p:style>
         <p:txBody>
-          <a:bodyPr rtlCol="0" anchor="ctr"/>
+          <a:bodyPr rtlCol="0" anchor="ctr" wrap="square" lIns="54864" rIns="54864" tIns="0" bIns="0"/>
           <a:lstStyle/>
           <a:p>
             <a:pPr algn="ctr"/>
-          </a:p>
-        </p:txBody>
-      </p:sp>
-      <p:sp>
-        <p:nvSpPr>
-          <p:cNvPr id="17412" name="TextBox 17411"/>
-          <p:cNvSpPr txBox="1"/>
-          <p:nvPr/>
-        </p:nvSpPr>
-        <p:spPr>
-          <a:xfrm>
-            <a:off x="777240" y="1938528"/>
-            <a:ext cx="10643616" cy="347472"/>
-          </a:xfrm>
-          <a:prstGeom prst="rect">
-            <a:avLst/>
-          </a:prstGeom>
-          <a:noFill/>
-        </p:spPr>
-        <p:txBody>
-          <a:bodyPr wrap="square" lIns="0" rIns="0" tIns="0" bIns="0">
-            <a:spAutoFit/>
-          </a:bodyPr>
-          <a:lstStyle/>
-          <a:p>
-            <a:pPr>
-              <a:lnSpc>
-                <a:spcPct val="122000"/>
-              </a:lnSpc>
-            </a:pPr>
-            <a:r>
-              <a:rPr sz="1250" b="1">
+            <a:r>
+              <a:rPr sz="1000" b="1">
                 <a:solidFill>
-                  <a:srgbClr val="00548F"/>
+                  <a:srgbClr val="7A1A12"/>
                 </a:solidFill>
                 <a:latin typeface="Calibri"/>
               </a:rPr>
-              <a:t>Not a proposal - already built, deployed and refreshing nightly: 250,839 works scored, all 36 states reconciled against the official MoSPI dashboard to within 3.8%, live at mplads-risk-monitor-web.vercel.app</a:t>
-            </a:r>
-          </a:p>
-        </p:txBody>
-      </p:sp>
-      <p:sp>
-        <p:nvSpPr>
-          <p:cNvPr id="17413" name="Rounded Rectangle 17412"/>
+              <a:t>DEMO VIDEO</a:t>
+            </a:r>
+          </a:p>
+          <a:p>
+            <a:pPr algn="ctr"/>
+            <a:r>
+              <a:rPr sz="700">
+                <a:solidFill>
+                  <a:srgbClr val="5A6472"/>
+                </a:solidFill>
+                <a:latin typeface="Calibri"/>
+              </a:rPr>
+              <a:t>2 minute walkthrough</a:t>
+            </a:r>
+          </a:p>
+        </p:txBody>
+      </p:sp>
+      <p:sp>
+        <p:nvSpPr>
+          <p:cNvPr id="17416" name="Rounded Rectangle 17415">
+            <a:hlinkClick r:id="rId6"/>
+          </p:cNvPr>
           <p:cNvSpPr/>
           <p:nvPr/>
         </p:nvSpPr>
         <p:spPr>
           <a:xfrm>
-            <a:off x="612648" y="2642615"/>
-            <a:ext cx="3547872" cy="3566160"/>
+            <a:off x="6464808" y="5673851"/>
+            <a:ext cx="2496312" cy="457200"/>
           </a:xfrm>
           <a:prstGeom prst="roundRect">
-            <a:avLst>
-              <a:gd name="adj" fmla="val 6000"/>
-            </a:avLst>
+            <a:avLst/>
           </a:prstGeom>
           <a:solidFill>
-            <a:srgbClr val="F5F7FA"/>
+            <a:srgbClr val="FFFFFF"/>
           </a:solidFill>
-          <a:ln w="9525">
+          <a:ln w="15875">
             <a:solidFill>
-              <a:srgbClr val="D6DCE5"/>
+              <a:srgbClr val="7A1A12"/>
             </a:solidFill>
           </a:ln>
           <a:effectLst/>
@@ -10349,34 +7749,57 @@
           </a:fontRef>
         </p:style>
         <p:txBody>
-          <a:bodyPr rtlCol="0" anchor="ctr"/>
+          <a:bodyPr rtlCol="0" anchor="ctr" wrap="square" lIns="54864" rIns="54864" tIns="0" bIns="0"/>
           <a:lstStyle/>
           <a:p>
             <a:pPr algn="ctr"/>
-          </a:p>
-        </p:txBody>
-      </p:sp>
-      <p:sp>
-        <p:nvSpPr>
-          <p:cNvPr id="17414" name="Rounded Rectangle 17413"/>
+            <a:r>
+              <a:rPr sz="1000" b="1">
+                <a:solidFill>
+                  <a:srgbClr val="7A1A12"/>
+                </a:solidFill>
+                <a:latin typeface="Calibri"/>
+              </a:rPr>
+              <a:t>PROTOTYPE</a:t>
+            </a:r>
+          </a:p>
+          <a:p>
+            <a:pPr algn="ctr"/>
+            <a:r>
+              <a:rPr sz="700">
+                <a:solidFill>
+                  <a:srgbClr val="5A6472"/>
+                </a:solidFill>
+                <a:latin typeface="Calibri"/>
+              </a:rPr>
+              <a:t>the running system</a:t>
+            </a:r>
+          </a:p>
+        </p:txBody>
+      </p:sp>
+      <p:sp>
+        <p:nvSpPr>
+          <p:cNvPr id="17417" name="Rounded Rectangle 17416">
+            <a:hlinkClick r:id="rId8"/>
+          </p:cNvPr>
           <p:cNvSpPr/>
           <p:nvPr/>
         </p:nvSpPr>
         <p:spPr>
           <a:xfrm>
-            <a:off x="612648" y="2642615"/>
-            <a:ext cx="41148" cy="3566160"/>
+            <a:off x="9089136" y="5673851"/>
+            <a:ext cx="2496312" cy="457200"/>
           </a:xfrm>
           <a:prstGeom prst="roundRect">
-            <a:avLst>
-              <a:gd name="adj" fmla="val 6000"/>
-            </a:avLst>
+            <a:avLst/>
           </a:prstGeom>
           <a:solidFill>
-            <a:srgbClr val="16704A"/>
+            <a:srgbClr val="FFFFFF"/>
           </a:solidFill>
-          <a:ln>
-            <a:noFill/>
+          <a:ln w="15875">
+            <a:solidFill>
+              <a:srgbClr val="7A1A12"/>
+            </a:solidFill>
           </a:ln>
           <a:effectLst/>
         </p:spPr>
@@ -10395,431 +7818,30 @@
           </a:fontRef>
         </p:style>
         <p:txBody>
-          <a:bodyPr rtlCol="0" anchor="ctr"/>
+          <a:bodyPr rtlCol="0" anchor="ctr" wrap="square" lIns="54864" rIns="54864" tIns="0" bIns="0"/>
           <a:lstStyle/>
           <a:p>
             <a:pPr algn="ctr"/>
-          </a:p>
-        </p:txBody>
-      </p:sp>
-      <p:sp>
-        <p:nvSpPr>
-          <p:cNvPr id="17415" name="TextBox 17414"/>
-          <p:cNvSpPr txBox="1"/>
-          <p:nvPr/>
-        </p:nvSpPr>
-        <p:spPr>
-          <a:xfrm>
-            <a:off x="813816" y="2788920"/>
-            <a:ext cx="3182112" cy="206247"/>
-          </a:xfrm>
-          <a:prstGeom prst="rect">
-            <a:avLst/>
-          </a:prstGeom>
-          <a:noFill/>
-        </p:spPr>
-        <p:txBody>
-          <a:bodyPr wrap="square" lIns="0" rIns="0" tIns="0" bIns="0">
-            <a:spAutoFit/>
-          </a:bodyPr>
-          <a:lstStyle/>
-          <a:p>
-            <a:pPr>
-              <a:lnSpc>
-                <a:spcPct val="116000"/>
-              </a:lnSpc>
-            </a:pPr>
-            <a:r>
-              <a:rPr sz="1400" b="1">
+            <a:r>
+              <a:rPr sz="1000" b="1">
                 <a:solidFill>
-                  <a:srgbClr val="101828"/>
+                  <a:srgbClr val="7A1A12"/>
                 </a:solidFill>
                 <a:latin typeface="Calibri"/>
               </a:rPr>
-              <a:t>Feasibility</a:t>
-            </a:r>
-          </a:p>
-        </p:txBody>
-      </p:sp>
-      <p:sp>
-        <p:nvSpPr>
-          <p:cNvPr id="17416" name="TextBox 17415"/>
-          <p:cNvSpPr txBox="1"/>
-          <p:nvPr/>
-        </p:nvSpPr>
-        <p:spPr>
-          <a:xfrm>
-            <a:off x="813816" y="3077464"/>
-            <a:ext cx="3182112" cy="1487424"/>
-          </a:xfrm>
-          <a:prstGeom prst="rect">
-            <a:avLst/>
-          </a:prstGeom>
-          <a:noFill/>
-        </p:spPr>
-        <p:txBody>
-          <a:bodyPr wrap="square" lIns="0" rIns="0" tIns="0" bIns="0">
-            <a:spAutoFit/>
-          </a:bodyPr>
-          <a:lstStyle/>
-          <a:p>
-            <a:pPr>
-              <a:lnSpc>
-                <a:spcPct val="122000"/>
-              </a:lnSpc>
-            </a:pPr>
-            <a:r>
-              <a:rPr sz="1200" b="0">
+              <a:t>GITHUB</a:t>
+            </a:r>
+          </a:p>
+          <a:p>
+            <a:pPr algn="ctr"/>
+            <a:r>
+              <a:rPr sz="700">
                 <a:solidFill>
                   <a:srgbClr val="5A6472"/>
                 </a:solidFill>
                 <a:latin typeface="Calibri"/>
               </a:rPr>
-              <a:t>The data is already public and machine-readable: four CSVs, refreshed nightly by a scheduled job that loads in 2 minutes and scores in about 20. No ministry integration, no new reporting burden on any officer, no hardware. 136 automated tests run against the pipeline and the API.</a:t>
-            </a:r>
-          </a:p>
-        </p:txBody>
-      </p:sp>
-      <p:sp>
-        <p:nvSpPr>
-          <p:cNvPr id="17417" name="Rounded Rectangle 17416"/>
-          <p:cNvSpPr/>
-          <p:nvPr/>
-        </p:nvSpPr>
-        <p:spPr>
-          <a:xfrm>
-            <a:off x="4325112" y="2642615"/>
-            <a:ext cx="3547872" cy="3566160"/>
-          </a:xfrm>
-          <a:prstGeom prst="roundRect">
-            <a:avLst>
-              <a:gd name="adj" fmla="val 6000"/>
-            </a:avLst>
-          </a:prstGeom>
-          <a:solidFill>
-            <a:srgbClr val="F5F7FA"/>
-          </a:solidFill>
-          <a:ln w="9525">
-            <a:solidFill>
-              <a:srgbClr val="D6DCE5"/>
-            </a:solidFill>
-          </a:ln>
-          <a:effectLst/>
-        </p:spPr>
-        <p:style>
-          <a:lnRef idx="1">
-            <a:schemeClr val="accent1"/>
-          </a:lnRef>
-          <a:fillRef idx="3">
-            <a:schemeClr val="accent1"/>
-          </a:fillRef>
-          <a:effectRef idx="2">
-            <a:schemeClr val="accent1"/>
-          </a:effectRef>
-          <a:fontRef idx="minor">
-            <a:schemeClr val="lt1"/>
-          </a:fontRef>
-        </p:style>
-        <p:txBody>
-          <a:bodyPr rtlCol="0" anchor="ctr"/>
-          <a:lstStyle/>
-          <a:p>
-            <a:pPr algn="ctr"/>
-          </a:p>
-        </p:txBody>
-      </p:sp>
-      <p:sp>
-        <p:nvSpPr>
-          <p:cNvPr id="17418" name="Rounded Rectangle 17417"/>
-          <p:cNvSpPr/>
-          <p:nvPr/>
-        </p:nvSpPr>
-        <p:spPr>
-          <a:xfrm>
-            <a:off x="4325112" y="2642615"/>
-            <a:ext cx="41148" cy="3566160"/>
-          </a:xfrm>
-          <a:prstGeom prst="roundRect">
-            <a:avLst>
-              <a:gd name="adj" fmla="val 6000"/>
-            </a:avLst>
-          </a:prstGeom>
-          <a:solidFill>
-            <a:srgbClr val="96600A"/>
-          </a:solidFill>
-          <a:ln>
-            <a:noFill/>
-          </a:ln>
-          <a:effectLst/>
-        </p:spPr>
-        <p:style>
-          <a:lnRef idx="1">
-            <a:schemeClr val="accent1"/>
-          </a:lnRef>
-          <a:fillRef idx="3">
-            <a:schemeClr val="accent1"/>
-          </a:fillRef>
-          <a:effectRef idx="2">
-            <a:schemeClr val="accent1"/>
-          </a:effectRef>
-          <a:fontRef idx="minor">
-            <a:schemeClr val="lt1"/>
-          </a:fontRef>
-        </p:style>
-        <p:txBody>
-          <a:bodyPr rtlCol="0" anchor="ctr"/>
-          <a:lstStyle/>
-          <a:p>
-            <a:pPr algn="ctr"/>
-          </a:p>
-        </p:txBody>
-      </p:sp>
-      <p:sp>
-        <p:nvSpPr>
-          <p:cNvPr id="17419" name="TextBox 17418"/>
-          <p:cNvSpPr txBox="1"/>
-          <p:nvPr/>
-        </p:nvSpPr>
-        <p:spPr>
-          <a:xfrm>
-            <a:off x="4526280" y="2788920"/>
-            <a:ext cx="3182112" cy="206247"/>
-          </a:xfrm>
-          <a:prstGeom prst="rect">
-            <a:avLst/>
-          </a:prstGeom>
-          <a:noFill/>
-        </p:spPr>
-        <p:txBody>
-          <a:bodyPr wrap="square" lIns="0" rIns="0" tIns="0" bIns="0">
-            <a:spAutoFit/>
-          </a:bodyPr>
-          <a:lstStyle/>
-          <a:p>
-            <a:pPr>
-              <a:lnSpc>
-                <a:spcPct val="116000"/>
-              </a:lnSpc>
-            </a:pPr>
-            <a:r>
-              <a:rPr sz="1400" b="1">
-                <a:solidFill>
-                  <a:srgbClr val="101828"/>
-                </a:solidFill>
-                <a:latin typeface="Calibri"/>
-              </a:rPr>
-              <a:t>Challenges and risks</a:t>
-            </a:r>
-          </a:p>
-        </p:txBody>
-      </p:sp>
-      <p:sp>
-        <p:nvSpPr>
-          <p:cNvPr id="17420" name="TextBox 17419"/>
-          <p:cNvSpPr txBox="1"/>
-          <p:nvPr/>
-        </p:nvSpPr>
-        <p:spPr>
-          <a:xfrm>
-            <a:off x="4526280" y="3077464"/>
-            <a:ext cx="3182112" cy="1487424"/>
-          </a:xfrm>
-          <a:prstGeom prst="rect">
-            <a:avLst/>
-          </a:prstGeom>
-          <a:noFill/>
-        </p:spPr>
-        <p:txBody>
-          <a:bodyPr wrap="square" lIns="0" rIns="0" tIns="0" bIns="0">
-            <a:spAutoFit/>
-          </a:bodyPr>
-          <a:lstStyle/>
-          <a:p>
-            <a:pPr>
-              <a:lnSpc>
-                <a:spcPct val="122000"/>
-              </a:lnSpc>
-            </a:pPr>
-            <a:r>
-              <a:rPr sz="1200" b="0">
-                <a:solidFill>
-                  <a:srgbClr val="5A6472"/>
-                </a:solidFill>
-                <a:latin typeface="Calibri"/>
-              </a:rPr>
-              <a:t>Work IDs restart per agency, so 271 works had inherited a stranger's start date. Cost deviation had no ceiling and overflowed its column, losing the very outliers that matter. Dead pooled connections turned one expiry into a rolling outage. All three were found and fixed.</a:t>
-            </a:r>
-          </a:p>
-        </p:txBody>
-      </p:sp>
-      <p:sp>
-        <p:nvSpPr>
-          <p:cNvPr id="17421" name="Rounded Rectangle 17420"/>
-          <p:cNvSpPr/>
-          <p:nvPr/>
-        </p:nvSpPr>
-        <p:spPr>
-          <a:xfrm>
-            <a:off x="8037576" y="2642615"/>
-            <a:ext cx="3547872" cy="3566160"/>
-          </a:xfrm>
-          <a:prstGeom prst="roundRect">
-            <a:avLst>
-              <a:gd name="adj" fmla="val 6000"/>
-            </a:avLst>
-          </a:prstGeom>
-          <a:solidFill>
-            <a:srgbClr val="F5F7FA"/>
-          </a:solidFill>
-          <a:ln w="9525">
-            <a:solidFill>
-              <a:srgbClr val="D6DCE5"/>
-            </a:solidFill>
-          </a:ln>
-          <a:effectLst/>
-        </p:spPr>
-        <p:style>
-          <a:lnRef idx="1">
-            <a:schemeClr val="accent1"/>
-          </a:lnRef>
-          <a:fillRef idx="3">
-            <a:schemeClr val="accent1"/>
-          </a:fillRef>
-          <a:effectRef idx="2">
-            <a:schemeClr val="accent1"/>
-          </a:effectRef>
-          <a:fontRef idx="minor">
-            <a:schemeClr val="lt1"/>
-          </a:fontRef>
-        </p:style>
-        <p:txBody>
-          <a:bodyPr rtlCol="0" anchor="ctr"/>
-          <a:lstStyle/>
-          <a:p>
-            <a:pPr algn="ctr"/>
-          </a:p>
-        </p:txBody>
-      </p:sp>
-      <p:sp>
-        <p:nvSpPr>
-          <p:cNvPr id="17422" name="Rounded Rectangle 17421"/>
-          <p:cNvSpPr/>
-          <p:nvPr/>
-        </p:nvSpPr>
-        <p:spPr>
-          <a:xfrm>
-            <a:off x="8037576" y="2642615"/>
-            <a:ext cx="41148" cy="3566160"/>
-          </a:xfrm>
-          <a:prstGeom prst="roundRect">
-            <a:avLst>
-              <a:gd name="adj" fmla="val 6000"/>
-            </a:avLst>
-          </a:prstGeom>
-          <a:solidFill>
-            <a:srgbClr val="0070C0"/>
-          </a:solidFill>
-          <a:ln>
-            <a:noFill/>
-          </a:ln>
-          <a:effectLst/>
-        </p:spPr>
-        <p:style>
-          <a:lnRef idx="1">
-            <a:schemeClr val="accent1"/>
-          </a:lnRef>
-          <a:fillRef idx="3">
-            <a:schemeClr val="accent1"/>
-          </a:fillRef>
-          <a:effectRef idx="2">
-            <a:schemeClr val="accent1"/>
-          </a:effectRef>
-          <a:fontRef idx="minor">
-            <a:schemeClr val="lt1"/>
-          </a:fontRef>
-        </p:style>
-        <p:txBody>
-          <a:bodyPr rtlCol="0" anchor="ctr"/>
-          <a:lstStyle/>
-          <a:p>
-            <a:pPr algn="ctr"/>
-          </a:p>
-        </p:txBody>
-      </p:sp>
-      <p:sp>
-        <p:nvSpPr>
-          <p:cNvPr id="17423" name="TextBox 17422"/>
-          <p:cNvSpPr txBox="1"/>
-          <p:nvPr/>
-        </p:nvSpPr>
-        <p:spPr>
-          <a:xfrm>
-            <a:off x="8238744" y="2788920"/>
-            <a:ext cx="3182112" cy="206247"/>
-          </a:xfrm>
-          <a:prstGeom prst="rect">
-            <a:avLst/>
-          </a:prstGeom>
-          <a:noFill/>
-        </p:spPr>
-        <p:txBody>
-          <a:bodyPr wrap="square" lIns="0" rIns="0" tIns="0" bIns="0">
-            <a:spAutoFit/>
-          </a:bodyPr>
-          <a:lstStyle/>
-          <a:p>
-            <a:pPr>
-              <a:lnSpc>
-                <a:spcPct val="116000"/>
-              </a:lnSpc>
-            </a:pPr>
-            <a:r>
-              <a:rPr sz="1400" b="1">
-                <a:solidFill>
-                  <a:srgbClr val="101828"/>
-                </a:solidFill>
-                <a:latin typeface="Calibri"/>
-              </a:rPr>
-              <a:t>How we overcome them</a:t>
-            </a:r>
-          </a:p>
-        </p:txBody>
-      </p:sp>
-      <p:sp>
-        <p:nvSpPr>
-          <p:cNvPr id="17424" name="TextBox 17423"/>
-          <p:cNvSpPr txBox="1"/>
-          <p:nvPr/>
-        </p:nvSpPr>
-        <p:spPr>
-          <a:xfrm>
-            <a:off x="8238744" y="3077464"/>
-            <a:ext cx="3182112" cy="1301496"/>
-          </a:xfrm>
-          <a:prstGeom prst="rect">
-            <a:avLst/>
-          </a:prstGeom>
-          <a:noFill/>
-        </p:spPr>
-        <p:txBody>
-          <a:bodyPr wrap="square" lIns="0" rIns="0" tIns="0" bIns="0">
-            <a:spAutoFit/>
-          </a:bodyPr>
-          <a:lstStyle/>
-          <a:p>
-            <a:pPr>
-              <a:lnSpc>
-                <a:spcPct val="122000"/>
-              </a:lnSpc>
-            </a:pPr>
-            <a:r>
-              <a:rPr sz="1200" b="0">
-                <a:solidFill>
-                  <a:srgbClr val="5A6472"/>
-                </a:solidFill>
-                <a:latin typeface="Calibri"/>
-              </a:rPr>
-              <a:t>A work's identity is (Work ID, term, agency), unique across both extracts. Every threshold is calibrated on the measured distribution, not a textbook constant. A killed refresh now records its own death instead of being reported as the next run's success.</a:t>
+              <a:t>loader · scorer · API · tests</a:t>
             </a:r>
           </a:p>
         </p:txBody>
@@ -10869,7 +7891,7 @@
           <a:bodyPr/>
           <a:lstStyle/>
           <a:p>
-            <a:pPr eaLnBrk="1" hangingPunct="1"/>
+            <a:pPr eaLnBrk="1" hangingPunct="1" algn="ctr"/>
             <a:r>
               <a:rPr lang="en-US" sz="3600" b="1" dirty="0">
                 <a:latin typeface="Times New Roman" panose="02020603050405020304" pitchFamily="18" charset="0"/>
@@ -10891,8 +7913,8 @@
         </p:nvSpPr>
         <p:spPr bwMode="auto">
           <a:xfrm>
-            <a:off x="612648" y="1188720"/>
-            <a:ext cx="10972800" cy="475488"/>
+            <a:off x="612648" y="1078992"/>
+            <a:ext cx="10972800" cy="676656"/>
           </a:xfrm>
           <a:prstGeom prst="rect">
             <a:avLst/>
@@ -10919,7 +7941,7 @@
                 <a:spcPct val="0"/>
               </a:spcBef>
               <a:spcAft>
-                <a:spcPct val="0"/>
+                <a:spcPts val="0"/>
               </a:spcAft>
               <a:buClrTx/>
               <a:buSzTx/>
@@ -10955,7 +7977,7 @@
                 <a:spcPct val="0"/>
               </a:spcBef>
               <a:spcAft>
-                <a:spcPct val="0"/>
+                <a:spcPts val="0"/>
               </a:spcAft>
               <a:buClrTx/>
               <a:buSzTx/>
@@ -11212,64 +8234,92 @@
           </a:prstGeom>
         </p:spPr>
       </p:pic>
-      <p:sp>
-        <p:nvSpPr>
-          <p:cNvPr id="17411" name="Rounded Rectangle 17410"/>
-          <p:cNvSpPr/>
+      <p:pic>
+        <p:nvPicPr>
+          <p:cNvPr id="17411" name="Picture 17410" descr="impact.png"/>
+          <p:cNvPicPr>
+            <a:picLocks noChangeAspect="1"/>
+          </p:cNvPicPr>
           <p:nvPr/>
-        </p:nvSpPr>
+        </p:nvPicPr>
+        <p:blipFill>
+          <a:blip r:embed="rId4"/>
+          <a:stretch>
+            <a:fillRect/>
+          </a:stretch>
+        </p:blipFill>
         <p:spPr>
           <a:xfrm>
-            <a:off x="612648" y="1783080"/>
-            <a:ext cx="2092147" cy="749808"/>
+            <a:off x="1069848" y="1783080"/>
+            <a:ext cx="10058400" cy="1986534"/>
           </a:xfrm>
-          <a:prstGeom prst="roundRect">
-            <a:avLst>
-              <a:gd name="adj" fmla="val 6000"/>
-            </a:avLst>
+          <a:prstGeom prst="rect">
+            <a:avLst/>
           </a:prstGeom>
-          <a:solidFill>
-            <a:srgbClr val="EAF2FB"/>
-          </a:solidFill>
-          <a:ln w="9525">
-            <a:solidFill>
-              <a:srgbClr val="BFDCF2"/>
-            </a:solidFill>
-          </a:ln>
-          <a:effectLst/>
-        </p:spPr>
-        <p:style>
-          <a:lnRef idx="1">
-            <a:schemeClr val="accent1"/>
-          </a:lnRef>
-          <a:fillRef idx="3">
-            <a:schemeClr val="accent1"/>
-          </a:fillRef>
-          <a:effectRef idx="2">
-            <a:schemeClr val="accent1"/>
-          </a:effectRef>
-          <a:fontRef idx="minor">
-            <a:schemeClr val="lt1"/>
-          </a:fontRef>
-        </p:style>
-        <p:txBody>
-          <a:bodyPr rtlCol="0" anchor="ctr"/>
-          <a:lstStyle/>
-          <a:p>
-            <a:pPr algn="ctr"/>
-          </a:p>
-        </p:txBody>
-      </p:sp>
-      <p:sp>
-        <p:nvSpPr>
-          <p:cNvPr id="17412" name="TextBox 17411"/>
+        </p:spPr>
+      </p:pic>
+      <p:pic>
+        <p:nvPicPr>
+          <p:cNvPr id="17412" name="Picture 17411" descr="alerts.png">
+            <a:hlinkClick r:id="rId6"/>
+          </p:cNvPr>
+          <p:cNvPicPr>
+            <a:picLocks noChangeAspect="1"/>
+          </p:cNvPicPr>
+          <p:nvPr/>
+        </p:nvPicPr>
+        <p:blipFill>
+          <a:blip r:embed="rId5"/>
+          <a:stretch>
+            <a:fillRect/>
+          </a:stretch>
+        </p:blipFill>
+        <p:spPr>
+          <a:xfrm>
+            <a:off x="1188720" y="3915918"/>
+            <a:ext cx="4572000" cy="2094547"/>
+          </a:xfrm>
+          <a:prstGeom prst="rect">
+            <a:avLst/>
+          </a:prstGeom>
+        </p:spPr>
+      </p:pic>
+      <p:pic>
+        <p:nvPicPr>
+          <p:cNvPr id="17413" name="Picture 17412" descr="map.png">
+            <a:hlinkClick r:id="rId6"/>
+          </p:cNvPr>
+          <p:cNvPicPr>
+            <a:picLocks noChangeAspect="1"/>
+          </p:cNvPicPr>
+          <p:nvPr/>
+        </p:nvPicPr>
+        <p:blipFill>
+          <a:blip r:embed="rId7"/>
+          <a:stretch>
+            <a:fillRect/>
+          </a:stretch>
+        </p:blipFill>
+        <p:spPr>
+          <a:xfrm>
+            <a:off x="6400800" y="3915918"/>
+            <a:ext cx="4572000" cy="2094547"/>
+          </a:xfrm>
+          <a:prstGeom prst="rect">
+            <a:avLst/>
+          </a:prstGeom>
+        </p:spPr>
+      </p:pic>
+      <p:sp>
+        <p:nvSpPr>
+          <p:cNvPr id="17414" name="TextBox 17413"/>
           <p:cNvSpPr txBox="1"/>
           <p:nvPr/>
         </p:nvSpPr>
         <p:spPr>
           <a:xfrm>
-            <a:off x="740664" y="1865376"/>
-            <a:ext cx="1836115" cy="274320"/>
+            <a:off x="1188720" y="6047041"/>
+            <a:ext cx="4572000" cy="237744"/>
           </a:xfrm>
           <a:prstGeom prst="rect">
             <a:avLst/>
@@ -11282,33 +8332,29 @@
           </a:bodyPr>
           <a:lstStyle/>
           <a:p>
-            <a:pPr>
-              <a:lnSpc>
-                <a:spcPct val="122000"/>
-              </a:lnSpc>
-            </a:pPr>
-            <a:r>
-              <a:rPr sz="1500" b="1">
+            <a:pPr algn="ctr"/>
+            <a:r>
+              <a:rPr sz="950">
                 <a:solidFill>
-                  <a:srgbClr val="00548F"/>
+                  <a:srgbClr val="5A6472"/>
                 </a:solidFill>
-                <a:latin typeface="Consolas"/>
+                <a:latin typeface="Calibri"/>
               </a:rPr>
-              <a:t>250,839</a:t>
-            </a:r>
-          </a:p>
-        </p:txBody>
-      </p:sp>
-      <p:sp>
-        <p:nvSpPr>
-          <p:cNvPr id="17413" name="TextBox 17412"/>
+              <a:t>The queue an official works through</a:t>
+            </a:r>
+          </a:p>
+        </p:txBody>
+      </p:sp>
+      <p:sp>
+        <p:nvSpPr>
+          <p:cNvPr id="17415" name="TextBox 17414"/>
           <p:cNvSpPr txBox="1"/>
           <p:nvPr/>
         </p:nvSpPr>
         <p:spPr>
           <a:xfrm>
-            <a:off x="740664" y="2176272"/>
-            <a:ext cx="1836115" cy="237744"/>
+            <a:off x="6400800" y="6047041"/>
+            <a:ext cx="4572000" cy="237744"/>
           </a:xfrm>
           <a:prstGeom prst="rect">
             <a:avLst/>
@@ -11321,1298 +8367,15 @@
           </a:bodyPr>
           <a:lstStyle/>
           <a:p>
-            <a:pPr>
-              <a:lnSpc>
-                <a:spcPct val="122000"/>
-              </a:lnSpc>
-            </a:pPr>
-            <a:r>
-              <a:rPr sz="1000" b="0">
+            <a:pPr algn="ctr"/>
+            <a:r>
+              <a:rPr sz="950">
                 <a:solidFill>
                   <a:srgbClr val="5A6472"/>
                 </a:solidFill>
                 <a:latin typeface="Calibri"/>
               </a:rPr>
-              <a:t>works scored, both terms</a:t>
-            </a:r>
-          </a:p>
-        </p:txBody>
-      </p:sp>
-      <p:sp>
-        <p:nvSpPr>
-          <p:cNvPr id="17414" name="Rounded Rectangle 17413"/>
-          <p:cNvSpPr/>
-          <p:nvPr/>
-        </p:nvSpPr>
-        <p:spPr>
-          <a:xfrm>
-            <a:off x="2832811" y="1783080"/>
-            <a:ext cx="2092147" cy="749808"/>
-          </a:xfrm>
-          <a:prstGeom prst="roundRect">
-            <a:avLst>
-              <a:gd name="adj" fmla="val 6000"/>
-            </a:avLst>
-          </a:prstGeom>
-          <a:solidFill>
-            <a:srgbClr val="EAF2FB"/>
-          </a:solidFill>
-          <a:ln w="9525">
-            <a:solidFill>
-              <a:srgbClr val="BFDCF2"/>
-            </a:solidFill>
-          </a:ln>
-          <a:effectLst/>
-        </p:spPr>
-        <p:style>
-          <a:lnRef idx="1">
-            <a:schemeClr val="accent1"/>
-          </a:lnRef>
-          <a:fillRef idx="3">
-            <a:schemeClr val="accent1"/>
-          </a:fillRef>
-          <a:effectRef idx="2">
-            <a:schemeClr val="accent1"/>
-          </a:effectRef>
-          <a:fontRef idx="minor">
-            <a:schemeClr val="lt1"/>
-          </a:fontRef>
-        </p:style>
-        <p:txBody>
-          <a:bodyPr rtlCol="0" anchor="ctr"/>
-          <a:lstStyle/>
-          <a:p>
-            <a:pPr algn="ctr"/>
-          </a:p>
-        </p:txBody>
-      </p:sp>
-      <p:sp>
-        <p:nvSpPr>
-          <p:cNvPr id="17415" name="TextBox 17414"/>
-          <p:cNvSpPr txBox="1"/>
-          <p:nvPr/>
-        </p:nvSpPr>
-        <p:spPr>
-          <a:xfrm>
-            <a:off x="2960827" y="1865376"/>
-            <a:ext cx="1836115" cy="274320"/>
-          </a:xfrm>
-          <a:prstGeom prst="rect">
-            <a:avLst/>
-          </a:prstGeom>
-          <a:noFill/>
-        </p:spPr>
-        <p:txBody>
-          <a:bodyPr wrap="square" lIns="0" rIns="0" tIns="0" bIns="0">
-            <a:spAutoFit/>
-          </a:bodyPr>
-          <a:lstStyle/>
-          <a:p>
-            <a:pPr>
-              <a:lnSpc>
-                <a:spcPct val="122000"/>
-              </a:lnSpc>
-            </a:pPr>
-            <a:r>
-              <a:rPr sz="1500" b="1">
-                <a:solidFill>
-                  <a:srgbClr val="00548F"/>
-                </a:solidFill>
-                <a:latin typeface="Consolas"/>
-              </a:rPr>
-              <a:t>Rs 11,682 Cr</a:t>
-            </a:r>
-          </a:p>
-        </p:txBody>
-      </p:sp>
-      <p:sp>
-        <p:nvSpPr>
-          <p:cNvPr id="17416" name="TextBox 17415"/>
-          <p:cNvSpPr txBox="1"/>
-          <p:nvPr/>
-        </p:nvSpPr>
-        <p:spPr>
-          <a:xfrm>
-            <a:off x="2960827" y="2176272"/>
-            <a:ext cx="1836115" cy="237744"/>
-          </a:xfrm>
-          <a:prstGeom prst="rect">
-            <a:avLst/>
-          </a:prstGeom>
-          <a:noFill/>
-        </p:spPr>
-        <p:txBody>
-          <a:bodyPr wrap="square" lIns="0" rIns="0" tIns="0" bIns="0">
-            <a:spAutoFit/>
-          </a:bodyPr>
-          <a:lstStyle/>
-          <a:p>
-            <a:pPr>
-              <a:lnSpc>
-                <a:spcPct val="122000"/>
-              </a:lnSpc>
-            </a:pPr>
-            <a:r>
-              <a:rPr sz="1000" b="0">
-                <a:solidFill>
-                  <a:srgbClr val="5A6472"/>
-                </a:solidFill>
-                <a:latin typeface="Calibri"/>
-              </a:rPr>
-              <a:t>allocated, 18th Lok Sabha</a:t>
-            </a:r>
-          </a:p>
-        </p:txBody>
-      </p:sp>
-      <p:sp>
-        <p:nvSpPr>
-          <p:cNvPr id="17417" name="Rounded Rectangle 17416"/>
-          <p:cNvSpPr/>
-          <p:nvPr/>
-        </p:nvSpPr>
-        <p:spPr>
-          <a:xfrm>
-            <a:off x="5052974" y="1783080"/>
-            <a:ext cx="2092147" cy="749808"/>
-          </a:xfrm>
-          <a:prstGeom prst="roundRect">
-            <a:avLst>
-              <a:gd name="adj" fmla="val 6000"/>
-            </a:avLst>
-          </a:prstGeom>
-          <a:solidFill>
-            <a:srgbClr val="EAF2FB"/>
-          </a:solidFill>
-          <a:ln w="9525">
-            <a:solidFill>
-              <a:srgbClr val="BFDCF2"/>
-            </a:solidFill>
-          </a:ln>
-          <a:effectLst/>
-        </p:spPr>
-        <p:style>
-          <a:lnRef idx="1">
-            <a:schemeClr val="accent1"/>
-          </a:lnRef>
-          <a:fillRef idx="3">
-            <a:schemeClr val="accent1"/>
-          </a:fillRef>
-          <a:effectRef idx="2">
-            <a:schemeClr val="accent1"/>
-          </a:effectRef>
-          <a:fontRef idx="minor">
-            <a:schemeClr val="lt1"/>
-          </a:fontRef>
-        </p:style>
-        <p:txBody>
-          <a:bodyPr rtlCol="0" anchor="ctr"/>
-          <a:lstStyle/>
-          <a:p>
-            <a:pPr algn="ctr"/>
-          </a:p>
-        </p:txBody>
-      </p:sp>
-      <p:sp>
-        <p:nvSpPr>
-          <p:cNvPr id="17418" name="TextBox 17417"/>
-          <p:cNvSpPr txBox="1"/>
-          <p:nvPr/>
-        </p:nvSpPr>
-        <p:spPr>
-          <a:xfrm>
-            <a:off x="5180990" y="1865376"/>
-            <a:ext cx="1836115" cy="274320"/>
-          </a:xfrm>
-          <a:prstGeom prst="rect">
-            <a:avLst/>
-          </a:prstGeom>
-          <a:noFill/>
-        </p:spPr>
-        <p:txBody>
-          <a:bodyPr wrap="square" lIns="0" rIns="0" tIns="0" bIns="0">
-            <a:spAutoFit/>
-          </a:bodyPr>
-          <a:lstStyle/>
-          <a:p>
-            <a:pPr>
-              <a:lnSpc>
-                <a:spcPct val="122000"/>
-              </a:lnSpc>
-            </a:pPr>
-            <a:r>
-              <a:rPr sz="1500" b="1">
-                <a:solidFill>
-                  <a:srgbClr val="00548F"/>
-                </a:solidFill>
-                <a:latin typeface="Consolas"/>
-              </a:rPr>
-              <a:t>47,719</a:t>
-            </a:r>
-          </a:p>
-        </p:txBody>
-      </p:sp>
-      <p:sp>
-        <p:nvSpPr>
-          <p:cNvPr id="17419" name="TextBox 17418"/>
-          <p:cNvSpPr txBox="1"/>
-          <p:nvPr/>
-        </p:nvSpPr>
-        <p:spPr>
-          <a:xfrm>
-            <a:off x="5180990" y="2176272"/>
-            <a:ext cx="1836115" cy="237744"/>
-          </a:xfrm>
-          <a:prstGeom prst="rect">
-            <a:avLst/>
-          </a:prstGeom>
-          <a:noFill/>
-        </p:spPr>
-        <p:txBody>
-          <a:bodyPr wrap="square" lIns="0" rIns="0" tIns="0" bIns="0">
-            <a:spAutoFit/>
-          </a:bodyPr>
-          <a:lstStyle/>
-          <a:p>
-            <a:pPr>
-              <a:lnSpc>
-                <a:spcPct val="122000"/>
-              </a:lnSpc>
-            </a:pPr>
-            <a:r>
-              <a:rPr sz="1000" b="0">
-                <a:solidFill>
-                  <a:srgbClr val="5A6472"/>
-                </a:solidFill>
-                <a:latin typeface="Calibri"/>
-              </a:rPr>
-              <a:t>works above the threshold</a:t>
-            </a:r>
-          </a:p>
-        </p:txBody>
-      </p:sp>
-      <p:sp>
-        <p:nvSpPr>
-          <p:cNvPr id="17420" name="Rounded Rectangle 17419"/>
-          <p:cNvSpPr/>
-          <p:nvPr/>
-        </p:nvSpPr>
-        <p:spPr>
-          <a:xfrm>
-            <a:off x="7273137" y="1783080"/>
-            <a:ext cx="2092147" cy="749808"/>
-          </a:xfrm>
-          <a:prstGeom prst="roundRect">
-            <a:avLst>
-              <a:gd name="adj" fmla="val 6000"/>
-            </a:avLst>
-          </a:prstGeom>
-          <a:solidFill>
-            <a:srgbClr val="EAF2FB"/>
-          </a:solidFill>
-          <a:ln w="9525">
-            <a:solidFill>
-              <a:srgbClr val="BFDCF2"/>
-            </a:solidFill>
-          </a:ln>
-          <a:effectLst/>
-        </p:spPr>
-        <p:style>
-          <a:lnRef idx="1">
-            <a:schemeClr val="accent1"/>
-          </a:lnRef>
-          <a:fillRef idx="3">
-            <a:schemeClr val="accent1"/>
-          </a:fillRef>
-          <a:effectRef idx="2">
-            <a:schemeClr val="accent1"/>
-          </a:effectRef>
-          <a:fontRef idx="minor">
-            <a:schemeClr val="lt1"/>
-          </a:fontRef>
-        </p:style>
-        <p:txBody>
-          <a:bodyPr rtlCol="0" anchor="ctr"/>
-          <a:lstStyle/>
-          <a:p>
-            <a:pPr algn="ctr"/>
-          </a:p>
-        </p:txBody>
-      </p:sp>
-      <p:sp>
-        <p:nvSpPr>
-          <p:cNvPr id="17421" name="TextBox 17420"/>
-          <p:cNvSpPr txBox="1"/>
-          <p:nvPr/>
-        </p:nvSpPr>
-        <p:spPr>
-          <a:xfrm>
-            <a:off x="7401153" y="1865376"/>
-            <a:ext cx="1836115" cy="274320"/>
-          </a:xfrm>
-          <a:prstGeom prst="rect">
-            <a:avLst/>
-          </a:prstGeom>
-          <a:noFill/>
-        </p:spPr>
-        <p:txBody>
-          <a:bodyPr wrap="square" lIns="0" rIns="0" tIns="0" bIns="0">
-            <a:spAutoFit/>
-          </a:bodyPr>
-          <a:lstStyle/>
-          <a:p>
-            <a:pPr>
-              <a:lnSpc>
-                <a:spcPct val="122000"/>
-              </a:lnSpc>
-            </a:pPr>
-            <a:r>
-              <a:rPr sz="1500" b="1">
-                <a:solidFill>
-                  <a:srgbClr val="00548F"/>
-                </a:solidFill>
-                <a:latin typeface="Consolas"/>
-              </a:rPr>
-              <a:t>Rs 4,609 Cr</a:t>
-            </a:r>
-          </a:p>
-        </p:txBody>
-      </p:sp>
-      <p:sp>
-        <p:nvSpPr>
-          <p:cNvPr id="17422" name="TextBox 17421"/>
-          <p:cNvSpPr txBox="1"/>
-          <p:nvPr/>
-        </p:nvSpPr>
-        <p:spPr>
-          <a:xfrm>
-            <a:off x="7401153" y="2176272"/>
-            <a:ext cx="1836115" cy="237744"/>
-          </a:xfrm>
-          <a:prstGeom prst="rect">
-            <a:avLst/>
-          </a:prstGeom>
-          <a:noFill/>
-        </p:spPr>
-        <p:txBody>
-          <a:bodyPr wrap="square" lIns="0" rIns="0" tIns="0" bIns="0">
-            <a:spAutoFit/>
-          </a:bodyPr>
-          <a:lstStyle/>
-          <a:p>
-            <a:pPr>
-              <a:lnSpc>
-                <a:spcPct val="122000"/>
-              </a:lnSpc>
-            </a:pPr>
-            <a:r>
-              <a:rPr sz="1000" b="0">
-                <a:solidFill>
-                  <a:srgbClr val="5A6472"/>
-                </a:solidFill>
-                <a:latin typeface="Calibri"/>
-              </a:rPr>
-              <a:t>sanction awaiting review</a:t>
-            </a:r>
-          </a:p>
-        </p:txBody>
-      </p:sp>
-      <p:sp>
-        <p:nvSpPr>
-          <p:cNvPr id="17423" name="Rounded Rectangle 17422"/>
-          <p:cNvSpPr/>
-          <p:nvPr/>
-        </p:nvSpPr>
-        <p:spPr>
-          <a:xfrm>
-            <a:off x="9493300" y="1783080"/>
-            <a:ext cx="2092147" cy="749808"/>
-          </a:xfrm>
-          <a:prstGeom prst="roundRect">
-            <a:avLst>
-              <a:gd name="adj" fmla="val 6000"/>
-            </a:avLst>
-          </a:prstGeom>
-          <a:solidFill>
-            <a:srgbClr val="EAF2FB"/>
-          </a:solidFill>
-          <a:ln w="9525">
-            <a:solidFill>
-              <a:srgbClr val="BFDCF2"/>
-            </a:solidFill>
-          </a:ln>
-          <a:effectLst/>
-        </p:spPr>
-        <p:style>
-          <a:lnRef idx="1">
-            <a:schemeClr val="accent1"/>
-          </a:lnRef>
-          <a:fillRef idx="3">
-            <a:schemeClr val="accent1"/>
-          </a:fillRef>
-          <a:effectRef idx="2">
-            <a:schemeClr val="accent1"/>
-          </a:effectRef>
-          <a:fontRef idx="minor">
-            <a:schemeClr val="lt1"/>
-          </a:fontRef>
-        </p:style>
-        <p:txBody>
-          <a:bodyPr rtlCol="0" anchor="ctr"/>
-          <a:lstStyle/>
-          <a:p>
-            <a:pPr algn="ctr"/>
-          </a:p>
-        </p:txBody>
-      </p:sp>
-      <p:sp>
-        <p:nvSpPr>
-          <p:cNvPr id="17424" name="TextBox 17423"/>
-          <p:cNvSpPr txBox="1"/>
-          <p:nvPr/>
-        </p:nvSpPr>
-        <p:spPr>
-          <a:xfrm>
-            <a:off x="9621316" y="1865376"/>
-            <a:ext cx="1836115" cy="274320"/>
-          </a:xfrm>
-          <a:prstGeom prst="rect">
-            <a:avLst/>
-          </a:prstGeom>
-          <a:noFill/>
-        </p:spPr>
-        <p:txBody>
-          <a:bodyPr wrap="square" lIns="0" rIns="0" tIns="0" bIns="0">
-            <a:spAutoFit/>
-          </a:bodyPr>
-          <a:lstStyle/>
-          <a:p>
-            <a:pPr>
-              <a:lnSpc>
-                <a:spcPct val="122000"/>
-              </a:lnSpc>
-            </a:pPr>
-            <a:r>
-              <a:rPr sz="1500" b="1">
-                <a:solidFill>
-                  <a:srgbClr val="00548F"/>
-                </a:solidFill>
-                <a:latin typeface="Consolas"/>
-              </a:rPr>
-              <a:t>912</a:t>
-            </a:r>
-          </a:p>
-        </p:txBody>
-      </p:sp>
-      <p:sp>
-        <p:nvSpPr>
-          <p:cNvPr id="17425" name="TextBox 17424"/>
-          <p:cNvSpPr txBox="1"/>
-          <p:nvPr/>
-        </p:nvSpPr>
-        <p:spPr>
-          <a:xfrm>
-            <a:off x="9621316" y="2176272"/>
-            <a:ext cx="1836115" cy="237744"/>
-          </a:xfrm>
-          <a:prstGeom prst="rect">
-            <a:avLst/>
-          </a:prstGeom>
-          <a:noFill/>
-        </p:spPr>
-        <p:txBody>
-          <a:bodyPr wrap="square" lIns="0" rIns="0" tIns="0" bIns="0">
-            <a:spAutoFit/>
-          </a:bodyPr>
-          <a:lstStyle/>
-          <a:p>
-            <a:pPr>
-              <a:lnSpc>
-                <a:spcPct val="122000"/>
-              </a:lnSpc>
-            </a:pPr>
-            <a:r>
-              <a:rPr sz="1000" b="0">
-                <a:solidFill>
-                  <a:srgbClr val="5A6472"/>
-                </a:solidFill>
-                <a:latin typeface="Calibri"/>
-              </a:rPr>
-              <a:t>cohort findings</a:t>
-            </a:r>
-          </a:p>
-        </p:txBody>
-      </p:sp>
-      <p:sp>
-        <p:nvSpPr>
-          <p:cNvPr id="17426" name="Rounded Rectangle 17425"/>
-          <p:cNvSpPr/>
-          <p:nvPr/>
-        </p:nvSpPr>
-        <p:spPr>
-          <a:xfrm>
-            <a:off x="612648" y="2752344"/>
-            <a:ext cx="2633472" cy="2331720"/>
-          </a:xfrm>
-          <a:prstGeom prst="roundRect">
-            <a:avLst>
-              <a:gd name="adj" fmla="val 6000"/>
-            </a:avLst>
-          </a:prstGeom>
-          <a:solidFill>
-            <a:srgbClr val="F5F7FA"/>
-          </a:solidFill>
-          <a:ln w="9525">
-            <a:solidFill>
-              <a:srgbClr val="D6DCE5"/>
-            </a:solidFill>
-          </a:ln>
-          <a:effectLst/>
-        </p:spPr>
-        <p:style>
-          <a:lnRef idx="1">
-            <a:schemeClr val="accent1"/>
-          </a:lnRef>
-          <a:fillRef idx="3">
-            <a:schemeClr val="accent1"/>
-          </a:fillRef>
-          <a:effectRef idx="2">
-            <a:schemeClr val="accent1"/>
-          </a:effectRef>
-          <a:fontRef idx="minor">
-            <a:schemeClr val="lt1"/>
-          </a:fontRef>
-        </p:style>
-        <p:txBody>
-          <a:bodyPr rtlCol="0" anchor="ctr"/>
-          <a:lstStyle/>
-          <a:p>
-            <a:pPr algn="ctr"/>
-          </a:p>
-        </p:txBody>
-      </p:sp>
-      <p:sp>
-        <p:nvSpPr>
-          <p:cNvPr id="17427" name="Rounded Rectangle 17426"/>
-          <p:cNvSpPr/>
-          <p:nvPr/>
-        </p:nvSpPr>
-        <p:spPr>
-          <a:xfrm>
-            <a:off x="612648" y="2752344"/>
-            <a:ext cx="41148" cy="2331720"/>
-          </a:xfrm>
-          <a:prstGeom prst="roundRect">
-            <a:avLst>
-              <a:gd name="adj" fmla="val 6000"/>
-            </a:avLst>
-          </a:prstGeom>
-          <a:solidFill>
-            <a:srgbClr val="0070C0"/>
-          </a:solidFill>
-          <a:ln>
-            <a:noFill/>
-          </a:ln>
-          <a:effectLst/>
-        </p:spPr>
-        <p:style>
-          <a:lnRef idx="1">
-            <a:schemeClr val="accent1"/>
-          </a:lnRef>
-          <a:fillRef idx="3">
-            <a:schemeClr val="accent1"/>
-          </a:fillRef>
-          <a:effectRef idx="2">
-            <a:schemeClr val="accent1"/>
-          </a:effectRef>
-          <a:fontRef idx="minor">
-            <a:schemeClr val="lt1"/>
-          </a:fontRef>
-        </p:style>
-        <p:txBody>
-          <a:bodyPr rtlCol="0" anchor="ctr"/>
-          <a:lstStyle/>
-          <a:p>
-            <a:pPr algn="ctr"/>
-          </a:p>
-        </p:txBody>
-      </p:sp>
-      <p:sp>
-        <p:nvSpPr>
-          <p:cNvPr id="17428" name="TextBox 17427"/>
-          <p:cNvSpPr txBox="1"/>
-          <p:nvPr/>
-        </p:nvSpPr>
-        <p:spPr>
-          <a:xfrm>
-            <a:off x="813816" y="2898648"/>
-            <a:ext cx="2267712" cy="176783"/>
-          </a:xfrm>
-          <a:prstGeom prst="rect">
-            <a:avLst/>
-          </a:prstGeom>
-          <a:noFill/>
-        </p:spPr>
-        <p:txBody>
-          <a:bodyPr wrap="square" lIns="0" rIns="0" tIns="0" bIns="0">
-            <a:spAutoFit/>
-          </a:bodyPr>
-          <a:lstStyle/>
-          <a:p>
-            <a:pPr>
-              <a:lnSpc>
-                <a:spcPct val="116000"/>
-              </a:lnSpc>
-            </a:pPr>
-            <a:r>
-              <a:rPr sz="1200" b="1">
-                <a:solidFill>
-                  <a:srgbClr val="101828"/>
-                </a:solidFill>
-                <a:latin typeface="Calibri"/>
-              </a:rPr>
-              <a:t>Member of Parliament</a:t>
-            </a:r>
-          </a:p>
-        </p:txBody>
-      </p:sp>
-      <p:sp>
-        <p:nvSpPr>
-          <p:cNvPr id="17429" name="TextBox 17428"/>
-          <p:cNvSpPr txBox="1"/>
-          <p:nvPr/>
-        </p:nvSpPr>
-        <p:spPr>
-          <a:xfrm>
-            <a:off x="813816" y="3157728"/>
-            <a:ext cx="2267712" cy="813435"/>
-          </a:xfrm>
-          <a:prstGeom prst="rect">
-            <a:avLst/>
-          </a:prstGeom>
-          <a:noFill/>
-        </p:spPr>
-        <p:txBody>
-          <a:bodyPr wrap="square" lIns="0" rIns="0" tIns="0" bIns="0">
-            <a:spAutoFit/>
-          </a:bodyPr>
-          <a:lstStyle/>
-          <a:p>
-            <a:pPr>
-              <a:lnSpc>
-                <a:spcPct val="122000"/>
-              </a:lnSpc>
-            </a:pPr>
-            <a:r>
-              <a:rPr sz="1050" b="0">
-                <a:solidFill>
-                  <a:srgbClr val="5A6472"/>
-                </a:solidFill>
-                <a:latin typeface="Calibri"/>
-              </a:rPr>
-              <a:t>Their own page: what they recommended, what got built, how much allocation was never committed to any work, and which of it is flagged.</a:t>
-            </a:r>
-          </a:p>
-        </p:txBody>
-      </p:sp>
-      <p:sp>
-        <p:nvSpPr>
-          <p:cNvPr id="17430" name="Rounded Rectangle 17429"/>
-          <p:cNvSpPr/>
-          <p:nvPr/>
-        </p:nvSpPr>
-        <p:spPr>
-          <a:xfrm>
-            <a:off x="3392424" y="2752344"/>
-            <a:ext cx="2633472" cy="2331720"/>
-          </a:xfrm>
-          <a:prstGeom prst="roundRect">
-            <a:avLst>
-              <a:gd name="adj" fmla="val 6000"/>
-            </a:avLst>
-          </a:prstGeom>
-          <a:solidFill>
-            <a:srgbClr val="F5F7FA"/>
-          </a:solidFill>
-          <a:ln w="9525">
-            <a:solidFill>
-              <a:srgbClr val="D6DCE5"/>
-            </a:solidFill>
-          </a:ln>
-          <a:effectLst/>
-        </p:spPr>
-        <p:style>
-          <a:lnRef idx="1">
-            <a:schemeClr val="accent1"/>
-          </a:lnRef>
-          <a:fillRef idx="3">
-            <a:schemeClr val="accent1"/>
-          </a:fillRef>
-          <a:effectRef idx="2">
-            <a:schemeClr val="accent1"/>
-          </a:effectRef>
-          <a:fontRef idx="minor">
-            <a:schemeClr val="lt1"/>
-          </a:fontRef>
-        </p:style>
-        <p:txBody>
-          <a:bodyPr rtlCol="0" anchor="ctr"/>
-          <a:lstStyle/>
-          <a:p>
-            <a:pPr algn="ctr"/>
-          </a:p>
-        </p:txBody>
-      </p:sp>
-      <p:sp>
-        <p:nvSpPr>
-          <p:cNvPr id="17431" name="Rounded Rectangle 17430"/>
-          <p:cNvSpPr/>
-          <p:nvPr/>
-        </p:nvSpPr>
-        <p:spPr>
-          <a:xfrm>
-            <a:off x="3392424" y="2752344"/>
-            <a:ext cx="41148" cy="2331720"/>
-          </a:xfrm>
-          <a:prstGeom prst="roundRect">
-            <a:avLst>
-              <a:gd name="adj" fmla="val 6000"/>
-            </a:avLst>
-          </a:prstGeom>
-          <a:solidFill>
-            <a:srgbClr val="0070C0"/>
-          </a:solidFill>
-          <a:ln>
-            <a:noFill/>
-          </a:ln>
-          <a:effectLst/>
-        </p:spPr>
-        <p:style>
-          <a:lnRef idx="1">
-            <a:schemeClr val="accent1"/>
-          </a:lnRef>
-          <a:fillRef idx="3">
-            <a:schemeClr val="accent1"/>
-          </a:fillRef>
-          <a:effectRef idx="2">
-            <a:schemeClr val="accent1"/>
-          </a:effectRef>
-          <a:fontRef idx="minor">
-            <a:schemeClr val="lt1"/>
-          </a:fontRef>
-        </p:style>
-        <p:txBody>
-          <a:bodyPr rtlCol="0" anchor="ctr"/>
-          <a:lstStyle/>
-          <a:p>
-            <a:pPr algn="ctr"/>
-          </a:p>
-        </p:txBody>
-      </p:sp>
-      <p:sp>
-        <p:nvSpPr>
-          <p:cNvPr id="17432" name="TextBox 17431"/>
-          <p:cNvSpPr txBox="1"/>
-          <p:nvPr/>
-        </p:nvSpPr>
-        <p:spPr>
-          <a:xfrm>
-            <a:off x="3593592" y="2898648"/>
-            <a:ext cx="2267712" cy="176783"/>
-          </a:xfrm>
-          <a:prstGeom prst="rect">
-            <a:avLst/>
-          </a:prstGeom>
-          <a:noFill/>
-        </p:spPr>
-        <p:txBody>
-          <a:bodyPr wrap="square" lIns="0" rIns="0" tIns="0" bIns="0">
-            <a:spAutoFit/>
-          </a:bodyPr>
-          <a:lstStyle/>
-          <a:p>
-            <a:pPr>
-              <a:lnSpc>
-                <a:spcPct val="116000"/>
-              </a:lnSpc>
-            </a:pPr>
-            <a:r>
-              <a:rPr sz="1200" b="1">
-                <a:solidFill>
-                  <a:srgbClr val="101828"/>
-                </a:solidFill>
-                <a:latin typeface="Calibri"/>
-              </a:rPr>
-              <a:t>District authority</a:t>
-            </a:r>
-          </a:p>
-        </p:txBody>
-      </p:sp>
-      <p:sp>
-        <p:nvSpPr>
-          <p:cNvPr id="17433" name="TextBox 17432"/>
-          <p:cNvSpPr txBox="1"/>
-          <p:nvPr/>
-        </p:nvSpPr>
-        <p:spPr>
-          <a:xfrm>
-            <a:off x="3593592" y="3157728"/>
-            <a:ext cx="2267712" cy="813435"/>
-          </a:xfrm>
-          <a:prstGeom prst="rect">
-            <a:avLst/>
-          </a:prstGeom>
-          <a:noFill/>
-        </p:spPr>
-        <p:txBody>
-          <a:bodyPr wrap="square" lIns="0" rIns="0" tIns="0" bIns="0">
-            <a:spAutoFit/>
-          </a:bodyPr>
-          <a:lstStyle/>
-          <a:p>
-            <a:pPr>
-              <a:lnSpc>
-                <a:spcPct val="122000"/>
-              </a:lnSpc>
-            </a:pPr>
-            <a:r>
-              <a:rPr sz="1050" b="0">
-                <a:solidFill>
-                  <a:srgbClr val="5A6472"/>
-                </a:solidFill>
-                <a:latin typeface="Calibri"/>
-              </a:rPr>
-              <a:t>A district desk led by the implementing agencies it supervises, with vendor concentration and a ranked shortlist instead of a register.</a:t>
-            </a:r>
-          </a:p>
-        </p:txBody>
-      </p:sp>
-      <p:sp>
-        <p:nvSpPr>
-          <p:cNvPr id="17434" name="Rounded Rectangle 17433"/>
-          <p:cNvSpPr/>
-          <p:nvPr/>
-        </p:nvSpPr>
-        <p:spPr>
-          <a:xfrm>
-            <a:off x="6172200" y="2752344"/>
-            <a:ext cx="2633472" cy="2331720"/>
-          </a:xfrm>
-          <a:prstGeom prst="roundRect">
-            <a:avLst>
-              <a:gd name="adj" fmla="val 6000"/>
-            </a:avLst>
-          </a:prstGeom>
-          <a:solidFill>
-            <a:srgbClr val="F5F7FA"/>
-          </a:solidFill>
-          <a:ln w="9525">
-            <a:solidFill>
-              <a:srgbClr val="D6DCE5"/>
-            </a:solidFill>
-          </a:ln>
-          <a:effectLst/>
-        </p:spPr>
-        <p:style>
-          <a:lnRef idx="1">
-            <a:schemeClr val="accent1"/>
-          </a:lnRef>
-          <a:fillRef idx="3">
-            <a:schemeClr val="accent1"/>
-          </a:fillRef>
-          <a:effectRef idx="2">
-            <a:schemeClr val="accent1"/>
-          </a:effectRef>
-          <a:fontRef idx="minor">
-            <a:schemeClr val="lt1"/>
-          </a:fontRef>
-        </p:style>
-        <p:txBody>
-          <a:bodyPr rtlCol="0" anchor="ctr"/>
-          <a:lstStyle/>
-          <a:p>
-            <a:pPr algn="ctr"/>
-          </a:p>
-        </p:txBody>
-      </p:sp>
-      <p:sp>
-        <p:nvSpPr>
-          <p:cNvPr id="17435" name="Rounded Rectangle 17434"/>
-          <p:cNvSpPr/>
-          <p:nvPr/>
-        </p:nvSpPr>
-        <p:spPr>
-          <a:xfrm>
-            <a:off x="6172200" y="2752344"/>
-            <a:ext cx="41148" cy="2331720"/>
-          </a:xfrm>
-          <a:prstGeom prst="roundRect">
-            <a:avLst>
-              <a:gd name="adj" fmla="val 6000"/>
-            </a:avLst>
-          </a:prstGeom>
-          <a:solidFill>
-            <a:srgbClr val="0070C0"/>
-          </a:solidFill>
-          <a:ln>
-            <a:noFill/>
-          </a:ln>
-          <a:effectLst/>
-        </p:spPr>
-        <p:style>
-          <a:lnRef idx="1">
-            <a:schemeClr val="accent1"/>
-          </a:lnRef>
-          <a:fillRef idx="3">
-            <a:schemeClr val="accent1"/>
-          </a:fillRef>
-          <a:effectRef idx="2">
-            <a:schemeClr val="accent1"/>
-          </a:effectRef>
-          <a:fontRef idx="minor">
-            <a:schemeClr val="lt1"/>
-          </a:fontRef>
-        </p:style>
-        <p:txBody>
-          <a:bodyPr rtlCol="0" anchor="ctr"/>
-          <a:lstStyle/>
-          <a:p>
-            <a:pPr algn="ctr"/>
-          </a:p>
-        </p:txBody>
-      </p:sp>
-      <p:sp>
-        <p:nvSpPr>
-          <p:cNvPr id="17436" name="TextBox 17435"/>
-          <p:cNvSpPr txBox="1"/>
-          <p:nvPr/>
-        </p:nvSpPr>
-        <p:spPr>
-          <a:xfrm>
-            <a:off x="6373368" y="2898648"/>
-            <a:ext cx="2267712" cy="176783"/>
-          </a:xfrm>
-          <a:prstGeom prst="rect">
-            <a:avLst/>
-          </a:prstGeom>
-          <a:noFill/>
-        </p:spPr>
-        <p:txBody>
-          <a:bodyPr wrap="square" lIns="0" rIns="0" tIns="0" bIns="0">
-            <a:spAutoFit/>
-          </a:bodyPr>
-          <a:lstStyle/>
-          <a:p>
-            <a:pPr>
-              <a:lnSpc>
-                <a:spcPct val="116000"/>
-              </a:lnSpc>
-            </a:pPr>
-            <a:r>
-              <a:rPr sz="1200" b="1">
-                <a:solidFill>
-                  <a:srgbClr val="101828"/>
-                </a:solidFill>
-                <a:latin typeface="Calibri"/>
-              </a:rPr>
-              <a:t>State nodal officer</a:t>
-            </a:r>
-          </a:p>
-        </p:txBody>
-      </p:sp>
-      <p:sp>
-        <p:nvSpPr>
-          <p:cNvPr id="17437" name="TextBox 17436"/>
-          <p:cNvSpPr txBox="1"/>
-          <p:nvPr/>
-        </p:nvSpPr>
-        <p:spPr>
-          <a:xfrm>
-            <a:off x="6373368" y="3157728"/>
-            <a:ext cx="2267712" cy="813435"/>
-          </a:xfrm>
-          <a:prstGeom prst="rect">
-            <a:avLst/>
-          </a:prstGeom>
-          <a:noFill/>
-        </p:spPr>
-        <p:txBody>
-          <a:bodyPr wrap="square" lIns="0" rIns="0" tIns="0" bIns="0">
-            <a:spAutoFit/>
-          </a:bodyPr>
-          <a:lstStyle/>
-          <a:p>
-            <a:pPr>
-              <a:lnSpc>
-                <a:spcPct val="122000"/>
-              </a:lnSpc>
-            </a:pPr>
-            <a:r>
-              <a:rPr sz="1050" b="0">
-                <a:solidFill>
-                  <a:srgbClr val="5A6472"/>
-                </a:solidFill>
-                <a:latin typeface="Calibri"/>
-              </a:rPr>
-              <a:t>A state desk ranking every district by the queue it has to clear, and all 36 states on money committed against money paid.</a:t>
-            </a:r>
-          </a:p>
-        </p:txBody>
-      </p:sp>
-      <p:sp>
-        <p:nvSpPr>
-          <p:cNvPr id="17438" name="Rounded Rectangle 17437"/>
-          <p:cNvSpPr/>
-          <p:nvPr/>
-        </p:nvSpPr>
-        <p:spPr>
-          <a:xfrm>
-            <a:off x="8951976" y="2752344"/>
-            <a:ext cx="2633472" cy="2331720"/>
-          </a:xfrm>
-          <a:prstGeom prst="roundRect">
-            <a:avLst>
-              <a:gd name="adj" fmla="val 6000"/>
-            </a:avLst>
-          </a:prstGeom>
-          <a:solidFill>
-            <a:srgbClr val="F5F7FA"/>
-          </a:solidFill>
-          <a:ln w="9525">
-            <a:solidFill>
-              <a:srgbClr val="D6DCE5"/>
-            </a:solidFill>
-          </a:ln>
-          <a:effectLst/>
-        </p:spPr>
-        <p:style>
-          <a:lnRef idx="1">
-            <a:schemeClr val="accent1"/>
-          </a:lnRef>
-          <a:fillRef idx="3">
-            <a:schemeClr val="accent1"/>
-          </a:fillRef>
-          <a:effectRef idx="2">
-            <a:schemeClr val="accent1"/>
-          </a:effectRef>
-          <a:fontRef idx="minor">
-            <a:schemeClr val="lt1"/>
-          </a:fontRef>
-        </p:style>
-        <p:txBody>
-          <a:bodyPr rtlCol="0" anchor="ctr"/>
-          <a:lstStyle/>
-          <a:p>
-            <a:pPr algn="ctr"/>
-          </a:p>
-        </p:txBody>
-      </p:sp>
-      <p:sp>
-        <p:nvSpPr>
-          <p:cNvPr id="17439" name="Rounded Rectangle 17438"/>
-          <p:cNvSpPr/>
-          <p:nvPr/>
-        </p:nvSpPr>
-        <p:spPr>
-          <a:xfrm>
-            <a:off x="8951976" y="2752344"/>
-            <a:ext cx="41148" cy="2331720"/>
-          </a:xfrm>
-          <a:prstGeom prst="roundRect">
-            <a:avLst>
-              <a:gd name="adj" fmla="val 6000"/>
-            </a:avLst>
-          </a:prstGeom>
-          <a:solidFill>
-            <a:srgbClr val="0070C0"/>
-          </a:solidFill>
-          <a:ln>
-            <a:noFill/>
-          </a:ln>
-          <a:effectLst/>
-        </p:spPr>
-        <p:style>
-          <a:lnRef idx="1">
-            <a:schemeClr val="accent1"/>
-          </a:lnRef>
-          <a:fillRef idx="3">
-            <a:schemeClr val="accent1"/>
-          </a:fillRef>
-          <a:effectRef idx="2">
-            <a:schemeClr val="accent1"/>
-          </a:effectRef>
-          <a:fontRef idx="minor">
-            <a:schemeClr val="lt1"/>
-          </a:fontRef>
-        </p:style>
-        <p:txBody>
-          <a:bodyPr rtlCol="0" anchor="ctr"/>
-          <a:lstStyle/>
-          <a:p>
-            <a:pPr algn="ctr"/>
-          </a:p>
-        </p:txBody>
-      </p:sp>
-      <p:sp>
-        <p:nvSpPr>
-          <p:cNvPr id="17440" name="TextBox 17439"/>
-          <p:cNvSpPr txBox="1"/>
-          <p:nvPr/>
-        </p:nvSpPr>
-        <p:spPr>
-          <a:xfrm>
-            <a:off x="9153144" y="2898648"/>
-            <a:ext cx="2267712" cy="176783"/>
-          </a:xfrm>
-          <a:prstGeom prst="rect">
-            <a:avLst/>
-          </a:prstGeom>
-          <a:noFill/>
-        </p:spPr>
-        <p:txBody>
-          <a:bodyPr wrap="square" lIns="0" rIns="0" tIns="0" bIns="0">
-            <a:spAutoFit/>
-          </a:bodyPr>
-          <a:lstStyle/>
-          <a:p>
-            <a:pPr>
-              <a:lnSpc>
-                <a:spcPct val="116000"/>
-              </a:lnSpc>
-            </a:pPr>
-            <a:r>
-              <a:rPr sz="1200" b="1">
-                <a:solidFill>
-                  <a:srgbClr val="101828"/>
-                </a:solidFill>
-                <a:latin typeface="Calibri"/>
-              </a:rPr>
-              <a:t>Ministry (MoSPI)</a:t>
-            </a:r>
-          </a:p>
-        </p:txBody>
-      </p:sp>
-      <p:sp>
-        <p:nvSpPr>
-          <p:cNvPr id="17441" name="TextBox 17440"/>
-          <p:cNvSpPr txBox="1"/>
-          <p:nvPr/>
-        </p:nvSpPr>
-        <p:spPr>
-          <a:xfrm>
-            <a:off x="9153144" y="3157728"/>
-            <a:ext cx="2267712" cy="813435"/>
-          </a:xfrm>
-          <a:prstGeom prst="rect">
-            <a:avLst/>
-          </a:prstGeom>
-          <a:noFill/>
-        </p:spPr>
-        <p:txBody>
-          <a:bodyPr wrap="square" lIns="0" rIns="0" tIns="0" bIns="0">
-            <a:spAutoFit/>
-          </a:bodyPr>
-          <a:lstStyle/>
-          <a:p>
-            <a:pPr>
-              <a:lnSpc>
-                <a:spcPct val="122000"/>
-              </a:lnSpc>
-            </a:pPr>
-            <a:r>
-              <a:rPr sz="1050" b="0">
-                <a:solidFill>
-                  <a:srgbClr val="5A6472"/>
-                </a:solidFill>
-                <a:latin typeface="Calibri"/>
-              </a:rPr>
-              <a:t>National patterns, the compliance rule book and a provenance page reconciling every headline figure against the Ministry's own dashboard.</a:t>
-            </a:r>
-          </a:p>
-        </p:txBody>
-      </p:sp>
-      <p:sp>
-        <p:nvSpPr>
-          <p:cNvPr id="17442" name="Rounded Rectangle 17441"/>
-          <p:cNvSpPr/>
-          <p:nvPr/>
-        </p:nvSpPr>
-        <p:spPr>
-          <a:xfrm>
-            <a:off x="612648" y="5303520"/>
-            <a:ext cx="10972800" cy="932688"/>
-          </a:xfrm>
-          <a:prstGeom prst="roundRect">
-            <a:avLst>
-              <a:gd name="adj" fmla="val 6000"/>
-            </a:avLst>
-          </a:prstGeom>
-          <a:solidFill>
-            <a:srgbClr val="F5F7FA"/>
-          </a:solidFill>
-          <a:ln w="9525">
-            <a:solidFill>
-              <a:srgbClr val="D6DCE5"/>
-            </a:solidFill>
-          </a:ln>
-          <a:effectLst/>
-        </p:spPr>
-        <p:style>
-          <a:lnRef idx="1">
-            <a:schemeClr val="accent1"/>
-          </a:lnRef>
-          <a:fillRef idx="3">
-            <a:schemeClr val="accent1"/>
-          </a:fillRef>
-          <a:effectRef idx="2">
-            <a:schemeClr val="accent1"/>
-          </a:effectRef>
-          <a:fontRef idx="minor">
-            <a:schemeClr val="lt1"/>
-          </a:fontRef>
-        </p:style>
-        <p:txBody>
-          <a:bodyPr rtlCol="0" anchor="ctr"/>
-          <a:lstStyle/>
-          <a:p>
-            <a:pPr algn="ctr"/>
-          </a:p>
-        </p:txBody>
-      </p:sp>
-      <p:sp>
-        <p:nvSpPr>
-          <p:cNvPr id="17443" name="TextBox 17442"/>
-          <p:cNvSpPr txBox="1"/>
-          <p:nvPr/>
-        </p:nvSpPr>
-        <p:spPr>
-          <a:xfrm>
-            <a:off x="777240" y="5440680"/>
-            <a:ext cx="10643616" cy="694944"/>
-          </a:xfrm>
-          <a:prstGeom prst="rect">
-            <a:avLst/>
-          </a:prstGeom>
-          <a:noFill/>
-        </p:spPr>
-        <p:txBody>
-          <a:bodyPr wrap="square" lIns="0" rIns="0" tIns="0" bIns="0">
-            <a:spAutoFit/>
-          </a:bodyPr>
-          <a:lstStyle/>
-          <a:p>
-            <a:pPr>
-              <a:lnSpc>
-                <a:spcPct val="132000"/>
-              </a:lnSpc>
-            </a:pPr>
-            <a:r>
-              <a:rPr sz="1150" b="0">
-                <a:solidFill>
-                  <a:srgbClr val="5A6472"/>
-                </a:solidFill>
-                <a:latin typeface="Calibri"/>
-              </a:rPr>
-              <a:t>Social — public money is checked against its own record, not against nobody.  Economic — verification effort goes where the deviation is, so a fixed audit budget covers more ground.  Governance — every flag is traceable to the rows that produced it, so a finding can be argued with rather than merely believed.</a:t>
+              <a:t>Risk by state, every district covered</a:t>
             </a:r>
           </a:p>
         </p:txBody>
@@ -12662,7 +8425,7 @@
           <a:bodyPr/>
           <a:lstStyle/>
           <a:p>
-            <a:pPr eaLnBrk="1" hangingPunct="1"/>
+            <a:pPr eaLnBrk="1" hangingPunct="1" algn="ctr"/>
             <a:r>
               <a:rPr lang="en-US" sz="3600" b="1" dirty="0">
                 <a:latin typeface="Times New Roman" panose="02020603050405020304" pitchFamily="18" charset="0"/>
@@ -12684,8 +8447,8 @@
         </p:nvSpPr>
         <p:spPr bwMode="auto">
           <a:xfrm>
-            <a:off x="612648" y="1188720"/>
-            <a:ext cx="10972800" cy="475488"/>
+            <a:off x="612648" y="1078992"/>
+            <a:ext cx="10972800" cy="676656"/>
           </a:xfrm>
           <a:prstGeom prst="rect">
             <a:avLst/>
@@ -12712,7 +8475,7 @@
                 <a:spcPct val="0"/>
               </a:spcBef>
               <a:spcAft>
-                <a:spcPct val="0"/>
+                <a:spcPts val="0"/>
               </a:spcAft>
               <a:buClrTx/>
               <a:buSzTx/>
@@ -12983,28 +8746,165 @@
           </a:prstGeom>
         </p:spPr>
       </p:pic>
-      <p:sp>
-        <p:nvSpPr>
-          <p:cNvPr id="17411" name="Rounded Rectangle 17410"/>
-          <p:cNvSpPr/>
+      <p:pic>
+        <p:nvPicPr>
+          <p:cNvPr id="17411" name="Picture 17410" descr="refs.png"/>
+          <p:cNvPicPr>
+            <a:picLocks noChangeAspect="1"/>
+          </p:cNvPicPr>
           <p:nvPr/>
-        </p:nvSpPr>
+        </p:nvPicPr>
+        <p:blipFill>
+          <a:blip r:embed="rId4"/>
+          <a:stretch>
+            <a:fillRect/>
+          </a:stretch>
+        </p:blipFill>
         <p:spPr>
           <a:xfrm>
             <a:off x="612648" y="1783080"/>
-            <a:ext cx="5394960" cy="3520440"/>
+            <a:ext cx="10972800" cy="2023110"/>
+          </a:xfrm>
+          <a:prstGeom prst="rect">
+            <a:avLst/>
+          </a:prstGeom>
+        </p:spPr>
+      </p:pic>
+      <p:pic>
+        <p:nvPicPr>
+          <p:cNvPr id="17412" name="Picture 17411" descr="agencies.png">
+            <a:hlinkClick r:id="rId6"/>
+          </p:cNvPr>
+          <p:cNvPicPr>
+            <a:picLocks noChangeAspect="1"/>
+          </p:cNvPicPr>
+          <p:nvPr/>
+        </p:nvPicPr>
+        <p:blipFill>
+          <a:blip r:embed="rId5"/>
+          <a:stretch>
+            <a:fillRect/>
+          </a:stretch>
+        </p:blipFill>
+        <p:spPr>
+          <a:xfrm>
+            <a:off x="612648" y="3934205"/>
+            <a:ext cx="3520440" cy="1612801"/>
+          </a:xfrm>
+          <a:prstGeom prst="rect">
+            <a:avLst/>
+          </a:prstGeom>
+        </p:spPr>
+      </p:pic>
+      <p:pic>
+        <p:nvPicPr>
+          <p:cNvPr id="17413" name="Picture 17412" descr="alerts.png">
+            <a:hlinkClick r:id="rId6"/>
+          </p:cNvPr>
+          <p:cNvPicPr>
+            <a:picLocks noChangeAspect="1"/>
+          </p:cNvPicPr>
+          <p:nvPr/>
+        </p:nvPicPr>
+        <p:blipFill>
+          <a:blip r:embed="rId7"/>
+          <a:stretch>
+            <a:fillRect/>
+          </a:stretch>
+        </p:blipFill>
+        <p:spPr>
+          <a:xfrm>
+            <a:off x="4315968" y="3934205"/>
+            <a:ext cx="3520440" cy="1612801"/>
+          </a:xfrm>
+          <a:prstGeom prst="rect">
+            <a:avLst/>
+          </a:prstGeom>
+        </p:spPr>
+      </p:pic>
+      <p:pic>
+        <p:nvPicPr>
+          <p:cNvPr id="17414" name="Picture 17413" descr="overview.png">
+            <a:hlinkClick r:id="rId6"/>
+          </p:cNvPr>
+          <p:cNvPicPr>
+            <a:picLocks noChangeAspect="1"/>
+          </p:cNvPicPr>
+          <p:nvPr/>
+        </p:nvPicPr>
+        <p:blipFill>
+          <a:blip r:embed="rId8"/>
+          <a:stretch>
+            <a:fillRect/>
+          </a:stretch>
+        </p:blipFill>
+        <p:spPr>
+          <a:xfrm>
+            <a:off x="8019288" y="3934205"/>
+            <a:ext cx="3520440" cy="1711813"/>
+          </a:xfrm>
+          <a:prstGeom prst="rect">
+            <a:avLst/>
+          </a:prstGeom>
+        </p:spPr>
+      </p:pic>
+      <p:sp>
+        <p:nvSpPr>
+          <p:cNvPr id="17415" name="TextBox 17414"/>
+          <p:cNvSpPr txBox="1"/>
+          <p:nvPr/>
+        </p:nvSpPr>
+        <p:spPr>
+          <a:xfrm>
+            <a:off x="612648" y="5682595"/>
+            <a:ext cx="10972800" cy="237744"/>
+          </a:xfrm>
+          <a:prstGeom prst="rect">
+            <a:avLst/>
+          </a:prstGeom>
+          <a:noFill/>
+        </p:spPr>
+        <p:txBody>
+          <a:bodyPr wrap="square" lIns="0" rIns="0" tIns="0" bIns="0">
+            <a:spAutoFit/>
+          </a:bodyPr>
+          <a:lstStyle/>
+          <a:p>
+            <a:pPr algn="ctr"/>
+            <a:r>
+              <a:rPr sz="950">
+                <a:solidFill>
+                  <a:srgbClr val="5A6472"/>
+                </a:solidFill>
+                <a:latin typeface="Calibri"/>
+              </a:rPr>
+              <a:t>Every figure in this deck is live on the prototype, refreshed nightly and reconciled against the ministry's own dashboard.</a:t>
+            </a:r>
+          </a:p>
+        </p:txBody>
+      </p:sp>
+      <p:sp>
+        <p:nvSpPr>
+          <p:cNvPr id="17416" name="Rounded Rectangle 17415">
+            <a:hlinkClick r:id="rId9"/>
+          </p:cNvPr>
+          <p:cNvSpPr/>
+          <p:nvPr/>
+        </p:nvSpPr>
+        <p:spPr>
+          <a:xfrm>
+            <a:off x="1984248" y="5902051"/>
+            <a:ext cx="2645664" cy="420624"/>
           </a:xfrm>
           <a:prstGeom prst="roundRect">
-            <a:avLst>
-              <a:gd name="adj" fmla="val 6000"/>
-            </a:avLst>
+            <a:avLst/>
           </a:prstGeom>
           <a:solidFill>
-            <a:srgbClr val="F5F7FA"/>
+            <a:srgbClr val="FFFFFF"/>
           </a:solidFill>
-          <a:ln w="9525">
+          <a:ln w="15875">
             <a:solidFill>
-              <a:srgbClr val="D6DCE5"/>
+              <a:srgbClr val="7A1A12"/>
             </a:solidFill>
           </a:ln>
           <a:effectLst/>
@@ -13024,34 +8924,57 @@
           </a:fontRef>
         </p:style>
         <p:txBody>
-          <a:bodyPr rtlCol="0" anchor="ctr"/>
+          <a:bodyPr rtlCol="0" anchor="ctr" wrap="square" lIns="54864" rIns="54864" tIns="0" bIns="0"/>
           <a:lstStyle/>
           <a:p>
             <a:pPr algn="ctr"/>
-          </a:p>
-        </p:txBody>
-      </p:sp>
-      <p:sp>
-        <p:nvSpPr>
-          <p:cNvPr id="17412" name="Rounded Rectangle 17411"/>
+            <a:r>
+              <a:rPr sz="1050" b="1">
+                <a:solidFill>
+                  <a:srgbClr val="7A1A12"/>
+                </a:solidFill>
+                <a:latin typeface="Calibri"/>
+              </a:rPr>
+              <a:t>DEMO VIDEO</a:t>
+            </a:r>
+          </a:p>
+          <a:p>
+            <a:pPr algn="ctr"/>
+            <a:r>
+              <a:rPr sz="750">
+                <a:solidFill>
+                  <a:srgbClr val="5A6472"/>
+                </a:solidFill>
+                <a:latin typeface="Calibri"/>
+              </a:rPr>
+              <a:t>2 minute walkthrough</a:t>
+            </a:r>
+          </a:p>
+        </p:txBody>
+      </p:sp>
+      <p:sp>
+        <p:nvSpPr>
+          <p:cNvPr id="17417" name="Rounded Rectangle 17416">
+            <a:hlinkClick r:id="rId6"/>
+          </p:cNvPr>
           <p:cNvSpPr/>
           <p:nvPr/>
         </p:nvSpPr>
         <p:spPr>
           <a:xfrm>
-            <a:off x="612648" y="1783080"/>
-            <a:ext cx="41148" cy="3520440"/>
+            <a:off x="4776215" y="5902051"/>
+            <a:ext cx="2645664" cy="420624"/>
           </a:xfrm>
           <a:prstGeom prst="roundRect">
-            <a:avLst>
-              <a:gd name="adj" fmla="val 6000"/>
-            </a:avLst>
+            <a:avLst/>
           </a:prstGeom>
           <a:solidFill>
-            <a:srgbClr val="0070C0"/>
+            <a:srgbClr val="FFFFFF"/>
           </a:solidFill>
-          <a:ln>
-            <a:noFill/>
+          <a:ln w="15875">
+            <a:solidFill>
+              <a:srgbClr val="7A1A12"/>
+            </a:solidFill>
           </a:ln>
           <a:effectLst/>
         </p:spPr>
@@ -13070,115 +8993,56 @@
           </a:fontRef>
         </p:style>
         <p:txBody>
-          <a:bodyPr rtlCol="0" anchor="ctr"/>
+          <a:bodyPr rtlCol="0" anchor="ctr" wrap="square" lIns="54864" rIns="54864" tIns="0" bIns="0"/>
           <a:lstStyle/>
           <a:p>
             <a:pPr algn="ctr"/>
-          </a:p>
-        </p:txBody>
-      </p:sp>
-      <p:sp>
-        <p:nvSpPr>
-          <p:cNvPr id="17413" name="TextBox 17412"/>
-          <p:cNvSpPr txBox="1"/>
-          <p:nvPr/>
-        </p:nvSpPr>
-        <p:spPr>
-          <a:xfrm>
-            <a:off x="813816" y="1929384"/>
-            <a:ext cx="5029200" cy="206247"/>
-          </a:xfrm>
-          <a:prstGeom prst="rect">
-            <a:avLst/>
-          </a:prstGeom>
-          <a:noFill/>
-        </p:spPr>
-        <p:txBody>
-          <a:bodyPr wrap="square" lIns="0" rIns="0" tIns="0" bIns="0">
-            <a:spAutoFit/>
-          </a:bodyPr>
-          <a:lstStyle/>
-          <a:p>
-            <a:pPr>
-              <a:lnSpc>
-                <a:spcPct val="116000"/>
-              </a:lnSpc>
-            </a:pPr>
-            <a:r>
-              <a:rPr sz="1400" b="1">
+            <a:r>
+              <a:rPr sz="1050" b="1">
                 <a:solidFill>
-                  <a:srgbClr val="101828"/>
+                  <a:srgbClr val="7A1A12"/>
                 </a:solidFill>
                 <a:latin typeface="Calibri"/>
               </a:rPr>
-              <a:t>The designated dataset, and what it serves</a:t>
-            </a:r>
-          </a:p>
-        </p:txBody>
-      </p:sp>
-      <p:sp>
-        <p:nvSpPr>
-          <p:cNvPr id="17414" name="TextBox 17413"/>
-          <p:cNvSpPr txBox="1"/>
-          <p:nvPr/>
-        </p:nvSpPr>
-        <p:spPr>
-          <a:xfrm>
-            <a:off x="813816" y="2217928"/>
-            <a:ext cx="5029200" cy="2633980"/>
-          </a:xfrm>
-          <a:prstGeom prst="rect">
-            <a:avLst/>
-          </a:prstGeom>
-          <a:noFill/>
-        </p:spPr>
-        <p:txBody>
-          <a:bodyPr wrap="square" lIns="0" rIns="0" tIns="0" bIns="0">
-            <a:spAutoFit/>
-          </a:bodyPr>
-          <a:lstStyle/>
-          <a:p>
-            <a:pPr>
-              <a:lnSpc>
-                <a:spcPct val="122000"/>
-              </a:lnSpc>
-            </a:pPr>
-            <a:r>
-              <a:rPr sz="1000" b="0">
+              <a:t>PROTOTYPE</a:t>
+            </a:r>
+          </a:p>
+          <a:p>
+            <a:pPr algn="ctr"/>
+            <a:r>
+              <a:rPr sz="750">
                 <a:solidFill>
                   <a:srgbClr val="5A6472"/>
                 </a:solidFill>
                 <a:latin typeface="Calibri"/>
               </a:rPr>
-              <a:t>The problem statement names mplads.mospi.gov.in. Its public interface, enumerated from its own JavaScript and called directly: totals, states, districts and member names are open to anyone. Works are not. Completed works come only through a citizen rating form that needs an SMS one-time password on an Indian mobile, returns one member's works in one ward per call, and is rate limited. Recommended works, payments and vendors are not served at all; every other path answers 302 to the login page.
-Empowered Indian republishes that record as machine-readable exports. Its own uploader reads the State Bank disbursement portal that MPLADS money is paid through, with a signed-in session cookie at one request every three seconds.
-So this system loads those exports - 250,839 works, 272,263 payments, 1,547 MP-terms, 776 districts, 62,969 vendors - and reconciles against the official endpoints on every refresh: five figures within 3.8%, every gap negative because our snapshot trails a portal that gains works overnight. 417 rows rejected and recorded, not silently dropped.</a:t>
-            </a:r>
-          </a:p>
-        </p:txBody>
-      </p:sp>
-      <p:sp>
-        <p:nvSpPr>
-          <p:cNvPr id="17415" name="Rounded Rectangle 17414"/>
+              <a:t>the running system</a:t>
+            </a:r>
+          </a:p>
+        </p:txBody>
+      </p:sp>
+      <p:sp>
+        <p:nvSpPr>
+          <p:cNvPr id="17418" name="Rounded Rectangle 17417">
+            <a:hlinkClick r:id="rId10"/>
+          </p:cNvPr>
           <p:cNvSpPr/>
           <p:nvPr/>
         </p:nvSpPr>
         <p:spPr>
           <a:xfrm>
-            <a:off x="6190488" y="1783080"/>
-            <a:ext cx="5394960" cy="3520440"/>
+            <a:off x="7568184" y="5902051"/>
+            <a:ext cx="2645664" cy="420624"/>
           </a:xfrm>
           <a:prstGeom prst="roundRect">
-            <a:avLst>
-              <a:gd name="adj" fmla="val 6000"/>
-            </a:avLst>
+            <a:avLst/>
           </a:prstGeom>
           <a:solidFill>
-            <a:srgbClr val="F5F7FA"/>
+            <a:srgbClr val="FFFFFF"/>
           </a:solidFill>
-          <a:ln w="9525">
+          <a:ln w="15875">
             <a:solidFill>
-              <a:srgbClr val="D6DCE5"/>
+              <a:srgbClr val="7A1A12"/>
             </a:solidFill>
           </a:ln>
           <a:effectLst/>
@@ -13198,224 +9062,30 @@
           </a:fontRef>
         </p:style>
         <p:txBody>
-          <a:bodyPr rtlCol="0" anchor="ctr"/>
+          <a:bodyPr rtlCol="0" anchor="ctr" wrap="square" lIns="54864" rIns="54864" tIns="0" bIns="0"/>
           <a:lstStyle/>
           <a:p>
             <a:pPr algn="ctr"/>
-          </a:p>
-        </p:txBody>
-      </p:sp>
-      <p:sp>
-        <p:nvSpPr>
-          <p:cNvPr id="17416" name="Rounded Rectangle 17415"/>
-          <p:cNvSpPr/>
-          <p:nvPr/>
-        </p:nvSpPr>
-        <p:spPr>
-          <a:xfrm>
-            <a:off x="6190488" y="1783080"/>
-            <a:ext cx="41148" cy="3520440"/>
-          </a:xfrm>
-          <a:prstGeom prst="roundRect">
-            <a:avLst>
-              <a:gd name="adj" fmla="val 6000"/>
-            </a:avLst>
-          </a:prstGeom>
-          <a:solidFill>
-            <a:srgbClr val="16704A"/>
-          </a:solidFill>
-          <a:ln>
-            <a:noFill/>
-          </a:ln>
-          <a:effectLst/>
-        </p:spPr>
-        <p:style>
-          <a:lnRef idx="1">
-            <a:schemeClr val="accent1"/>
-          </a:lnRef>
-          <a:fillRef idx="3">
-            <a:schemeClr val="accent1"/>
-          </a:fillRef>
-          <a:effectRef idx="2">
-            <a:schemeClr val="accent1"/>
-          </a:effectRef>
-          <a:fontRef idx="minor">
-            <a:schemeClr val="lt1"/>
-          </a:fontRef>
-        </p:style>
-        <p:txBody>
-          <a:bodyPr rtlCol="0" anchor="ctr"/>
-          <a:lstStyle/>
-          <a:p>
-            <a:pPr algn="ctr"/>
-          </a:p>
-        </p:txBody>
-      </p:sp>
-      <p:sp>
-        <p:nvSpPr>
-          <p:cNvPr id="17417" name="TextBox 17416"/>
-          <p:cNvSpPr txBox="1"/>
-          <p:nvPr/>
-        </p:nvSpPr>
-        <p:spPr>
-          <a:xfrm>
-            <a:off x="6391656" y="1929384"/>
-            <a:ext cx="5029200" cy="206247"/>
-          </a:xfrm>
-          <a:prstGeom prst="rect">
-            <a:avLst/>
-          </a:prstGeom>
-          <a:noFill/>
-        </p:spPr>
-        <p:txBody>
-          <a:bodyPr wrap="square" lIns="0" rIns="0" tIns="0" bIns="0">
-            <a:spAutoFit/>
-          </a:bodyPr>
-          <a:lstStyle/>
-          <a:p>
-            <a:pPr>
-              <a:lnSpc>
-                <a:spcPct val="116000"/>
-              </a:lnSpc>
-            </a:pPr>
-            <a:r>
-              <a:rPr sz="1400" b="1">
+            <a:r>
+              <a:rPr sz="1050" b="1">
                 <a:solidFill>
-                  <a:srgbClr val="101828"/>
+                  <a:srgbClr val="7A1A12"/>
                 </a:solidFill>
                 <a:latin typeface="Calibri"/>
               </a:rPr>
-              <a:t>Methods</a:t>
-            </a:r>
-          </a:p>
-        </p:txBody>
-      </p:sp>
-      <p:sp>
-        <p:nvSpPr>
-          <p:cNvPr id="17418" name="TextBox 17417"/>
-          <p:cNvSpPr txBox="1"/>
-          <p:nvPr/>
-        </p:nvSpPr>
-        <p:spPr>
-          <a:xfrm>
-            <a:off x="6391656" y="2217928"/>
-            <a:ext cx="5029200" cy="1874773"/>
-          </a:xfrm>
-          <a:prstGeom prst="rect">
-            <a:avLst/>
-          </a:prstGeom>
-          <a:noFill/>
-        </p:spPr>
-        <p:txBody>
-          <a:bodyPr wrap="square" lIns="0" rIns="0" tIns="0" bIns="0">
-            <a:spAutoFit/>
-          </a:bodyPr>
-          <a:lstStyle/>
-          <a:p>
-            <a:pPr>
-              <a:lnSpc>
-                <a:spcPct val="122000"/>
-              </a:lnSpc>
-            </a:pPr>
-            <a:r>
-              <a:rPr sz="1100" b="0">
+              <a:t>GITHUB</a:t>
+            </a:r>
+          </a:p>
+          <a:p>
+            <a:pPr algn="ctr"/>
+            <a:r>
+              <a:rPr sz="750">
                 <a:solidFill>
                   <a:srgbClr val="5A6472"/>
                 </a:solidFill>
                 <a:latin typeface="Calibri"/>
               </a:rPr>
-              <a:t>Liu, Ting and Zhou (2008), Isolation Forest — multivariate outliers over amount, delay and spend.
-Reimers and Gurevych (2019), Sentence-BERT — all-MiniLM-L6-v2 embeddings, cosine 0.94 within a district and sector, for duplicate sanctions.
-Newcomb-Benford first-digit law, with Nigrini's MAD — used peer-relative, because the population itself does not conform.
-Herfindahl-Hirschman Index - vendor concentration per implementing agency.
-MPLADS Guidelines, MoSPI - permissible works, sanction ceilings, entitlement per MP.</a:t>
-            </a:r>
-          </a:p>
-        </p:txBody>
-      </p:sp>
-      <p:sp>
-        <p:nvSpPr>
-          <p:cNvPr id="17419" name="Rounded Rectangle 17418"/>
-          <p:cNvSpPr/>
-          <p:nvPr/>
-        </p:nvSpPr>
-        <p:spPr>
-          <a:xfrm>
-            <a:off x="612648" y="5522976"/>
-            <a:ext cx="10972800" cy="658368"/>
-          </a:xfrm>
-          <a:prstGeom prst="roundRect">
-            <a:avLst>
-              <a:gd name="adj" fmla="val 6000"/>
-            </a:avLst>
-          </a:prstGeom>
-          <a:solidFill>
-            <a:srgbClr val="EAF2FB"/>
-          </a:solidFill>
-          <a:ln w="9525">
-            <a:solidFill>
-              <a:srgbClr val="BFDCF2"/>
-            </a:solidFill>
-          </a:ln>
-          <a:effectLst/>
-        </p:spPr>
-        <p:style>
-          <a:lnRef idx="1">
-            <a:schemeClr val="accent1"/>
-          </a:lnRef>
-          <a:fillRef idx="3">
-            <a:schemeClr val="accent1"/>
-          </a:fillRef>
-          <a:effectRef idx="2">
-            <a:schemeClr val="accent1"/>
-          </a:effectRef>
-          <a:fontRef idx="minor">
-            <a:schemeClr val="lt1"/>
-          </a:fontRef>
-        </p:style>
-        <p:txBody>
-          <a:bodyPr rtlCol="0" anchor="ctr"/>
-          <a:lstStyle/>
-          <a:p>
-            <a:pPr algn="ctr"/>
-          </a:p>
-        </p:txBody>
-      </p:sp>
-      <p:sp>
-        <p:nvSpPr>
-          <p:cNvPr id="17420" name="TextBox 17419"/>
-          <p:cNvSpPr txBox="1"/>
-          <p:nvPr/>
-        </p:nvSpPr>
-        <p:spPr>
-          <a:xfrm>
-            <a:off x="777240" y="5641848"/>
-            <a:ext cx="10643616" cy="457200"/>
-          </a:xfrm>
-          <a:prstGeom prst="rect">
-            <a:avLst/>
-          </a:prstGeom>
-          <a:noFill/>
-        </p:spPr>
-        <p:txBody>
-          <a:bodyPr wrap="square" lIns="0" rIns="0" tIns="0" bIns="0">
-            <a:spAutoFit/>
-          </a:bodyPr>
-          <a:lstStyle/>
-          <a:p>
-            <a:pPr>
-              <a:lnSpc>
-                <a:spcPct val="132000"/>
-              </a:lnSpc>
-            </a:pPr>
-            <a:r>
-              <a:rPr sz="1100" b="1">
-                <a:solidFill>
-                  <a:srgbClr val="00548F"/>
-                </a:solidFill>
-                <a:latin typeface="Consolas"/>
-              </a:rPr>
-              <a:t>Working prototype   mplads-risk-monitor-web.vercel.app          API   mplads-risk-monitor.vercel.app/api/overview          Source   github.com/fbivinay/SIH-HACKATHON</a:t>
+              <a:t>loader · scorer · API · tests</a:t>
             </a:r>
           </a:p>
         </p:txBody>

--- a/docs/deck/SIH26102-MPLADS-SIH-Idea.pptx
+++ b/docs/deck/SIH26102-MPLADS-SIH-Idea.pptx
@@ -6401,7 +6401,7 @@
         <p:spPr>
           <a:xfrm>
             <a:off x="612648" y="1783080"/>
-            <a:ext cx="8595360" cy="3671446"/>
+            <a:ext cx="8595360" cy="3696004"/>
           </a:xfrm>
           <a:prstGeom prst="rect">
             <a:avLst/>

--- a/docs/deck/SIH26102-MPLADS-SIH-Idea.pptx
+++ b/docs/deck/SIH26102-MPLADS-SIH-Idea.pptx
@@ -6114,7 +6114,7 @@
               <a:buChar char="v"/>
             </a:pPr>
             <a:r>
-              <a:rPr lang="en-US" sz="918" b="0" u="sng" dirty="0" i="1">
+              <a:rPr lang="en-US" sz="783" b="0" u="sng" dirty="0" i="1">
                 <a:solidFill>
                   <a:srgbClr val="5A6472"/>
                 </a:solidFill>
@@ -6181,7 +6181,7 @@
               <a:buChar char="•"/>
             </a:pPr>
             <a:r>
-              <a:rPr lang="en-US" sz="918" dirty="0" i="1" b="0">
+              <a:rPr lang="en-US" sz="783" dirty="0" i="1" b="0">
                 <a:solidFill>
                   <a:srgbClr val="5A6472"/>
                 </a:solidFill>
@@ -6203,7 +6203,7 @@
               <a:buChar char="•"/>
             </a:pPr>
             <a:r>
-              <a:rPr lang="en-US" sz="918" dirty="0" i="1" b="0">
+              <a:rPr lang="en-US" sz="783" dirty="0" i="1" b="0">
                 <a:solidFill>
                   <a:srgbClr val="5A6472"/>
                 </a:solidFill>
@@ -6225,7 +6225,7 @@
               <a:buChar char="•"/>
             </a:pPr>
             <a:r>
-              <a:rPr lang="en-US" sz="918" dirty="0" i="1" b="0">
+              <a:rPr lang="en-US" sz="783" dirty="0" i="1" b="0">
                 <a:solidFill>
                   <a:srgbClr val="5A6472"/>
                 </a:solidFill>
@@ -6400,87 +6400,26 @@
         </p:blipFill>
         <p:spPr>
           <a:xfrm>
-            <a:off x="612648" y="1783080"/>
-            <a:ext cx="8595360" cy="3696004"/>
+            <a:off x="908251" y="1783080"/>
+            <a:ext cx="10381593" cy="4014215"/>
           </a:xfrm>
           <a:prstGeom prst="rect">
             <a:avLst/>
           </a:prstGeom>
         </p:spPr>
       </p:pic>
-      <p:pic>
-        <p:nvPicPr>
-          <p:cNvPr id="15364" name="Picture 15363" descr="overview.png">
-            <a:hlinkClick r:id="rId6"/>
-          </p:cNvPr>
-          <p:cNvPicPr>
-            <a:picLocks noChangeAspect="1"/>
-          </p:cNvPicPr>
-          <p:nvPr/>
-        </p:nvPicPr>
-        <p:blipFill>
-          <a:blip r:embed="rId5"/>
-          <a:stretch>
-            <a:fillRect/>
-          </a:stretch>
-        </p:blipFill>
-        <p:spPr>
-          <a:xfrm>
-            <a:off x="9372600" y="1783080"/>
-            <a:ext cx="2359152" cy="1147137"/>
-          </a:xfrm>
-          <a:prstGeom prst="rect">
-            <a:avLst/>
-          </a:prstGeom>
-        </p:spPr>
-      </p:pic>
-      <p:sp>
-        <p:nvSpPr>
-          <p:cNvPr id="15365" name="TextBox 15364"/>
-          <p:cNvSpPr txBox="1"/>
-          <p:nvPr/>
-        </p:nvSpPr>
-        <p:spPr>
-          <a:xfrm>
-            <a:off x="9372600" y="2985081"/>
-            <a:ext cx="2359152" cy="237744"/>
-          </a:xfrm>
-          <a:prstGeom prst="rect">
-            <a:avLst/>
-          </a:prstGeom>
-          <a:noFill/>
-        </p:spPr>
-        <p:txBody>
-          <a:bodyPr wrap="square" lIns="0" rIns="0" tIns="0" bIns="0">
-            <a:spAutoFit/>
-          </a:bodyPr>
-          <a:lstStyle/>
-          <a:p>
-            <a:pPr algn="ctr"/>
-            <a:r>
-              <a:rPr sz="900">
-                <a:solidFill>
-                  <a:srgbClr val="5A6472"/>
-                </a:solidFill>
-                <a:latin typeface="Calibri"/>
-              </a:rPr>
-              <a:t>48,296 flagged of 2,50,839</a:t>
-            </a:r>
-          </a:p>
-        </p:txBody>
-      </p:sp>
-      <p:sp>
-        <p:nvSpPr>
-          <p:cNvPr id="15366" name="Rounded Rectangle 15365">
-            <a:hlinkClick r:id="rId7"/>
+      <p:sp>
+        <p:nvSpPr>
+          <p:cNvPr id="15364" name="Rounded Rectangle 15363">
+            <a:hlinkClick r:id="rId5"/>
           </p:cNvPr>
           <p:cNvSpPr/>
           <p:nvPr/>
         </p:nvSpPr>
         <p:spPr>
           <a:xfrm>
-            <a:off x="9372600" y="3259401"/>
-            <a:ext cx="2359152" cy="475488"/>
+            <a:off x="3815097" y="5897879"/>
+            <a:ext cx="1437289" cy="365760"/>
           </a:xfrm>
           <a:prstGeom prst="roundRect">
             <a:avLst/>
@@ -6515,7 +6454,7 @@
           <a:p>
             <a:pPr algn="ctr"/>
             <a:r>
-              <a:rPr sz="1000" b="1">
+              <a:rPr sz="950" b="1">
                 <a:solidFill>
                   <a:srgbClr val="7A1A12"/>
                 </a:solidFill>
@@ -6527,7 +6466,7 @@
           <a:p>
             <a:pPr algn="ctr"/>
             <a:r>
-              <a:rPr sz="700">
+              <a:rPr sz="650">
                 <a:solidFill>
                   <a:srgbClr val="5A6472"/>
                 </a:solidFill>
@@ -6540,7 +6479,7 @@
       </p:sp>
       <p:sp>
         <p:nvSpPr>
-          <p:cNvPr id="15367" name="Rounded Rectangle 15366">
+          <p:cNvPr id="15365" name="Rounded Rectangle 15364">
             <a:hlinkClick r:id="rId6"/>
           </p:cNvPr>
           <p:cNvSpPr/>
@@ -6548,8 +6487,8 @@
         </p:nvSpPr>
         <p:spPr>
           <a:xfrm>
-            <a:off x="9372600" y="3853761"/>
-            <a:ext cx="2359152" cy="475488"/>
+            <a:off x="5380403" y="5897879"/>
+            <a:ext cx="1437289" cy="365760"/>
           </a:xfrm>
           <a:prstGeom prst="roundRect">
             <a:avLst/>
@@ -6584,7 +6523,7 @@
           <a:p>
             <a:pPr algn="ctr"/>
             <a:r>
-              <a:rPr sz="1000" b="1">
+              <a:rPr sz="950" b="1">
                 <a:solidFill>
                   <a:srgbClr val="7A1A12"/>
                 </a:solidFill>
@@ -6596,7 +6535,7 @@
           <a:p>
             <a:pPr algn="ctr"/>
             <a:r>
-              <a:rPr sz="700">
+              <a:rPr sz="650">
                 <a:solidFill>
                   <a:srgbClr val="5A6472"/>
                 </a:solidFill>
@@ -6609,16 +6548,16 @@
       </p:sp>
       <p:sp>
         <p:nvSpPr>
-          <p:cNvPr id="15368" name="Rounded Rectangle 15367">
-            <a:hlinkClick r:id="rId8"/>
+          <p:cNvPr id="15366" name="Rounded Rectangle 15365">
+            <a:hlinkClick r:id="rId7"/>
           </p:cNvPr>
           <p:cNvSpPr/>
           <p:nvPr/>
         </p:nvSpPr>
         <p:spPr>
           <a:xfrm>
-            <a:off x="9372600" y="4448121"/>
-            <a:ext cx="2359152" cy="475488"/>
+            <a:off x="6945708" y="5897879"/>
+            <a:ext cx="1437289" cy="365760"/>
           </a:xfrm>
           <a:prstGeom prst="roundRect">
             <a:avLst/>
@@ -6653,7 +6592,7 @@
           <a:p>
             <a:pPr algn="ctr"/>
             <a:r>
-              <a:rPr sz="1000" b="1">
+              <a:rPr sz="950" b="1">
                 <a:solidFill>
                   <a:srgbClr val="7A1A12"/>
                 </a:solidFill>
@@ -6665,7 +6604,7 @@
           <a:p>
             <a:pPr algn="ctr"/>
             <a:r>
-              <a:rPr sz="700">
+              <a:rPr sz="650">
                 <a:solidFill>
                   <a:srgbClr val="5A6472"/>
                 </a:solidFill>
